--- a/fadori/presentacion/Fadori-STEAM.pptx
+++ b/fadori/presentacion/Fadori-STEAM.pptx
@@ -7,23 +7,11 @@
   <p:sldIdLst>
     <p:sldId id="256" r:id="rId6"/>
     <p:sldId id="257" r:id="rId7"/>
-    <p:sldId id="258" r:id="rId8"/>
-    <p:sldId id="259" r:id="rId9"/>
-    <p:sldId id="260" r:id="rId25"/>
-    <p:sldId id="261" r:id="rId10"/>
-    <p:sldId id="262" r:id="rId26"/>
-    <p:sldId id="263" r:id="rId11"/>
-    <p:sldId id="264" r:id="rId12"/>
-    <p:sldId id="265" r:id="rId13"/>
-    <p:sldId id="266" r:id="rId14"/>
-    <p:sldId id="267" r:id="rId15"/>
-    <p:sldId id="268" r:id="rId27"/>
-    <p:sldId id="269" r:id="rId28"/>
-    <p:sldId id="270" r:id="rId29"/>
-    <p:sldId id="271" r:id="rId30"/>
-    <p:sldId id="272" r:id="rId31"/>
-    <p:sldId id="273" r:id="rId32"/>
-    <p:sldId id="274" r:id="rId33"/>
+    <p:sldId id="258" r:id="rId9"/>
+    <p:sldId id="259" r:id="rId25"/>
+    <p:sldId id="260" r:id="rId11"/>
+    <p:sldId id="261" r:id="rId26"/>
+    <p:sldId id="262" r:id="rId27"/>
   </p:sldIdLst>
   <p:sldSz cx="18288000" cy="10287000"/>
   <p:notesSz cx="6858000" cy="9144000"/>
@@ -3883,488 +3871,6 @@
 </p:sld>
 </file>
 
-<file path=ppt/slides/slide10.xml><?xml version="1.0" encoding="utf-8"?>
-<p:sld xmlns:p="http://schemas.openxmlformats.org/presentationml/2006/main" xmlns:a="http://schemas.openxmlformats.org/drawingml/2006/main" xmlns:r="http://schemas.openxmlformats.org/officeDocument/2006/relationships">
-  <p:cSld>
-    <p:bg>
-      <p:bgPr>
-        <a:solidFill>
-          <a:srgbClr val="07416B"/>
-        </a:solidFill>
-      </p:bgPr>
-    </p:bg>
-    <p:spTree>
-      <p:nvGrpSpPr>
-        <p:cNvPr id="1" name=""/>
-        <p:cNvGrpSpPr/>
-        <p:nvPr/>
-      </p:nvGrpSpPr>
-      <p:grpSpPr>
-        <a:xfrm>
-          <a:off x="0" y="0"/>
-          <a:ext cx="0" cy="0"/>
-          <a:chOff x="0" y="0"/>
-          <a:chExt cx="0" cy="0"/>
-        </a:xfrm>
-      </p:grpSpPr>
-      <p:sp>
-        <p:nvSpPr>
-          <p:cNvPr name="TextBox 2" id="2"/>
-          <p:cNvSpPr txBox="true"/>
-          <p:nvPr/>
-        </p:nvSpPr>
-        <p:spPr>
-          <a:xfrm rot="0">
-            <a:off x="2615184" y="3840480"/>
-            <a:ext cx="12801600" cy="2377440"/>
-          </a:xfrm>
-          <a:prstGeom prst="rect">
-            <a:avLst/>
-          </a:prstGeom>
-        </p:spPr>
-        <p:txBody>
-          <a:bodyPr anchor="t" rtlCol="false" tIns="0" lIns="0" bIns="0" rIns="0">
-            <a:spAutoFit/>
-          </a:bodyPr>
-          <a:lstStyle/>
-          <a:p>
-            <a:pPr algn="ctr">
-              <a:lnSpc>
-                <a:spcPts val="5162"/>
-              </a:lnSpc>
-              <a:spcBef>
-                <a:spcPct val="0"/>
-              </a:spcBef>
-            </a:pPr>
-          </a:p>
-          <a:p>
-            <a:pPr algn="l">
-              <a:lnSpc>
-                <a:spcPts val="5162"/>
-              </a:lnSpc>
-              <a:spcBef>
-                <a:spcPct val="0"/>
-              </a:spcBef>
-            </a:pPr>
-            <a:r>
-              <a:rPr lang="en-US" b="true" sz="3687">
-                <a:solidFill>
-                  <a:srgbClr val="FFFFFF"/>
-                </a:solidFill>
-                <a:latin typeface="Montaser Arabic Medium"/>
-                <a:ea typeface="Montaser Arabic Medium"/>
-                <a:cs typeface="Montaser Arabic Medium"/>
-                <a:sym typeface="Montaser Arabic Medium"/>
-              </a:rPr>
-              <a:t>Menos tiempo de espera</a:t>
-            </a:r>
-          </a:p>
-          <a:p>
-            <a:pPr algn="l">
-              <a:lnSpc>
-                <a:spcPts val="5162"/>
-              </a:lnSpc>
-              <a:spcBef>
-                <a:spcPct val="0"/>
-              </a:spcBef>
-            </a:pPr>
-          </a:p>
-          <a:p>
-            <a:pPr algn="l">
-              <a:lnSpc>
-                <a:spcPts val="5162"/>
-              </a:lnSpc>
-              <a:spcBef>
-                <a:spcPct val="0"/>
-              </a:spcBef>
-            </a:pPr>
-            <a:r>
-              <a:rPr lang="en-US" b="true" sz="3687">
-                <a:solidFill>
-                  <a:srgbClr val="FFFFFF"/>
-                </a:solidFill>
-                <a:latin typeface="Montaser Arabic Medium"/>
-                <a:ea typeface="Montaser Arabic Medium"/>
-                <a:cs typeface="Montaser Arabic Medium"/>
-                <a:sym typeface="Montaser Arabic Medium"/>
-              </a:rPr>
-              <a:t>Bajar la fila a la mitad</a:t>
-            </a:r>
-          </a:p>
-          <a:p>
-            <a:pPr algn="l">
-              <a:lnSpc>
-                <a:spcPts val="5162"/>
-              </a:lnSpc>
-              <a:spcBef>
-                <a:spcPct val="0"/>
-              </a:spcBef>
-            </a:pPr>
-          </a:p>
-          <a:p>
-            <a:pPr algn="l">
-              <a:lnSpc>
-                <a:spcPts val="5162"/>
-              </a:lnSpc>
-              <a:spcBef>
-                <a:spcPct val="0"/>
-              </a:spcBef>
-            </a:pPr>
-            <a:r>
-              <a:rPr lang="en-US" b="true" sz="3687">
-                <a:solidFill>
-                  <a:srgbClr val="FFFFFF"/>
-                </a:solidFill>
-                <a:latin typeface="Montaser Arabic Medium"/>
-                <a:ea typeface="Montaser Arabic Medium"/>
-                <a:cs typeface="Montaser Arabic Medium"/>
-                <a:sym typeface="Montaser Arabic Medium"/>
-              </a:rPr>
-              <a:t/>
-            </a:r>
-          </a:p>
-          <a:p>
-            <a:pPr algn="l">
-              <a:lnSpc>
-                <a:spcPts val="5162"/>
-              </a:lnSpc>
-              <a:spcBef>
-                <a:spcPct val="0"/>
-              </a:spcBef>
-            </a:pPr>
-          </a:p>
-          <a:p>
-            <a:pPr algn="l">
-              <a:lnSpc>
-                <a:spcPts val="5162"/>
-              </a:lnSpc>
-              <a:spcBef>
-                <a:spcPct val="0"/>
-              </a:spcBef>
-            </a:pPr>
-            <a:r>
-              <a:rPr lang="en-US" b="true" sz="3687">
-                <a:solidFill>
-                  <a:srgbClr val="FFFFFF"/>
-                </a:solidFill>
-                <a:latin typeface="Montaser Arabic Medium"/>
-                <a:ea typeface="Montaser Arabic Medium"/>
-                <a:cs typeface="Montaser Arabic Medium"/>
-                <a:sym typeface="Montaser Arabic Medium"/>
-              </a:rPr>
-              <a:t/>
-            </a:r>
-          </a:p>
-          <a:p>
-            <a:pPr algn="l">
-              <a:lnSpc>
-                <a:spcPts val="5162"/>
-              </a:lnSpc>
-              <a:spcBef>
-                <a:spcPct val="0"/>
-              </a:spcBef>
-            </a:pPr>
-          </a:p>
-          <a:p>
-            <a:pPr algn="l">
-              <a:lnSpc>
-                <a:spcPts val="5162"/>
-              </a:lnSpc>
-              <a:spcBef>
-                <a:spcPct val="0"/>
-              </a:spcBef>
-            </a:pPr>
-            <a:r>
-              <a:rPr lang="en-US" b="true" sz="3687">
-                <a:solidFill>
-                  <a:srgbClr val="FFFFFF"/>
-                </a:solidFill>
-                <a:latin typeface="Montaser Arabic Medium"/>
-                <a:ea typeface="Montaser Arabic Medium"/>
-                <a:cs typeface="Montaser Arabic Medium"/>
-                <a:sym typeface="Montaser Arabic Medium"/>
-              </a:rPr>
-              <a:t/>
-            </a:r>
-          </a:p>
-        </p:txBody>
-      </p:sp>
-      <p:sp>
-        <p:nvSpPr>
-          <p:cNvPr name="Freeform 3" id="3"/>
-          <p:cNvSpPr/>
-          <p:nvPr/>
-        </p:nvSpPr>
-        <p:spPr>
-          <a:xfrm flipH="false" flipV="false" rot="0">
-            <a:off x="12629093" y="5143500"/>
-            <a:ext cx="5658907" cy="5143500"/>
-          </a:xfrm>
-          <a:custGeom>
-            <a:avLst/>
-            <a:gdLst/>
-            <a:ahLst/>
-            <a:cxnLst/>
-            <a:rect r="r" b="b" t="t" l="l"/>
-            <a:pathLst>
-              <a:path h="5143500" w="5658907">
-                <a:moveTo>
-                  <a:pt x="0" y="0"/>
-                </a:moveTo>
-                <a:lnTo>
-                  <a:pt x="5658907" y="0"/>
-                </a:lnTo>
-                <a:lnTo>
-                  <a:pt x="5658907" y="5143500"/>
-                </a:lnTo>
-                <a:lnTo>
-                  <a:pt x="0" y="5143500"/>
-                </a:lnTo>
-                <a:lnTo>
-                  <a:pt x="0" y="0"/>
-                </a:lnTo>
-                <a:close/>
-              </a:path>
-            </a:pathLst>
-          </a:custGeom>
-          <a:blipFill>
-            <a:blip r:embed="rId2">
-              <a:extLst>
-                <a:ext uri="{96DAC541-7B7A-43D3-8B79-37D633B846F1}">
-                  <asvg:svgBlip xmlns:asvg="http://schemas.microsoft.com/office/drawing/2016/SVG/main" r:embed="rId3"/>
-                </a:ext>
-              </a:extLst>
-            </a:blip>
-            <a:stretch>
-              <a:fillRect l="0" t="-110" r="0" b="-110"/>
-            </a:stretch>
-          </a:blipFill>
-        </p:spPr>
-      </p:sp>
-      <p:sp>
-        <p:nvSpPr>
-          <p:cNvPr name="Freeform 4" id="4"/>
-          <p:cNvSpPr/>
-          <p:nvPr/>
-        </p:nvSpPr>
-        <p:spPr>
-          <a:xfrm flipH="false" flipV="true" rot="-5400000">
-            <a:off x="1526191" y="-1466126"/>
-            <a:ext cx="2794159" cy="5846531"/>
-          </a:xfrm>
-          <a:custGeom>
-            <a:avLst/>
-            <a:gdLst/>
-            <a:ahLst/>
-            <a:cxnLst/>
-            <a:rect r="r" b="b" t="t" l="l"/>
-            <a:pathLst>
-              <a:path h="5846531" w="2794159">
-                <a:moveTo>
-                  <a:pt x="0" y="5846531"/>
-                </a:moveTo>
-                <a:lnTo>
-                  <a:pt x="2794159" y="5846531"/>
-                </a:lnTo>
-                <a:lnTo>
-                  <a:pt x="2794159" y="0"/>
-                </a:lnTo>
-                <a:lnTo>
-                  <a:pt x="0" y="0"/>
-                </a:lnTo>
-                <a:lnTo>
-                  <a:pt x="0" y="5846531"/>
-                </a:lnTo>
-                <a:close/>
-              </a:path>
-            </a:pathLst>
-          </a:custGeom>
-          <a:blipFill>
-            <a:blip r:embed="rId4">
-              <a:extLst>
-                <a:ext uri="{96DAC541-7B7A-43D3-8B79-37D633B846F1}">
-                  <asvg:svgBlip xmlns:asvg="http://schemas.microsoft.com/office/drawing/2016/SVG/main" r:embed="rId5"/>
-                </a:ext>
-              </a:extLst>
-            </a:blip>
-            <a:stretch>
-              <a:fillRect l="-95" t="0" r="-95" b="0"/>
-            </a:stretch>
-          </a:blipFill>
-        </p:spPr>
-      </p:sp>
-      <p:sp>
-        <p:nvSpPr>
-          <p:cNvPr name="Freeform 5" id="5"/>
-          <p:cNvSpPr/>
-          <p:nvPr/>
-        </p:nvSpPr>
-        <p:spPr>
-          <a:xfrm flipH="false" flipV="false" rot="5400000">
-            <a:off x="-1453324" y="8044625"/>
-            <a:ext cx="4527366" cy="1011107"/>
-          </a:xfrm>
-          <a:custGeom>
-            <a:avLst/>
-            <a:gdLst/>
-            <a:ahLst/>
-            <a:cxnLst/>
-            <a:rect r="r" b="b" t="t" l="l"/>
-            <a:pathLst>
-              <a:path h="1011107" w="4527366">
-                <a:moveTo>
-                  <a:pt x="0" y="0"/>
-                </a:moveTo>
-                <a:lnTo>
-                  <a:pt x="4527365" y="0"/>
-                </a:lnTo>
-                <a:lnTo>
-                  <a:pt x="4527365" y="1011107"/>
-                </a:lnTo>
-                <a:lnTo>
-                  <a:pt x="0" y="1011107"/>
-                </a:lnTo>
-                <a:lnTo>
-                  <a:pt x="0" y="0"/>
-                </a:lnTo>
-                <a:close/>
-              </a:path>
-            </a:pathLst>
-          </a:custGeom>
-          <a:blipFill>
-            <a:blip r:embed="rId6">
-              <a:extLst>
-                <a:ext uri="{96DAC541-7B7A-43D3-8B79-37D633B846F1}">
-                  <asvg:svgBlip xmlns:asvg="http://schemas.microsoft.com/office/drawing/2016/SVG/main" r:embed="rId7"/>
-                </a:ext>
-              </a:extLst>
-            </a:blip>
-            <a:stretch>
-              <a:fillRect l="0" t="-325" r="0" b="-326"/>
-            </a:stretch>
-          </a:blipFill>
-        </p:spPr>
-      </p:sp>
-      <p:sp>
-        <p:nvSpPr>
-          <p:cNvPr name="Freeform 6" id="6"/>
-          <p:cNvSpPr/>
-          <p:nvPr/>
-        </p:nvSpPr>
-        <p:spPr>
-          <a:xfrm flipH="false" flipV="false" rot="5400000">
-            <a:off x="15158276" y="1415224"/>
-            <a:ext cx="4527366" cy="1011107"/>
-          </a:xfrm>
-          <a:custGeom>
-            <a:avLst/>
-            <a:gdLst/>
-            <a:ahLst/>
-            <a:cxnLst/>
-            <a:rect r="r" b="b" t="t" l="l"/>
-            <a:pathLst>
-              <a:path h="1011107" w="4527366">
-                <a:moveTo>
-                  <a:pt x="0" y="0"/>
-                </a:moveTo>
-                <a:lnTo>
-                  <a:pt x="4527365" y="0"/>
-                </a:lnTo>
-                <a:lnTo>
-                  <a:pt x="4527365" y="1011108"/>
-                </a:lnTo>
-                <a:lnTo>
-                  <a:pt x="0" y="1011108"/>
-                </a:lnTo>
-                <a:lnTo>
-                  <a:pt x="0" y="0"/>
-                </a:lnTo>
-                <a:close/>
-              </a:path>
-            </a:pathLst>
-          </a:custGeom>
-          <a:blipFill>
-            <a:blip r:embed="rId6">
-              <a:extLst>
-                <a:ext uri="{96DAC541-7B7A-43D3-8B79-37D633B846F1}">
-                  <asvg:svgBlip xmlns:asvg="http://schemas.microsoft.com/office/drawing/2016/SVG/main" r:embed="rId7"/>
-                </a:ext>
-              </a:extLst>
-            </a:blip>
-            <a:stretch>
-              <a:fillRect l="0" t="-325" r="0" b="-326"/>
-            </a:stretch>
-          </a:blipFill>
-        </p:spPr>
-      </p:sp>
-      <p:sp>
-        <p:nvSpPr>
-          <p:cNvPr name="TextBox 7" id="7"/>
-          <p:cNvSpPr txBox="true"/>
-          <p:nvPr/>
-        </p:nvSpPr>
-        <p:spPr>
-          <a:xfrm rot="0">
-            <a:off x="3840480" y="914400"/>
-            <a:ext cx="11338560" cy="2203704"/>
-          </a:xfrm>
-          <a:prstGeom prst="rect">
-            <a:avLst/>
-          </a:prstGeom>
-        </p:spPr>
-        <p:txBody>
-          <a:bodyPr anchor="t" rtlCol="false" tIns="0" lIns="0" bIns="0" rIns="0">
-            <a:spAutoFit/>
-          </a:bodyPr>
-          <a:lstStyle/>
-          <a:p>
-            <a:pPr algn="ctr">
-              <a:lnSpc>
-                <a:spcPts val="12880"/>
-              </a:lnSpc>
-            </a:pPr>
-            <a:r>
-              <a:rPr lang="en-US" sz="6200" b="true">
-                <a:solidFill>
-                  <a:srgbClr val="FFFFFF"/>
-                </a:solidFill>
-                <a:latin typeface="Open Sans Bold"/>
-                <a:ea typeface="Open Sans Bold"/>
-                <a:cs typeface="Open Sans Bold"/>
-                <a:sym typeface="Open Sans Bold"/>
-              </a:rPr>
-              <a:t>Impacto Esperado</a:t>
-            </a:r>
-          </a:p>
-          <a:p>
-            <a:pPr algn="ctr">
-              <a:lnSpc>
-                <a:spcPts val="4480"/>
-              </a:lnSpc>
-            </a:pPr>
-            <a:r>
-              <a:rPr lang="en-US" sz="3200">
-                <a:solidFill>
-                  <a:srgbClr val="FFFFFF"/>
-                </a:solidFill>
-                <a:latin typeface="Open Sans"/>
-                <a:ea typeface="Open Sans"/>
-                <a:cs typeface="Open Sans"/>
-                <a:sym typeface="Open Sans"/>
-              </a:rPr>
-              <a:t>Propósito específico </a:t>
-            </a:r>
-          </a:p>
-        </p:txBody>
-      </p:sp>
-    </p:spTree>
-  </p:cSld>
-  <p:clrMapOvr>
-    <a:masterClrMapping/>
-  </p:clrMapOvr>
-</p:sld>
-</file>
-
 <file path=ppt/slides/slide11.xml><?xml version="1.0" encoding="utf-8"?>
 <p:sld xmlns:p="http://schemas.openxmlformats.org/presentationml/2006/main" xmlns:a="http://schemas.openxmlformats.org/drawingml/2006/main" xmlns:r="http://schemas.openxmlformats.org/officeDocument/2006/relationships">
   <p:cSld>
@@ -4633,7 +4139,7 @@
                 <a:cs typeface="Open Sans Bold"/>
                 <a:sym typeface="Open Sans Bold"/>
               </a:rPr>
-              <a:t>¿Qué es Fadori?</a:t>
+              <a:t>¿Cómo funciona?</a:t>
             </a:r>
           </a:p>
         </p:txBody>
@@ -4646,8 +4152,8 @@
         </p:nvSpPr>
         <p:spPr>
           <a:xfrm rot="0">
-            <a:off x="1737360" y="3017520"/>
-            <a:ext cx="7406640" cy="2377440"/>
+            <a:off x="2432304" y="2286000"/>
+            <a:ext cx="14164056" cy="1143000"/>
           </a:xfrm>
           <a:prstGeom prst="rect">
             <a:avLst/>
@@ -4674,7 +4180,7 @@
                 <a:cs typeface="Montaser Arabic Bold"/>
                 <a:sym typeface="Montaser Arabic Bold"/>
               </a:rPr>
-              <a:t>App que ordena la cafetería sin filas.</a:t>
+              <a:t>Dejas tu pedido, recibes turno, vas cuando esté listo.</a:t>
             </a:r>
           </a:p>
         </p:txBody>
@@ -4695,8 +4201,66 @@
         </p:blipFill>
         <p:spPr>
           <a:xfrm>
-            <a:off x="11624992" y="3154680"/>
-            <a:ext cx="3999135" cy="6400800"/>
+            <a:off x="2194560" y="4590991"/>
+            <a:ext cx="3108960" cy="5046081"/>
+          </a:xfrm>
+          <a:prstGeom prst="rect">
+            <a:avLst/>
+          </a:prstGeom>
+          <a:ln w="28575">
+            <a:solidFill>
+              <a:srgbClr val="FFFFFF"/>
+            </a:solidFill>
+          </a:ln>
+        </p:spPr>
+      </p:pic>
+      <p:pic>
+        <p:nvPicPr>
+          <p:cNvPr id="902" name="Fadori 2"/>
+          <p:cNvPicPr>
+            <a:picLocks noChangeAspect="1"/>
+          </p:cNvPicPr>
+          <p:nvPr/>
+        </p:nvPicPr>
+        <p:blipFill>
+          <a:blip r:embed="rId9"/>
+          <a:stretch>
+            <a:fillRect/>
+          </a:stretch>
+        </p:blipFill>
+        <p:spPr>
+          <a:xfrm>
+            <a:off x="6897403" y="4480560"/>
+            <a:ext cx="3761673" cy="4398264"/>
+          </a:xfrm>
+          <a:prstGeom prst="rect">
+            <a:avLst/>
+          </a:prstGeom>
+          <a:ln w="28575">
+            <a:solidFill>
+              <a:srgbClr val="FFFFFF"/>
+            </a:solidFill>
+          </a:ln>
+        </p:spPr>
+      </p:pic>
+      <p:pic>
+        <p:nvPicPr>
+          <p:cNvPr id="903" name="Fadori 3"/>
+          <p:cNvPicPr>
+            <a:picLocks noChangeAspect="1"/>
+          </p:cNvPicPr>
+          <p:nvPr/>
+        </p:nvPicPr>
+        <p:blipFill>
+          <a:blip r:embed="rId10"/>
+          <a:stretch>
+            <a:fillRect/>
+          </a:stretch>
+        </p:blipFill>
+        <p:spPr>
+          <a:xfrm>
+            <a:off x="11704320" y="4480560"/>
+            <a:ext cx="5120640" cy="2880360"/>
           </a:xfrm>
           <a:prstGeom prst="rect">
             <a:avLst/>
@@ -4956,8 +4520,8 @@
         </p:nvSpPr>
         <p:spPr>
           <a:xfrm rot="0">
-            <a:off x="1737360" y="777240"/>
-            <a:ext cx="14813280" cy="1417320"/>
+            <a:off x="6126480" y="777240"/>
+            <a:ext cx="10607040" cy="1417320"/>
           </a:xfrm>
           <a:prstGeom prst="rect">
             <a:avLst/>
@@ -4984,7 +4548,7 @@
                 <a:cs typeface="Open Sans Bold"/>
                 <a:sym typeface="Open Sans Bold"/>
               </a:rPr>
-              <a:t>¿Cómo funciona?</a:t>
+              <a:t>STEAM en Fadori</a:t>
             </a:r>
           </a:p>
         </p:txBody>
@@ -4997,8 +4561,8 @@
         </p:nvSpPr>
         <p:spPr>
           <a:xfrm rot="0">
-            <a:off x="2432304" y="2286000"/>
-            <a:ext cx="14164056" cy="1143000"/>
+            <a:off x="2011680" y="2331720"/>
+            <a:ext cx="14630400" cy="1005840"/>
           </a:xfrm>
           <a:prstGeom prst="rect">
             <a:avLst/>
@@ -5025,14 +4589,14 @@
                 <a:cs typeface="Montaser Arabic Bold"/>
                 <a:sym typeface="Montaser Arabic Bold"/>
               </a:rPr>
-              <a:t>Dejas tu pedido, recibes turno, vas cuando esté listo.</a:t>
+              <a:t>S medir · T programar · E ordenar · A diseñar · M calcular</a:t>
             </a:r>
           </a:p>
         </p:txBody>
       </p:sp>
       <p:pic>
         <p:nvPicPr>
-          <p:cNvPr id="902" name="Fadori 2"/>
+          <p:cNvPr id="904" name="Fadori 4"/>
           <p:cNvPicPr>
             <a:picLocks noChangeAspect="1"/>
           </p:cNvPicPr>
@@ -5046,8 +4610,8 @@
         </p:blipFill>
         <p:spPr>
           <a:xfrm>
-            <a:off x="2194560" y="4626015"/>
-            <a:ext cx="3108960" cy="4976033"/>
+            <a:off x="2011680" y="5323360"/>
+            <a:ext cx="2743200" cy="1423358"/>
           </a:xfrm>
           <a:prstGeom prst="rect">
             <a:avLst/>
@@ -5061,7 +4625,7 @@
       </p:pic>
       <p:pic>
         <p:nvPicPr>
-          <p:cNvPr id="903" name="Fadori 3"/>
+          <p:cNvPr id="905" name="Fadori 5"/>
           <p:cNvPicPr>
             <a:picLocks noChangeAspect="1"/>
           </p:cNvPicPr>
@@ -5075,8 +4639,8 @@
         </p:blipFill>
         <p:spPr>
           <a:xfrm>
-            <a:off x="6767552" y="4480560"/>
-            <a:ext cx="4021374" cy="4398264"/>
+            <a:off x="4983480" y="4431323"/>
+            <a:ext cx="2743200" cy="3207433"/>
           </a:xfrm>
           <a:prstGeom prst="rect">
             <a:avLst/>
@@ -5090,7 +4654,7 @@
       </p:pic>
       <p:pic>
         <p:nvPicPr>
-          <p:cNvPr id="904" name="Fadori 4"/>
+          <p:cNvPr id="906" name="Fadori 6"/>
           <p:cNvPicPr>
             <a:picLocks noChangeAspect="1"/>
           </p:cNvPicPr>
@@ -5104,8 +4668,66 @@
         </p:blipFill>
         <p:spPr>
           <a:xfrm>
-            <a:off x="11704320" y="4480560"/>
-            <a:ext cx="5120640" cy="2880360"/>
+            <a:off x="7955279" y="4876621"/>
+            <a:ext cx="2926080" cy="2316837"/>
+          </a:xfrm>
+          <a:prstGeom prst="rect">
+            <a:avLst/>
+          </a:prstGeom>
+          <a:ln w="28575">
+            <a:solidFill>
+              <a:srgbClr val="FFFFFF"/>
+            </a:solidFill>
+          </a:ln>
+        </p:spPr>
+      </p:pic>
+      <p:pic>
+        <p:nvPicPr>
+          <p:cNvPr id="907" name="Fadori 7"/>
+          <p:cNvPicPr>
+            <a:picLocks noChangeAspect="1"/>
+          </p:cNvPicPr>
+          <p:nvPr/>
+        </p:nvPicPr>
+        <p:blipFill>
+          <a:blip r:embed="rId11"/>
+          <a:stretch>
+            <a:fillRect/>
+          </a:stretch>
+        </p:blipFill>
+        <p:spPr>
+          <a:xfrm>
+            <a:off x="11109960" y="4684767"/>
+            <a:ext cx="2743200" cy="2700545"/>
+          </a:xfrm>
+          <a:prstGeom prst="rect">
+            <a:avLst/>
+          </a:prstGeom>
+          <a:ln w="28575">
+            <a:solidFill>
+              <a:srgbClr val="FFFFFF"/>
+            </a:solidFill>
+          </a:ln>
+        </p:spPr>
+      </p:pic>
+      <p:pic>
+        <p:nvPicPr>
+          <p:cNvPr id="908" name="Fadori 8"/>
+          <p:cNvPicPr>
+            <a:picLocks noChangeAspect="1"/>
+          </p:cNvPicPr>
+          <p:nvPr/>
+        </p:nvPicPr>
+        <p:blipFill>
+          <a:blip r:embed="rId12"/>
+          <a:stretch>
+            <a:fillRect/>
+          </a:stretch>
+        </p:blipFill>
+        <p:spPr>
+          <a:xfrm>
+            <a:off x="14081760" y="5526292"/>
+            <a:ext cx="2743200" cy="1017494"/>
           </a:xfrm>
           <a:prstGeom prst="rect">
             <a:avLst/>
@@ -5365,8 +4987,8 @@
         </p:nvSpPr>
         <p:spPr>
           <a:xfrm rot="0">
-            <a:off x="1737360" y="777240"/>
-            <a:ext cx="14813280" cy="1417320"/>
+            <a:off x="6126480" y="777240"/>
+            <a:ext cx="10607040" cy="1417320"/>
           </a:xfrm>
           <a:prstGeom prst="rect">
             <a:avLst/>
@@ -5393,7 +5015,7 @@
                 <a:cs typeface="Open Sans Bold"/>
                 <a:sym typeface="Open Sans Bold"/>
               </a:rPr>
-              <a:t>Enfoque</a:t>
+              <a:t>Estado actual</a:t>
             </a:r>
           </a:p>
         </p:txBody>
@@ -5406,8 +5028,8 @@
         </p:nvSpPr>
         <p:spPr>
           <a:xfrm rot="0">
-            <a:off x="1737360" y="3017520"/>
-            <a:ext cx="7406640" cy="2377440"/>
+            <a:off x="2011680" y="2331720"/>
+            <a:ext cx="14630400" cy="1005840"/>
           </a:xfrm>
           <a:prstGeom prst="rect">
             <a:avLst/>
@@ -5434,1411 +5056,7 @@
                 <a:cs typeface="Montaser Arabic Bold"/>
                 <a:sym typeface="Montaser Arabic Bold"/>
               </a:rPr>
-              <a:t>Cuantitativo y deductivo: medimos tiempos y comprobamos la hipótesis.</a:t>
-            </a:r>
-          </a:p>
-        </p:txBody>
-      </p:sp>
-      <p:pic>
-        <p:nvPicPr>
-          <p:cNvPr id="905" name="Fadori 5"/>
-          <p:cNvPicPr>
-            <a:picLocks noChangeAspect="1"/>
-          </p:cNvPicPr>
-          <p:nvPr/>
-        </p:nvPicPr>
-        <p:blipFill>
-          <a:blip r:embed="rId8"/>
-          <a:stretch>
-            <a:fillRect/>
-          </a:stretch>
-        </p:blipFill>
-        <p:spPr>
-          <a:xfrm>
-            <a:off x="9692640" y="4041858"/>
-            <a:ext cx="7315200" cy="3712043"/>
-          </a:xfrm>
-          <a:prstGeom prst="rect">
-            <a:avLst/>
-          </a:prstGeom>
-          <a:ln w="28575">
-            <a:solidFill>
-              <a:srgbClr val="FFFFFF"/>
-            </a:solidFill>
-          </a:ln>
-        </p:spPr>
-      </p:pic>
-    </p:spTree>
-  </p:cSld>
-  <p:clrMapOvr>
-    <a:masterClrMapping/>
-  </p:clrMapOvr>
-</p:sld>
-</file>
-
-<file path=ppt/slides/slide14.xml><?xml version="1.0" encoding="utf-8"?>
-<p:sld xmlns:p="http://schemas.openxmlformats.org/presentationml/2006/main" xmlns:a="http://schemas.openxmlformats.org/drawingml/2006/main" xmlns:r="http://schemas.openxmlformats.org/officeDocument/2006/relationships">
-  <p:cSld>
-    <p:bg>
-      <p:bgPr>
-        <a:solidFill>
-          <a:srgbClr val="07416B"/>
-        </a:solidFill>
-      </p:bgPr>
-    </p:bg>
-    <p:spTree>
-      <p:nvGrpSpPr>
-        <p:cNvPr id="1" name=""/>
-        <p:cNvGrpSpPr/>
-        <p:nvPr/>
-      </p:nvGrpSpPr>
-      <p:grpSpPr>
-        <a:xfrm>
-          <a:off x="0" y="0"/>
-          <a:ext cx="0" cy="0"/>
-          <a:chOff x="0" y="0"/>
-          <a:chExt cx="0" cy="0"/>
-        </a:xfrm>
-      </p:grpSpPr>
-      <p:sp>
-        <p:nvSpPr>
-          <p:cNvPr name="Freeform 2" id="2"/>
-          <p:cNvSpPr/>
-          <p:nvPr/>
-        </p:nvSpPr>
-        <p:spPr>
-          <a:xfrm flipH="false" flipV="false" rot="0">
-            <a:off x="12629093" y="5143500"/>
-            <a:ext cx="5658907" cy="5143500"/>
-          </a:xfrm>
-          <a:custGeom>
-            <a:avLst/>
-            <a:gdLst/>
-            <a:ahLst/>
-            <a:cxnLst/>
-            <a:rect r="r" b="b" t="t" l="l"/>
-            <a:pathLst>
-              <a:path h="5143500" w="5658907">
-                <a:moveTo>
-                  <a:pt x="0" y="0"/>
-                </a:moveTo>
-                <a:lnTo>
-                  <a:pt x="5658907" y="0"/>
-                </a:lnTo>
-                <a:lnTo>
-                  <a:pt x="5658907" y="5143500"/>
-                </a:lnTo>
-                <a:lnTo>
-                  <a:pt x="0" y="5143500"/>
-                </a:lnTo>
-                <a:lnTo>
-                  <a:pt x="0" y="0"/>
-                </a:lnTo>
-                <a:close/>
-              </a:path>
-            </a:pathLst>
-          </a:custGeom>
-          <a:blipFill>
-            <a:blip r:embed="rId2">
-              <a:extLst>
-                <a:ext uri="{96DAC541-7B7A-43D3-8B79-37D633B846F1}">
-                  <asvg:svgBlip xmlns:asvg="http://schemas.microsoft.com/office/drawing/2016/SVG/main" r:embed="rId3"/>
-                </a:ext>
-              </a:extLst>
-            </a:blip>
-            <a:stretch>
-              <a:fillRect l="0" t="-110" r="0" b="-110"/>
-            </a:stretch>
-          </a:blipFill>
-        </p:spPr>
-      </p:sp>
-      <p:sp>
-        <p:nvSpPr>
-          <p:cNvPr name="Freeform 3" id="3"/>
-          <p:cNvSpPr/>
-          <p:nvPr/>
-        </p:nvSpPr>
-        <p:spPr>
-          <a:xfrm flipH="false" flipV="true" rot="-5400000">
-            <a:off x="1526191" y="-1466126"/>
-            <a:ext cx="2794159" cy="5846531"/>
-          </a:xfrm>
-          <a:custGeom>
-            <a:avLst/>
-            <a:gdLst/>
-            <a:ahLst/>
-            <a:cxnLst/>
-            <a:rect r="r" b="b" t="t" l="l"/>
-            <a:pathLst>
-              <a:path h="5846531" w="2794159">
-                <a:moveTo>
-                  <a:pt x="0" y="5846531"/>
-                </a:moveTo>
-                <a:lnTo>
-                  <a:pt x="2794159" y="5846531"/>
-                </a:lnTo>
-                <a:lnTo>
-                  <a:pt x="2794159" y="0"/>
-                </a:lnTo>
-                <a:lnTo>
-                  <a:pt x="0" y="0"/>
-                </a:lnTo>
-                <a:lnTo>
-                  <a:pt x="0" y="5846531"/>
-                </a:lnTo>
-                <a:close/>
-              </a:path>
-            </a:pathLst>
-          </a:custGeom>
-          <a:blipFill>
-            <a:blip r:embed="rId4">
-              <a:extLst>
-                <a:ext uri="{96DAC541-7B7A-43D3-8B79-37D633B846F1}">
-                  <asvg:svgBlip xmlns:asvg="http://schemas.microsoft.com/office/drawing/2016/SVG/main" r:embed="rId5"/>
-                </a:ext>
-              </a:extLst>
-            </a:blip>
-            <a:stretch>
-              <a:fillRect l="-95" t="0" r="-95" b="0"/>
-            </a:stretch>
-          </a:blipFill>
-        </p:spPr>
-      </p:sp>
-      <p:sp>
-        <p:nvSpPr>
-          <p:cNvPr name="Freeform 4" id="4"/>
-          <p:cNvSpPr/>
-          <p:nvPr/>
-        </p:nvSpPr>
-        <p:spPr>
-          <a:xfrm flipH="false" flipV="false" rot="5400000">
-            <a:off x="-1453324" y="8044625"/>
-            <a:ext cx="4527366" cy="1011107"/>
-          </a:xfrm>
-          <a:custGeom>
-            <a:avLst/>
-            <a:gdLst/>
-            <a:ahLst/>
-            <a:cxnLst/>
-            <a:rect r="r" b="b" t="t" l="l"/>
-            <a:pathLst>
-              <a:path h="1011107" w="4527366">
-                <a:moveTo>
-                  <a:pt x="0" y="0"/>
-                </a:moveTo>
-                <a:lnTo>
-                  <a:pt x="4527365" y="0"/>
-                </a:lnTo>
-                <a:lnTo>
-                  <a:pt x="4527365" y="1011107"/>
-                </a:lnTo>
-                <a:lnTo>
-                  <a:pt x="0" y="1011107"/>
-                </a:lnTo>
-                <a:lnTo>
-                  <a:pt x="0" y="0"/>
-                </a:lnTo>
-                <a:close/>
-              </a:path>
-            </a:pathLst>
-          </a:custGeom>
-          <a:blipFill>
-            <a:blip r:embed="rId6">
-              <a:extLst>
-                <a:ext uri="{96DAC541-7B7A-43D3-8B79-37D633B846F1}">
-                  <asvg:svgBlip xmlns:asvg="http://schemas.microsoft.com/office/drawing/2016/SVG/main" r:embed="rId7"/>
-                </a:ext>
-              </a:extLst>
-            </a:blip>
-            <a:stretch>
-              <a:fillRect l="0" t="-325" r="0" b="-326"/>
-            </a:stretch>
-          </a:blipFill>
-        </p:spPr>
-      </p:sp>
-      <p:sp>
-        <p:nvSpPr>
-          <p:cNvPr name="Freeform 5" id="5"/>
-          <p:cNvSpPr/>
-          <p:nvPr/>
-        </p:nvSpPr>
-        <p:spPr>
-          <a:xfrm flipH="false" flipV="false" rot="5400000">
-            <a:off x="15158276" y="1415224"/>
-            <a:ext cx="4527366" cy="1011107"/>
-          </a:xfrm>
-          <a:custGeom>
-            <a:avLst/>
-            <a:gdLst/>
-            <a:ahLst/>
-            <a:cxnLst/>
-            <a:rect r="r" b="b" t="t" l="l"/>
-            <a:pathLst>
-              <a:path h="1011107" w="4527366">
-                <a:moveTo>
-                  <a:pt x="0" y="0"/>
-                </a:moveTo>
-                <a:lnTo>
-                  <a:pt x="4527365" y="0"/>
-                </a:lnTo>
-                <a:lnTo>
-                  <a:pt x="4527365" y="1011108"/>
-                </a:lnTo>
-                <a:lnTo>
-                  <a:pt x="0" y="1011108"/>
-                </a:lnTo>
-                <a:lnTo>
-                  <a:pt x="0" y="0"/>
-                </a:lnTo>
-                <a:close/>
-              </a:path>
-            </a:pathLst>
-          </a:custGeom>
-          <a:blipFill>
-            <a:blip r:embed="rId6">
-              <a:extLst>
-                <a:ext uri="{96DAC541-7B7A-43D3-8B79-37D633B846F1}">
-                  <asvg:svgBlip xmlns:asvg="http://schemas.microsoft.com/office/drawing/2016/SVG/main" r:embed="rId7"/>
-                </a:ext>
-              </a:extLst>
-            </a:blip>
-            <a:stretch>
-              <a:fillRect l="0" t="-325" r="0" b="-326"/>
-            </a:stretch>
-          </a:blipFill>
-        </p:spPr>
-      </p:sp>
-      <p:sp>
-        <p:nvSpPr>
-          <p:cNvPr name="TextBox 6" id="6"/>
-          <p:cNvSpPr txBox="true"/>
-          <p:nvPr/>
-        </p:nvSpPr>
-        <p:spPr>
-          <a:xfrm rot="0">
-            <a:off x="1737360" y="777240"/>
-            <a:ext cx="14813280" cy="1417320"/>
-          </a:xfrm>
-          <a:prstGeom prst="rect">
-            <a:avLst/>
-          </a:prstGeom>
-        </p:spPr>
-        <p:txBody>
-          <a:bodyPr anchor="t" rtlCol="false" tIns="0" lIns="0" bIns="0" rIns="0">
-            <a:spAutoFit/>
-          </a:bodyPr>
-          <a:lstStyle/>
-          <a:p>
-            <a:pPr algn="ctr">
-              <a:lnSpc>
-                <a:spcPts val="12880"/>
-              </a:lnSpc>
-            </a:pPr>
-            <a:r>
-              <a:rPr lang="en-US" sz="6200" b="true">
-                <a:solidFill>
-                  <a:srgbClr val="FFFFFF"/>
-                </a:solidFill>
-                <a:latin typeface="Open Sans Bold"/>
-                <a:ea typeface="Open Sans Bold"/>
-                <a:cs typeface="Open Sans Bold"/>
-                <a:sym typeface="Open Sans Bold"/>
-              </a:rPr>
-              <a:t>S · Ciencia</a:t>
-            </a:r>
-          </a:p>
-        </p:txBody>
-      </p:sp>
-      <p:sp>
-        <p:nvSpPr>
-          <p:cNvPr name="TextBox 7" id="7"/>
-          <p:cNvSpPr txBox="true"/>
-          <p:nvPr/>
-        </p:nvSpPr>
-        <p:spPr>
-          <a:xfrm rot="0">
-            <a:off x="1737360" y="3017520"/>
-            <a:ext cx="7406640" cy="2377440"/>
-          </a:xfrm>
-          <a:prstGeom prst="rect">
-            <a:avLst/>
-          </a:prstGeom>
-        </p:spPr>
-        <p:txBody>
-          <a:bodyPr anchor="t" rtlCol="false" tIns="0" lIns="0" bIns="0" rIns="0">
-            <a:spAutoFit/>
-          </a:bodyPr>
-          <a:lstStyle/>
-          <a:p>
-            <a:pPr algn="l">
-              <a:lnSpc>
-                <a:spcPts val="8854"/>
-              </a:lnSpc>
-            </a:pPr>
-            <a:r>
-              <a:rPr lang="en-US" b="true" sz="3000">
-                <a:solidFill>
-                  <a:srgbClr val="FFFFFF"/>
-                </a:solidFill>
-                <a:latin typeface="Montaser Arabic Bold"/>
-                <a:ea typeface="Montaser Arabic Bold"/>
-                <a:cs typeface="Montaser Arabic Bold"/>
-                <a:sym typeface="Montaser Arabic Bold"/>
-              </a:rPr>
-              <a:t>Medimos la fila antes y después.</a:t>
-            </a:r>
-          </a:p>
-        </p:txBody>
-      </p:sp>
-      <p:pic>
-        <p:nvPicPr>
-          <p:cNvPr id="906" name="Fadori 6"/>
-          <p:cNvPicPr>
-            <a:picLocks noChangeAspect="1"/>
-          </p:cNvPicPr>
-          <p:nvPr/>
-        </p:nvPicPr>
-        <p:blipFill>
-          <a:blip r:embed="rId8"/>
-          <a:stretch>
-            <a:fillRect/>
-          </a:stretch>
-        </p:blipFill>
-        <p:spPr>
-          <a:xfrm>
-            <a:off x="9693471" y="4023360"/>
-            <a:ext cx="7313537" cy="3794760"/>
-          </a:xfrm>
-          <a:prstGeom prst="rect">
-            <a:avLst/>
-          </a:prstGeom>
-          <a:ln w="28575">
-            <a:solidFill>
-              <a:srgbClr val="FFFFFF"/>
-            </a:solidFill>
-          </a:ln>
-        </p:spPr>
-      </p:pic>
-    </p:spTree>
-  </p:cSld>
-  <p:clrMapOvr>
-    <a:masterClrMapping/>
-  </p:clrMapOvr>
-</p:sld>
-</file>
-
-<file path=ppt/slides/slide15.xml><?xml version="1.0" encoding="utf-8"?>
-<p:sld xmlns:p="http://schemas.openxmlformats.org/presentationml/2006/main" xmlns:a="http://schemas.openxmlformats.org/drawingml/2006/main" xmlns:r="http://schemas.openxmlformats.org/officeDocument/2006/relationships">
-  <p:cSld>
-    <p:bg>
-      <p:bgPr>
-        <a:solidFill>
-          <a:srgbClr val="07416B"/>
-        </a:solidFill>
-      </p:bgPr>
-    </p:bg>
-    <p:spTree>
-      <p:nvGrpSpPr>
-        <p:cNvPr id="1" name=""/>
-        <p:cNvGrpSpPr/>
-        <p:nvPr/>
-      </p:nvGrpSpPr>
-      <p:grpSpPr>
-        <a:xfrm>
-          <a:off x="0" y="0"/>
-          <a:ext cx="0" cy="0"/>
-          <a:chOff x="0" y="0"/>
-          <a:chExt cx="0" cy="0"/>
-        </a:xfrm>
-      </p:grpSpPr>
-      <p:sp>
-        <p:nvSpPr>
-          <p:cNvPr name="Freeform 2" id="2"/>
-          <p:cNvSpPr/>
-          <p:nvPr/>
-        </p:nvSpPr>
-        <p:spPr>
-          <a:xfrm flipH="false" flipV="false" rot="0">
-            <a:off x="12629093" y="5143500"/>
-            <a:ext cx="5658907" cy="5143500"/>
-          </a:xfrm>
-          <a:custGeom>
-            <a:avLst/>
-            <a:gdLst/>
-            <a:ahLst/>
-            <a:cxnLst/>
-            <a:rect r="r" b="b" t="t" l="l"/>
-            <a:pathLst>
-              <a:path h="5143500" w="5658907">
-                <a:moveTo>
-                  <a:pt x="0" y="0"/>
-                </a:moveTo>
-                <a:lnTo>
-                  <a:pt x="5658907" y="0"/>
-                </a:lnTo>
-                <a:lnTo>
-                  <a:pt x="5658907" y="5143500"/>
-                </a:lnTo>
-                <a:lnTo>
-                  <a:pt x="0" y="5143500"/>
-                </a:lnTo>
-                <a:lnTo>
-                  <a:pt x="0" y="0"/>
-                </a:lnTo>
-                <a:close/>
-              </a:path>
-            </a:pathLst>
-          </a:custGeom>
-          <a:blipFill>
-            <a:blip r:embed="rId2">
-              <a:extLst>
-                <a:ext uri="{96DAC541-7B7A-43D3-8B79-37D633B846F1}">
-                  <asvg:svgBlip xmlns:asvg="http://schemas.microsoft.com/office/drawing/2016/SVG/main" r:embed="rId3"/>
-                </a:ext>
-              </a:extLst>
-            </a:blip>
-            <a:stretch>
-              <a:fillRect l="0" t="-110" r="0" b="-110"/>
-            </a:stretch>
-          </a:blipFill>
-        </p:spPr>
-      </p:sp>
-      <p:sp>
-        <p:nvSpPr>
-          <p:cNvPr name="Freeform 3" id="3"/>
-          <p:cNvSpPr/>
-          <p:nvPr/>
-        </p:nvSpPr>
-        <p:spPr>
-          <a:xfrm flipH="false" flipV="true" rot="-5400000">
-            <a:off x="1526191" y="-1466126"/>
-            <a:ext cx="2794159" cy="5846531"/>
-          </a:xfrm>
-          <a:custGeom>
-            <a:avLst/>
-            <a:gdLst/>
-            <a:ahLst/>
-            <a:cxnLst/>
-            <a:rect r="r" b="b" t="t" l="l"/>
-            <a:pathLst>
-              <a:path h="5846531" w="2794159">
-                <a:moveTo>
-                  <a:pt x="0" y="5846531"/>
-                </a:moveTo>
-                <a:lnTo>
-                  <a:pt x="2794159" y="5846531"/>
-                </a:lnTo>
-                <a:lnTo>
-                  <a:pt x="2794159" y="0"/>
-                </a:lnTo>
-                <a:lnTo>
-                  <a:pt x="0" y="0"/>
-                </a:lnTo>
-                <a:lnTo>
-                  <a:pt x="0" y="5846531"/>
-                </a:lnTo>
-                <a:close/>
-              </a:path>
-            </a:pathLst>
-          </a:custGeom>
-          <a:blipFill>
-            <a:blip r:embed="rId4">
-              <a:extLst>
-                <a:ext uri="{96DAC541-7B7A-43D3-8B79-37D633B846F1}">
-                  <asvg:svgBlip xmlns:asvg="http://schemas.microsoft.com/office/drawing/2016/SVG/main" r:embed="rId5"/>
-                </a:ext>
-              </a:extLst>
-            </a:blip>
-            <a:stretch>
-              <a:fillRect l="-95" t="0" r="-95" b="0"/>
-            </a:stretch>
-          </a:blipFill>
-        </p:spPr>
-      </p:sp>
-      <p:sp>
-        <p:nvSpPr>
-          <p:cNvPr name="Freeform 4" id="4"/>
-          <p:cNvSpPr/>
-          <p:nvPr/>
-        </p:nvSpPr>
-        <p:spPr>
-          <a:xfrm flipH="false" flipV="false" rot="5400000">
-            <a:off x="-1453324" y="8044625"/>
-            <a:ext cx="4527366" cy="1011107"/>
-          </a:xfrm>
-          <a:custGeom>
-            <a:avLst/>
-            <a:gdLst/>
-            <a:ahLst/>
-            <a:cxnLst/>
-            <a:rect r="r" b="b" t="t" l="l"/>
-            <a:pathLst>
-              <a:path h="1011107" w="4527366">
-                <a:moveTo>
-                  <a:pt x="0" y="0"/>
-                </a:moveTo>
-                <a:lnTo>
-                  <a:pt x="4527365" y="0"/>
-                </a:lnTo>
-                <a:lnTo>
-                  <a:pt x="4527365" y="1011107"/>
-                </a:lnTo>
-                <a:lnTo>
-                  <a:pt x="0" y="1011107"/>
-                </a:lnTo>
-                <a:lnTo>
-                  <a:pt x="0" y="0"/>
-                </a:lnTo>
-                <a:close/>
-              </a:path>
-            </a:pathLst>
-          </a:custGeom>
-          <a:blipFill>
-            <a:blip r:embed="rId6">
-              <a:extLst>
-                <a:ext uri="{96DAC541-7B7A-43D3-8B79-37D633B846F1}">
-                  <asvg:svgBlip xmlns:asvg="http://schemas.microsoft.com/office/drawing/2016/SVG/main" r:embed="rId7"/>
-                </a:ext>
-              </a:extLst>
-            </a:blip>
-            <a:stretch>
-              <a:fillRect l="0" t="-325" r="0" b="-326"/>
-            </a:stretch>
-          </a:blipFill>
-        </p:spPr>
-      </p:sp>
-      <p:sp>
-        <p:nvSpPr>
-          <p:cNvPr name="Freeform 5" id="5"/>
-          <p:cNvSpPr/>
-          <p:nvPr/>
-        </p:nvSpPr>
-        <p:spPr>
-          <a:xfrm flipH="false" flipV="false" rot="5400000">
-            <a:off x="15158276" y="1415224"/>
-            <a:ext cx="4527366" cy="1011107"/>
-          </a:xfrm>
-          <a:custGeom>
-            <a:avLst/>
-            <a:gdLst/>
-            <a:ahLst/>
-            <a:cxnLst/>
-            <a:rect r="r" b="b" t="t" l="l"/>
-            <a:pathLst>
-              <a:path h="1011107" w="4527366">
-                <a:moveTo>
-                  <a:pt x="0" y="0"/>
-                </a:moveTo>
-                <a:lnTo>
-                  <a:pt x="4527365" y="0"/>
-                </a:lnTo>
-                <a:lnTo>
-                  <a:pt x="4527365" y="1011108"/>
-                </a:lnTo>
-                <a:lnTo>
-                  <a:pt x="0" y="1011108"/>
-                </a:lnTo>
-                <a:lnTo>
-                  <a:pt x="0" y="0"/>
-                </a:lnTo>
-                <a:close/>
-              </a:path>
-            </a:pathLst>
-          </a:custGeom>
-          <a:blipFill>
-            <a:blip r:embed="rId6">
-              <a:extLst>
-                <a:ext uri="{96DAC541-7B7A-43D3-8B79-37D633B846F1}">
-                  <asvg:svgBlip xmlns:asvg="http://schemas.microsoft.com/office/drawing/2016/SVG/main" r:embed="rId7"/>
-                </a:ext>
-              </a:extLst>
-            </a:blip>
-            <a:stretch>
-              <a:fillRect l="0" t="-325" r="0" b="-326"/>
-            </a:stretch>
-          </a:blipFill>
-        </p:spPr>
-      </p:sp>
-      <p:sp>
-        <p:nvSpPr>
-          <p:cNvPr name="TextBox 6" id="6"/>
-          <p:cNvSpPr txBox="true"/>
-          <p:nvPr/>
-        </p:nvSpPr>
-        <p:spPr>
-          <a:xfrm rot="0">
-            <a:off x="1737360" y="777240"/>
-            <a:ext cx="14813280" cy="1417320"/>
-          </a:xfrm>
-          <a:prstGeom prst="rect">
-            <a:avLst/>
-          </a:prstGeom>
-        </p:spPr>
-        <p:txBody>
-          <a:bodyPr anchor="t" rtlCol="false" tIns="0" lIns="0" bIns="0" rIns="0">
-            <a:spAutoFit/>
-          </a:bodyPr>
-          <a:lstStyle/>
-          <a:p>
-            <a:pPr algn="ctr">
-              <a:lnSpc>
-                <a:spcPts val="12880"/>
-              </a:lnSpc>
-            </a:pPr>
-            <a:r>
-              <a:rPr lang="en-US" sz="6200" b="true">
-                <a:solidFill>
-                  <a:srgbClr val="FFFFFF"/>
-                </a:solidFill>
-                <a:latin typeface="Open Sans Bold"/>
-                <a:ea typeface="Open Sans Bold"/>
-                <a:cs typeface="Open Sans Bold"/>
-                <a:sym typeface="Open Sans Bold"/>
-              </a:rPr>
-              <a:t>T · Tecnología</a:t>
-            </a:r>
-          </a:p>
-        </p:txBody>
-      </p:sp>
-      <p:sp>
-        <p:nvSpPr>
-          <p:cNvPr name="TextBox 7" id="7"/>
-          <p:cNvSpPr txBox="true"/>
-          <p:nvPr/>
-        </p:nvSpPr>
-        <p:spPr>
-          <a:xfrm rot="0">
-            <a:off x="1737360" y="3017520"/>
-            <a:ext cx="7406640" cy="2377440"/>
-          </a:xfrm>
-          <a:prstGeom prst="rect">
-            <a:avLst/>
-          </a:prstGeom>
-        </p:spPr>
-        <p:txBody>
-          <a:bodyPr anchor="t" rtlCol="false" tIns="0" lIns="0" bIns="0" rIns="0">
-            <a:spAutoFit/>
-          </a:bodyPr>
-          <a:lstStyle/>
-          <a:p>
-            <a:pPr algn="l">
-              <a:lnSpc>
-                <a:spcPts val="8854"/>
-              </a:lnSpc>
-            </a:pPr>
-            <a:r>
-              <a:rPr lang="en-US" b="true" sz="3000">
-                <a:solidFill>
-                  <a:srgbClr val="FFFFFF"/>
-                </a:solidFill>
-                <a:latin typeface="Montaser Arabic Bold"/>
-                <a:ea typeface="Montaser Arabic Bold"/>
-                <a:cs typeface="Montaser Arabic Bold"/>
-                <a:sym typeface="Montaser Arabic Bold"/>
-              </a:rPr>
-              <a:t>App web, servidor propio, funciona sin internet.</a:t>
-            </a:r>
-          </a:p>
-        </p:txBody>
-      </p:sp>
-      <p:pic>
-        <p:nvPicPr>
-          <p:cNvPr id="907" name="Fadori 7"/>
-          <p:cNvPicPr>
-            <a:picLocks noChangeAspect="1"/>
-          </p:cNvPicPr>
-          <p:nvPr/>
-        </p:nvPicPr>
-        <p:blipFill>
-          <a:blip r:embed="rId8"/>
-          <a:stretch>
-            <a:fillRect/>
-          </a:stretch>
-        </p:blipFill>
-        <p:spPr>
-          <a:xfrm>
-            <a:off x="11795760" y="3297622"/>
-            <a:ext cx="4754880" cy="5200514"/>
-          </a:xfrm>
-          <a:prstGeom prst="rect">
-            <a:avLst/>
-          </a:prstGeom>
-          <a:ln w="28575">
-            <a:solidFill>
-              <a:srgbClr val="FFFFFF"/>
-            </a:solidFill>
-          </a:ln>
-        </p:spPr>
-      </p:pic>
-    </p:spTree>
-  </p:cSld>
-  <p:clrMapOvr>
-    <a:masterClrMapping/>
-  </p:clrMapOvr>
-</p:sld>
-</file>
-
-<file path=ppt/slides/slide16.xml><?xml version="1.0" encoding="utf-8"?>
-<p:sld xmlns:p="http://schemas.openxmlformats.org/presentationml/2006/main" xmlns:a="http://schemas.openxmlformats.org/drawingml/2006/main" xmlns:r="http://schemas.openxmlformats.org/officeDocument/2006/relationships">
-  <p:cSld>
-    <p:bg>
-      <p:bgPr>
-        <a:solidFill>
-          <a:srgbClr val="07416B"/>
-        </a:solidFill>
-      </p:bgPr>
-    </p:bg>
-    <p:spTree>
-      <p:nvGrpSpPr>
-        <p:cNvPr id="1" name=""/>
-        <p:cNvGrpSpPr/>
-        <p:nvPr/>
-      </p:nvGrpSpPr>
-      <p:grpSpPr>
-        <a:xfrm>
-          <a:off x="0" y="0"/>
-          <a:ext cx="0" cy="0"/>
-          <a:chOff x="0" y="0"/>
-          <a:chExt cx="0" cy="0"/>
-        </a:xfrm>
-      </p:grpSpPr>
-      <p:sp>
-        <p:nvSpPr>
-          <p:cNvPr name="Freeform 2" id="2"/>
-          <p:cNvSpPr/>
-          <p:nvPr/>
-        </p:nvSpPr>
-        <p:spPr>
-          <a:xfrm flipH="false" flipV="false" rot="0">
-            <a:off x="12629093" y="5143500"/>
-            <a:ext cx="5658907" cy="5143500"/>
-          </a:xfrm>
-          <a:custGeom>
-            <a:avLst/>
-            <a:gdLst/>
-            <a:ahLst/>
-            <a:cxnLst/>
-            <a:rect r="r" b="b" t="t" l="l"/>
-            <a:pathLst>
-              <a:path h="5143500" w="5658907">
-                <a:moveTo>
-                  <a:pt x="0" y="0"/>
-                </a:moveTo>
-                <a:lnTo>
-                  <a:pt x="5658907" y="0"/>
-                </a:lnTo>
-                <a:lnTo>
-                  <a:pt x="5658907" y="5143500"/>
-                </a:lnTo>
-                <a:lnTo>
-                  <a:pt x="0" y="5143500"/>
-                </a:lnTo>
-                <a:lnTo>
-                  <a:pt x="0" y="0"/>
-                </a:lnTo>
-                <a:close/>
-              </a:path>
-            </a:pathLst>
-          </a:custGeom>
-          <a:blipFill>
-            <a:blip r:embed="rId2">
-              <a:extLst>
-                <a:ext uri="{96DAC541-7B7A-43D3-8B79-37D633B846F1}">
-                  <asvg:svgBlip xmlns:asvg="http://schemas.microsoft.com/office/drawing/2016/SVG/main" r:embed="rId3"/>
-                </a:ext>
-              </a:extLst>
-            </a:blip>
-            <a:stretch>
-              <a:fillRect l="0" t="-110" r="0" b="-110"/>
-            </a:stretch>
-          </a:blipFill>
-        </p:spPr>
-      </p:sp>
-      <p:sp>
-        <p:nvSpPr>
-          <p:cNvPr name="Freeform 3" id="3"/>
-          <p:cNvSpPr/>
-          <p:nvPr/>
-        </p:nvSpPr>
-        <p:spPr>
-          <a:xfrm flipH="false" flipV="true" rot="-5400000">
-            <a:off x="1526191" y="-1466126"/>
-            <a:ext cx="2794159" cy="5846531"/>
-          </a:xfrm>
-          <a:custGeom>
-            <a:avLst/>
-            <a:gdLst/>
-            <a:ahLst/>
-            <a:cxnLst/>
-            <a:rect r="r" b="b" t="t" l="l"/>
-            <a:pathLst>
-              <a:path h="5846531" w="2794159">
-                <a:moveTo>
-                  <a:pt x="0" y="5846531"/>
-                </a:moveTo>
-                <a:lnTo>
-                  <a:pt x="2794159" y="5846531"/>
-                </a:lnTo>
-                <a:lnTo>
-                  <a:pt x="2794159" y="0"/>
-                </a:lnTo>
-                <a:lnTo>
-                  <a:pt x="0" y="0"/>
-                </a:lnTo>
-                <a:lnTo>
-                  <a:pt x="0" y="5846531"/>
-                </a:lnTo>
-                <a:close/>
-              </a:path>
-            </a:pathLst>
-          </a:custGeom>
-          <a:blipFill>
-            <a:blip r:embed="rId4">
-              <a:extLst>
-                <a:ext uri="{96DAC541-7B7A-43D3-8B79-37D633B846F1}">
-                  <asvg:svgBlip xmlns:asvg="http://schemas.microsoft.com/office/drawing/2016/SVG/main" r:embed="rId5"/>
-                </a:ext>
-              </a:extLst>
-            </a:blip>
-            <a:stretch>
-              <a:fillRect l="-95" t="0" r="-95" b="0"/>
-            </a:stretch>
-          </a:blipFill>
-        </p:spPr>
-      </p:sp>
-      <p:sp>
-        <p:nvSpPr>
-          <p:cNvPr name="Freeform 4" id="4"/>
-          <p:cNvSpPr/>
-          <p:nvPr/>
-        </p:nvSpPr>
-        <p:spPr>
-          <a:xfrm flipH="false" flipV="false" rot="5400000">
-            <a:off x="-1453324" y="8044625"/>
-            <a:ext cx="4527366" cy="1011107"/>
-          </a:xfrm>
-          <a:custGeom>
-            <a:avLst/>
-            <a:gdLst/>
-            <a:ahLst/>
-            <a:cxnLst/>
-            <a:rect r="r" b="b" t="t" l="l"/>
-            <a:pathLst>
-              <a:path h="1011107" w="4527366">
-                <a:moveTo>
-                  <a:pt x="0" y="0"/>
-                </a:moveTo>
-                <a:lnTo>
-                  <a:pt x="4527365" y="0"/>
-                </a:lnTo>
-                <a:lnTo>
-                  <a:pt x="4527365" y="1011107"/>
-                </a:lnTo>
-                <a:lnTo>
-                  <a:pt x="0" y="1011107"/>
-                </a:lnTo>
-                <a:lnTo>
-                  <a:pt x="0" y="0"/>
-                </a:lnTo>
-                <a:close/>
-              </a:path>
-            </a:pathLst>
-          </a:custGeom>
-          <a:blipFill>
-            <a:blip r:embed="rId6">
-              <a:extLst>
-                <a:ext uri="{96DAC541-7B7A-43D3-8B79-37D633B846F1}">
-                  <asvg:svgBlip xmlns:asvg="http://schemas.microsoft.com/office/drawing/2016/SVG/main" r:embed="rId7"/>
-                </a:ext>
-              </a:extLst>
-            </a:blip>
-            <a:stretch>
-              <a:fillRect l="0" t="-325" r="0" b="-326"/>
-            </a:stretch>
-          </a:blipFill>
-        </p:spPr>
-      </p:sp>
-      <p:sp>
-        <p:nvSpPr>
-          <p:cNvPr name="Freeform 5" id="5"/>
-          <p:cNvSpPr/>
-          <p:nvPr/>
-        </p:nvSpPr>
-        <p:spPr>
-          <a:xfrm flipH="false" flipV="false" rot="5400000">
-            <a:off x="15158276" y="1415224"/>
-            <a:ext cx="4527366" cy="1011107"/>
-          </a:xfrm>
-          <a:custGeom>
-            <a:avLst/>
-            <a:gdLst/>
-            <a:ahLst/>
-            <a:cxnLst/>
-            <a:rect r="r" b="b" t="t" l="l"/>
-            <a:pathLst>
-              <a:path h="1011107" w="4527366">
-                <a:moveTo>
-                  <a:pt x="0" y="0"/>
-                </a:moveTo>
-                <a:lnTo>
-                  <a:pt x="4527365" y="0"/>
-                </a:lnTo>
-                <a:lnTo>
-                  <a:pt x="4527365" y="1011108"/>
-                </a:lnTo>
-                <a:lnTo>
-                  <a:pt x="0" y="1011108"/>
-                </a:lnTo>
-                <a:lnTo>
-                  <a:pt x="0" y="0"/>
-                </a:lnTo>
-                <a:close/>
-              </a:path>
-            </a:pathLst>
-          </a:custGeom>
-          <a:blipFill>
-            <a:blip r:embed="rId6">
-              <a:extLst>
-                <a:ext uri="{96DAC541-7B7A-43D3-8B79-37D633B846F1}">
-                  <asvg:svgBlip xmlns:asvg="http://schemas.microsoft.com/office/drawing/2016/SVG/main" r:embed="rId7"/>
-                </a:ext>
-              </a:extLst>
-            </a:blip>
-            <a:stretch>
-              <a:fillRect l="0" t="-325" r="0" b="-326"/>
-            </a:stretch>
-          </a:blipFill>
-        </p:spPr>
-      </p:sp>
-      <p:sp>
-        <p:nvSpPr>
-          <p:cNvPr name="TextBox 6" id="6"/>
-          <p:cNvSpPr txBox="true"/>
-          <p:nvPr/>
-        </p:nvSpPr>
-        <p:spPr>
-          <a:xfrm rot="0">
-            <a:off x="1737360" y="777240"/>
-            <a:ext cx="14813280" cy="1417320"/>
-          </a:xfrm>
-          <a:prstGeom prst="rect">
-            <a:avLst/>
-          </a:prstGeom>
-        </p:spPr>
-        <p:txBody>
-          <a:bodyPr anchor="t" rtlCol="false" tIns="0" lIns="0" bIns="0" rIns="0">
-            <a:spAutoFit/>
-          </a:bodyPr>
-          <a:lstStyle/>
-          <a:p>
-            <a:pPr algn="ctr">
-              <a:lnSpc>
-                <a:spcPts val="12880"/>
-              </a:lnSpc>
-            </a:pPr>
-            <a:r>
-              <a:rPr lang="en-US" sz="6200" b="true">
-                <a:solidFill>
-                  <a:srgbClr val="FFFFFF"/>
-                </a:solidFill>
-                <a:latin typeface="Open Sans Bold"/>
-                <a:ea typeface="Open Sans Bold"/>
-                <a:cs typeface="Open Sans Bold"/>
-                <a:sym typeface="Open Sans Bold"/>
-              </a:rPr>
-              <a:t>E · Ingeniería</a:t>
-            </a:r>
-          </a:p>
-        </p:txBody>
-      </p:sp>
-      <p:sp>
-        <p:nvSpPr>
-          <p:cNvPr name="TextBox 7" id="7"/>
-          <p:cNvSpPr txBox="true"/>
-          <p:nvPr/>
-        </p:nvSpPr>
-        <p:spPr>
-          <a:xfrm rot="0">
-            <a:off x="1737360" y="3017520"/>
-            <a:ext cx="7406640" cy="2377440"/>
-          </a:xfrm>
-          <a:prstGeom prst="rect">
-            <a:avLst/>
-          </a:prstGeom>
-        </p:spPr>
-        <p:txBody>
-          <a:bodyPr anchor="t" rtlCol="false" tIns="0" lIns="0" bIns="0" rIns="0">
-            <a:spAutoFit/>
-          </a:bodyPr>
-          <a:lstStyle/>
-          <a:p>
-            <a:pPr algn="l">
-              <a:lnSpc>
-                <a:spcPts val="8854"/>
-              </a:lnSpc>
-            </a:pPr>
-            <a:r>
-              <a:rPr lang="en-US" b="true" sz="3000">
-                <a:solidFill>
-                  <a:srgbClr val="FFFFFF"/>
-                </a:solidFill>
-                <a:latin typeface="Montaser Arabic Bold"/>
-                <a:ea typeface="Montaser Arabic Bold"/>
-                <a:cs typeface="Montaser Arabic Bold"/>
-                <a:sym typeface="Montaser Arabic Bold"/>
-              </a:rPr>
-              <a:t>La fila se ordena sola, con tope justo.</a:t>
-            </a:r>
-          </a:p>
-        </p:txBody>
-      </p:sp>
-      <p:pic>
-        <p:nvPicPr>
-          <p:cNvPr id="908" name="Fadori 8"/>
-          <p:cNvPicPr>
-            <a:picLocks noChangeAspect="1"/>
-          </p:cNvPicPr>
-          <p:nvPr/>
-        </p:nvPicPr>
-        <p:blipFill>
-          <a:blip r:embed="rId8"/>
-          <a:stretch>
-            <a:fillRect/>
-          </a:stretch>
-        </p:blipFill>
-        <p:spPr>
-          <a:xfrm>
-            <a:off x="9601200" y="4116046"/>
-            <a:ext cx="7498079" cy="3179618"/>
-          </a:xfrm>
-          <a:prstGeom prst="rect">
-            <a:avLst/>
-          </a:prstGeom>
-          <a:ln w="28575">
-            <a:solidFill>
-              <a:srgbClr val="FFFFFF"/>
-            </a:solidFill>
-          </a:ln>
-        </p:spPr>
-      </p:pic>
-    </p:spTree>
-  </p:cSld>
-  <p:clrMapOvr>
-    <a:masterClrMapping/>
-  </p:clrMapOvr>
-</p:sld>
-</file>
-
-<file path=ppt/slides/slide17.xml><?xml version="1.0" encoding="utf-8"?>
-<p:sld xmlns:p="http://schemas.openxmlformats.org/presentationml/2006/main" xmlns:a="http://schemas.openxmlformats.org/drawingml/2006/main" xmlns:r="http://schemas.openxmlformats.org/officeDocument/2006/relationships">
-  <p:cSld>
-    <p:bg>
-      <p:bgPr>
-        <a:solidFill>
-          <a:srgbClr val="07416B"/>
-        </a:solidFill>
-      </p:bgPr>
-    </p:bg>
-    <p:spTree>
-      <p:nvGrpSpPr>
-        <p:cNvPr id="1" name=""/>
-        <p:cNvGrpSpPr/>
-        <p:nvPr/>
-      </p:nvGrpSpPr>
-      <p:grpSpPr>
-        <a:xfrm>
-          <a:off x="0" y="0"/>
-          <a:ext cx="0" cy="0"/>
-          <a:chOff x="0" y="0"/>
-          <a:chExt cx="0" cy="0"/>
-        </a:xfrm>
-      </p:grpSpPr>
-      <p:sp>
-        <p:nvSpPr>
-          <p:cNvPr name="Freeform 2" id="2"/>
-          <p:cNvSpPr/>
-          <p:nvPr/>
-        </p:nvSpPr>
-        <p:spPr>
-          <a:xfrm flipH="false" flipV="false" rot="0">
-            <a:off x="12629093" y="5143500"/>
-            <a:ext cx="5658907" cy="5143500"/>
-          </a:xfrm>
-          <a:custGeom>
-            <a:avLst/>
-            <a:gdLst/>
-            <a:ahLst/>
-            <a:cxnLst/>
-            <a:rect r="r" b="b" t="t" l="l"/>
-            <a:pathLst>
-              <a:path h="5143500" w="5658907">
-                <a:moveTo>
-                  <a:pt x="0" y="0"/>
-                </a:moveTo>
-                <a:lnTo>
-                  <a:pt x="5658907" y="0"/>
-                </a:lnTo>
-                <a:lnTo>
-                  <a:pt x="5658907" y="5143500"/>
-                </a:lnTo>
-                <a:lnTo>
-                  <a:pt x="0" y="5143500"/>
-                </a:lnTo>
-                <a:lnTo>
-                  <a:pt x="0" y="0"/>
-                </a:lnTo>
-                <a:close/>
-              </a:path>
-            </a:pathLst>
-          </a:custGeom>
-          <a:blipFill>
-            <a:blip r:embed="rId2">
-              <a:extLst>
-                <a:ext uri="{96DAC541-7B7A-43D3-8B79-37D633B846F1}">
-                  <asvg:svgBlip xmlns:asvg="http://schemas.microsoft.com/office/drawing/2016/SVG/main" r:embed="rId3"/>
-                </a:ext>
-              </a:extLst>
-            </a:blip>
-            <a:stretch>
-              <a:fillRect l="0" t="-110" r="0" b="-110"/>
-            </a:stretch>
-          </a:blipFill>
-        </p:spPr>
-      </p:sp>
-      <p:sp>
-        <p:nvSpPr>
-          <p:cNvPr name="Freeform 3" id="3"/>
-          <p:cNvSpPr/>
-          <p:nvPr/>
-        </p:nvSpPr>
-        <p:spPr>
-          <a:xfrm flipH="false" flipV="true" rot="-5400000">
-            <a:off x="1526191" y="-1466126"/>
-            <a:ext cx="2794159" cy="5846531"/>
-          </a:xfrm>
-          <a:custGeom>
-            <a:avLst/>
-            <a:gdLst/>
-            <a:ahLst/>
-            <a:cxnLst/>
-            <a:rect r="r" b="b" t="t" l="l"/>
-            <a:pathLst>
-              <a:path h="5846531" w="2794159">
-                <a:moveTo>
-                  <a:pt x="0" y="5846531"/>
-                </a:moveTo>
-                <a:lnTo>
-                  <a:pt x="2794159" y="5846531"/>
-                </a:lnTo>
-                <a:lnTo>
-                  <a:pt x="2794159" y="0"/>
-                </a:lnTo>
-                <a:lnTo>
-                  <a:pt x="0" y="0"/>
-                </a:lnTo>
-                <a:lnTo>
-                  <a:pt x="0" y="5846531"/>
-                </a:lnTo>
-                <a:close/>
-              </a:path>
-            </a:pathLst>
-          </a:custGeom>
-          <a:blipFill>
-            <a:blip r:embed="rId4">
-              <a:extLst>
-                <a:ext uri="{96DAC541-7B7A-43D3-8B79-37D633B846F1}">
-                  <asvg:svgBlip xmlns:asvg="http://schemas.microsoft.com/office/drawing/2016/SVG/main" r:embed="rId5"/>
-                </a:ext>
-              </a:extLst>
-            </a:blip>
-            <a:stretch>
-              <a:fillRect l="-95" t="0" r="-95" b="0"/>
-            </a:stretch>
-          </a:blipFill>
-        </p:spPr>
-      </p:sp>
-      <p:sp>
-        <p:nvSpPr>
-          <p:cNvPr name="Freeform 4" id="4"/>
-          <p:cNvSpPr/>
-          <p:nvPr/>
-        </p:nvSpPr>
-        <p:spPr>
-          <a:xfrm flipH="false" flipV="false" rot="5400000">
-            <a:off x="-1453324" y="8044625"/>
-            <a:ext cx="4527366" cy="1011107"/>
-          </a:xfrm>
-          <a:custGeom>
-            <a:avLst/>
-            <a:gdLst/>
-            <a:ahLst/>
-            <a:cxnLst/>
-            <a:rect r="r" b="b" t="t" l="l"/>
-            <a:pathLst>
-              <a:path h="1011107" w="4527366">
-                <a:moveTo>
-                  <a:pt x="0" y="0"/>
-                </a:moveTo>
-                <a:lnTo>
-                  <a:pt x="4527365" y="0"/>
-                </a:lnTo>
-                <a:lnTo>
-                  <a:pt x="4527365" y="1011107"/>
-                </a:lnTo>
-                <a:lnTo>
-                  <a:pt x="0" y="1011107"/>
-                </a:lnTo>
-                <a:lnTo>
-                  <a:pt x="0" y="0"/>
-                </a:lnTo>
-                <a:close/>
-              </a:path>
-            </a:pathLst>
-          </a:custGeom>
-          <a:blipFill>
-            <a:blip r:embed="rId6">
-              <a:extLst>
-                <a:ext uri="{96DAC541-7B7A-43D3-8B79-37D633B846F1}">
-                  <asvg:svgBlip xmlns:asvg="http://schemas.microsoft.com/office/drawing/2016/SVG/main" r:embed="rId7"/>
-                </a:ext>
-              </a:extLst>
-            </a:blip>
-            <a:stretch>
-              <a:fillRect l="0" t="-325" r="0" b="-326"/>
-            </a:stretch>
-          </a:blipFill>
-        </p:spPr>
-      </p:sp>
-      <p:sp>
-        <p:nvSpPr>
-          <p:cNvPr name="Freeform 5" id="5"/>
-          <p:cNvSpPr/>
-          <p:nvPr/>
-        </p:nvSpPr>
-        <p:spPr>
-          <a:xfrm flipH="false" flipV="false" rot="5400000">
-            <a:off x="15158276" y="1415224"/>
-            <a:ext cx="4527366" cy="1011107"/>
-          </a:xfrm>
-          <a:custGeom>
-            <a:avLst/>
-            <a:gdLst/>
-            <a:ahLst/>
-            <a:cxnLst/>
-            <a:rect r="r" b="b" t="t" l="l"/>
-            <a:pathLst>
-              <a:path h="1011107" w="4527366">
-                <a:moveTo>
-                  <a:pt x="0" y="0"/>
-                </a:moveTo>
-                <a:lnTo>
-                  <a:pt x="4527365" y="0"/>
-                </a:lnTo>
-                <a:lnTo>
-                  <a:pt x="4527365" y="1011108"/>
-                </a:lnTo>
-                <a:lnTo>
-                  <a:pt x="0" y="1011108"/>
-                </a:lnTo>
-                <a:lnTo>
-                  <a:pt x="0" y="0"/>
-                </a:lnTo>
-                <a:close/>
-              </a:path>
-            </a:pathLst>
-          </a:custGeom>
-          <a:blipFill>
-            <a:blip r:embed="rId6">
-              <a:extLst>
-                <a:ext uri="{96DAC541-7B7A-43D3-8B79-37D633B846F1}">
-                  <asvg:svgBlip xmlns:asvg="http://schemas.microsoft.com/office/drawing/2016/SVG/main" r:embed="rId7"/>
-                </a:ext>
-              </a:extLst>
-            </a:blip>
-            <a:stretch>
-              <a:fillRect l="0" t="-325" r="0" b="-326"/>
-            </a:stretch>
-          </a:blipFill>
-        </p:spPr>
-      </p:sp>
-      <p:sp>
-        <p:nvSpPr>
-          <p:cNvPr name="TextBox 6" id="6"/>
-          <p:cNvSpPr txBox="true"/>
-          <p:nvPr/>
-        </p:nvSpPr>
-        <p:spPr>
-          <a:xfrm rot="0">
-            <a:off x="1737360" y="777240"/>
-            <a:ext cx="14813280" cy="1417320"/>
-          </a:xfrm>
-          <a:prstGeom prst="rect">
-            <a:avLst/>
-          </a:prstGeom>
-        </p:spPr>
-        <p:txBody>
-          <a:bodyPr anchor="t" rtlCol="false" tIns="0" lIns="0" bIns="0" rIns="0">
-            <a:spAutoFit/>
-          </a:bodyPr>
-          <a:lstStyle/>
-          <a:p>
-            <a:pPr algn="ctr">
-              <a:lnSpc>
-                <a:spcPts val="12880"/>
-              </a:lnSpc>
-            </a:pPr>
-            <a:r>
-              <a:rPr lang="en-US" sz="6200" b="true">
-                <a:solidFill>
-                  <a:srgbClr val="FFFFFF"/>
-                </a:solidFill>
-                <a:latin typeface="Open Sans Bold"/>
-                <a:ea typeface="Open Sans Bold"/>
-                <a:cs typeface="Open Sans Bold"/>
-                <a:sym typeface="Open Sans Bold"/>
-              </a:rPr>
-              <a:t>A · Arte</a:t>
-            </a:r>
-          </a:p>
-        </p:txBody>
-      </p:sp>
-      <p:sp>
-        <p:nvSpPr>
-          <p:cNvPr name="TextBox 7" id="7"/>
-          <p:cNvSpPr txBox="true"/>
-          <p:nvPr/>
-        </p:nvSpPr>
-        <p:spPr>
-          <a:xfrm rot="0">
-            <a:off x="1737360" y="3017520"/>
-            <a:ext cx="7406640" cy="2377440"/>
-          </a:xfrm>
-          <a:prstGeom prst="rect">
-            <a:avLst/>
-          </a:prstGeom>
-        </p:spPr>
-        <p:txBody>
-          <a:bodyPr anchor="t" rtlCol="false" tIns="0" lIns="0" bIns="0" rIns="0">
-            <a:spAutoFit/>
-          </a:bodyPr>
-          <a:lstStyle/>
-          <a:p>
-            <a:pPr algn="l">
-              <a:lnSpc>
-                <a:spcPts val="8854"/>
-              </a:lnSpc>
-            </a:pPr>
-            <a:r>
-              <a:rPr lang="en-US" b="true" sz="3000">
-                <a:solidFill>
-                  <a:srgbClr val="FFFFFF"/>
-                </a:solidFill>
-                <a:latin typeface="Montaser Arabic Bold"/>
-                <a:ea typeface="Montaser Arabic Bold"/>
-                <a:cs typeface="Montaser Arabic Bold"/>
-                <a:sym typeface="Montaser Arabic Bold"/>
-              </a:rPr>
-              <a:t>Identidad propia: logo, color y tipografía.</a:t>
+              <a:t>En uso. Nuevo: credencial, pantalla, cobro y estado de cuenta.</a:t>
             </a:r>
           </a:p>
         </p:txBody>
@@ -6859,8 +5077,8 @@
         </p:blipFill>
         <p:spPr>
           <a:xfrm>
-            <a:off x="11436002" y="3291840"/>
-            <a:ext cx="5108634" cy="5029200"/>
+            <a:off x="2011680" y="4464147"/>
+            <a:ext cx="2743200" cy="3324664"/>
           </a:xfrm>
           <a:prstGeom prst="rect">
             <a:avLst/>
@@ -6872,328 +5090,6 @@
           </a:ln>
         </p:spPr>
       </p:pic>
-    </p:spTree>
-  </p:cSld>
-  <p:clrMapOvr>
-    <a:masterClrMapping/>
-  </p:clrMapOvr>
-</p:sld>
-</file>
-
-<file path=ppt/slides/slide18.xml><?xml version="1.0" encoding="utf-8"?>
-<p:sld xmlns:p="http://schemas.openxmlformats.org/presentationml/2006/main" xmlns:a="http://schemas.openxmlformats.org/drawingml/2006/main" xmlns:r="http://schemas.openxmlformats.org/officeDocument/2006/relationships">
-  <p:cSld>
-    <p:bg>
-      <p:bgPr>
-        <a:solidFill>
-          <a:srgbClr val="07416B"/>
-        </a:solidFill>
-      </p:bgPr>
-    </p:bg>
-    <p:spTree>
-      <p:nvGrpSpPr>
-        <p:cNvPr id="1" name=""/>
-        <p:cNvGrpSpPr/>
-        <p:nvPr/>
-      </p:nvGrpSpPr>
-      <p:grpSpPr>
-        <a:xfrm>
-          <a:off x="0" y="0"/>
-          <a:ext cx="0" cy="0"/>
-          <a:chOff x="0" y="0"/>
-          <a:chExt cx="0" cy="0"/>
-        </a:xfrm>
-      </p:grpSpPr>
-      <p:sp>
-        <p:nvSpPr>
-          <p:cNvPr name="Freeform 2" id="2"/>
-          <p:cNvSpPr/>
-          <p:nvPr/>
-        </p:nvSpPr>
-        <p:spPr>
-          <a:xfrm flipH="false" flipV="false" rot="0">
-            <a:off x="12629093" y="5143500"/>
-            <a:ext cx="5658907" cy="5143500"/>
-          </a:xfrm>
-          <a:custGeom>
-            <a:avLst/>
-            <a:gdLst/>
-            <a:ahLst/>
-            <a:cxnLst/>
-            <a:rect r="r" b="b" t="t" l="l"/>
-            <a:pathLst>
-              <a:path h="5143500" w="5658907">
-                <a:moveTo>
-                  <a:pt x="0" y="0"/>
-                </a:moveTo>
-                <a:lnTo>
-                  <a:pt x="5658907" y="0"/>
-                </a:lnTo>
-                <a:lnTo>
-                  <a:pt x="5658907" y="5143500"/>
-                </a:lnTo>
-                <a:lnTo>
-                  <a:pt x="0" y="5143500"/>
-                </a:lnTo>
-                <a:lnTo>
-                  <a:pt x="0" y="0"/>
-                </a:lnTo>
-                <a:close/>
-              </a:path>
-            </a:pathLst>
-          </a:custGeom>
-          <a:blipFill>
-            <a:blip r:embed="rId2">
-              <a:extLst>
-                <a:ext uri="{96DAC541-7B7A-43D3-8B79-37D633B846F1}">
-                  <asvg:svgBlip xmlns:asvg="http://schemas.microsoft.com/office/drawing/2016/SVG/main" r:embed="rId3"/>
-                </a:ext>
-              </a:extLst>
-            </a:blip>
-            <a:stretch>
-              <a:fillRect l="0" t="-110" r="0" b="-110"/>
-            </a:stretch>
-          </a:blipFill>
-        </p:spPr>
-      </p:sp>
-      <p:sp>
-        <p:nvSpPr>
-          <p:cNvPr name="Freeform 3" id="3"/>
-          <p:cNvSpPr/>
-          <p:nvPr/>
-        </p:nvSpPr>
-        <p:spPr>
-          <a:xfrm flipH="false" flipV="true" rot="-5400000">
-            <a:off x="1526191" y="-1466126"/>
-            <a:ext cx="2794159" cy="5846531"/>
-          </a:xfrm>
-          <a:custGeom>
-            <a:avLst/>
-            <a:gdLst/>
-            <a:ahLst/>
-            <a:cxnLst/>
-            <a:rect r="r" b="b" t="t" l="l"/>
-            <a:pathLst>
-              <a:path h="5846531" w="2794159">
-                <a:moveTo>
-                  <a:pt x="0" y="5846531"/>
-                </a:moveTo>
-                <a:lnTo>
-                  <a:pt x="2794159" y="5846531"/>
-                </a:lnTo>
-                <a:lnTo>
-                  <a:pt x="2794159" y="0"/>
-                </a:lnTo>
-                <a:lnTo>
-                  <a:pt x="0" y="0"/>
-                </a:lnTo>
-                <a:lnTo>
-                  <a:pt x="0" y="5846531"/>
-                </a:lnTo>
-                <a:close/>
-              </a:path>
-            </a:pathLst>
-          </a:custGeom>
-          <a:blipFill>
-            <a:blip r:embed="rId4">
-              <a:extLst>
-                <a:ext uri="{96DAC541-7B7A-43D3-8B79-37D633B846F1}">
-                  <asvg:svgBlip xmlns:asvg="http://schemas.microsoft.com/office/drawing/2016/SVG/main" r:embed="rId5"/>
-                </a:ext>
-              </a:extLst>
-            </a:blip>
-            <a:stretch>
-              <a:fillRect l="-95" t="0" r="-95" b="0"/>
-            </a:stretch>
-          </a:blipFill>
-        </p:spPr>
-      </p:sp>
-      <p:sp>
-        <p:nvSpPr>
-          <p:cNvPr name="Freeform 4" id="4"/>
-          <p:cNvSpPr/>
-          <p:nvPr/>
-        </p:nvSpPr>
-        <p:spPr>
-          <a:xfrm flipH="false" flipV="false" rot="5400000">
-            <a:off x="-1453324" y="8044625"/>
-            <a:ext cx="4527366" cy="1011107"/>
-          </a:xfrm>
-          <a:custGeom>
-            <a:avLst/>
-            <a:gdLst/>
-            <a:ahLst/>
-            <a:cxnLst/>
-            <a:rect r="r" b="b" t="t" l="l"/>
-            <a:pathLst>
-              <a:path h="1011107" w="4527366">
-                <a:moveTo>
-                  <a:pt x="0" y="0"/>
-                </a:moveTo>
-                <a:lnTo>
-                  <a:pt x="4527365" y="0"/>
-                </a:lnTo>
-                <a:lnTo>
-                  <a:pt x="4527365" y="1011107"/>
-                </a:lnTo>
-                <a:lnTo>
-                  <a:pt x="0" y="1011107"/>
-                </a:lnTo>
-                <a:lnTo>
-                  <a:pt x="0" y="0"/>
-                </a:lnTo>
-                <a:close/>
-              </a:path>
-            </a:pathLst>
-          </a:custGeom>
-          <a:blipFill>
-            <a:blip r:embed="rId6">
-              <a:extLst>
-                <a:ext uri="{96DAC541-7B7A-43D3-8B79-37D633B846F1}">
-                  <asvg:svgBlip xmlns:asvg="http://schemas.microsoft.com/office/drawing/2016/SVG/main" r:embed="rId7"/>
-                </a:ext>
-              </a:extLst>
-            </a:blip>
-            <a:stretch>
-              <a:fillRect l="0" t="-325" r="0" b="-326"/>
-            </a:stretch>
-          </a:blipFill>
-        </p:spPr>
-      </p:sp>
-      <p:sp>
-        <p:nvSpPr>
-          <p:cNvPr name="Freeform 5" id="5"/>
-          <p:cNvSpPr/>
-          <p:nvPr/>
-        </p:nvSpPr>
-        <p:spPr>
-          <a:xfrm flipH="false" flipV="false" rot="5400000">
-            <a:off x="15158276" y="1415224"/>
-            <a:ext cx="4527366" cy="1011107"/>
-          </a:xfrm>
-          <a:custGeom>
-            <a:avLst/>
-            <a:gdLst/>
-            <a:ahLst/>
-            <a:cxnLst/>
-            <a:rect r="r" b="b" t="t" l="l"/>
-            <a:pathLst>
-              <a:path h="1011107" w="4527366">
-                <a:moveTo>
-                  <a:pt x="0" y="0"/>
-                </a:moveTo>
-                <a:lnTo>
-                  <a:pt x="4527365" y="0"/>
-                </a:lnTo>
-                <a:lnTo>
-                  <a:pt x="4527365" y="1011108"/>
-                </a:lnTo>
-                <a:lnTo>
-                  <a:pt x="0" y="1011108"/>
-                </a:lnTo>
-                <a:lnTo>
-                  <a:pt x="0" y="0"/>
-                </a:lnTo>
-                <a:close/>
-              </a:path>
-            </a:pathLst>
-          </a:custGeom>
-          <a:blipFill>
-            <a:blip r:embed="rId6">
-              <a:extLst>
-                <a:ext uri="{96DAC541-7B7A-43D3-8B79-37D633B846F1}">
-                  <asvg:svgBlip xmlns:asvg="http://schemas.microsoft.com/office/drawing/2016/SVG/main" r:embed="rId7"/>
-                </a:ext>
-              </a:extLst>
-            </a:blip>
-            <a:stretch>
-              <a:fillRect l="0" t="-325" r="0" b="-326"/>
-            </a:stretch>
-          </a:blipFill>
-        </p:spPr>
-      </p:sp>
-      <p:sp>
-        <p:nvSpPr>
-          <p:cNvPr name="TextBox 6" id="6"/>
-          <p:cNvSpPr txBox="true"/>
-          <p:nvPr/>
-        </p:nvSpPr>
-        <p:spPr>
-          <a:xfrm rot="0">
-            <a:off x="1737360" y="777240"/>
-            <a:ext cx="14813280" cy="1417320"/>
-          </a:xfrm>
-          <a:prstGeom prst="rect">
-            <a:avLst/>
-          </a:prstGeom>
-        </p:spPr>
-        <p:txBody>
-          <a:bodyPr anchor="t" rtlCol="false" tIns="0" lIns="0" bIns="0" rIns="0">
-            <a:spAutoFit/>
-          </a:bodyPr>
-          <a:lstStyle/>
-          <a:p>
-            <a:pPr algn="ctr">
-              <a:lnSpc>
-                <a:spcPts val="12880"/>
-              </a:lnSpc>
-            </a:pPr>
-            <a:r>
-              <a:rPr lang="en-US" sz="6200" b="true">
-                <a:solidFill>
-                  <a:srgbClr val="FFFFFF"/>
-                </a:solidFill>
-                <a:latin typeface="Open Sans Bold"/>
-                <a:ea typeface="Open Sans Bold"/>
-                <a:cs typeface="Open Sans Bold"/>
-                <a:sym typeface="Open Sans Bold"/>
-              </a:rPr>
-              <a:t>M · Matemáticas</a:t>
-            </a:r>
-          </a:p>
-        </p:txBody>
-      </p:sp>
-      <p:sp>
-        <p:nvSpPr>
-          <p:cNvPr name="TextBox 7" id="7"/>
-          <p:cNvSpPr txBox="true"/>
-          <p:nvPr/>
-        </p:nvSpPr>
-        <p:spPr>
-          <a:xfrm rot="0">
-            <a:off x="1737360" y="3017520"/>
-            <a:ext cx="7406640" cy="2377440"/>
-          </a:xfrm>
-          <a:prstGeom prst="rect">
-            <a:avLst/>
-          </a:prstGeom>
-        </p:spPr>
-        <p:txBody>
-          <a:bodyPr anchor="t" rtlCol="false" tIns="0" lIns="0" bIns="0" rIns="0">
-            <a:spAutoFit/>
-          </a:bodyPr>
-          <a:lstStyle/>
-          <a:p>
-            <a:pPr algn="l">
-              <a:lnSpc>
-                <a:spcPts val="8854"/>
-              </a:lnSpc>
-            </a:pPr>
-            <a:r>
-              <a:rPr lang="en-US" b="true" sz="3000">
-                <a:solidFill>
-                  <a:srgbClr val="FFFFFF"/>
-                </a:solidFill>
-                <a:latin typeface="Montaser Arabic Bold"/>
-                <a:ea typeface="Montaser Arabic Bold"/>
-                <a:cs typeface="Montaser Arabic Bold"/>
-                <a:sym typeface="Montaser Arabic Bold"/>
-              </a:rPr>
-              <a:t>Turnos, promedios y porcentajes calculados solos.</a:t>
-            </a:r>
-          </a:p>
-        </p:txBody>
-      </p:sp>
       <p:pic>
         <p:nvPicPr>
           <p:cNvPr id="910" name="Fadori 10"/>
@@ -7203,15 +5099,15 @@
           <p:nvPr/>
         </p:nvPicPr>
         <p:blipFill>
-          <a:blip r:embed="rId8"/>
+          <a:blip r:embed="rId9"/>
           <a:stretch>
             <a:fillRect/>
           </a:stretch>
         </p:blipFill>
         <p:spPr>
           <a:xfrm>
-            <a:off x="9692640" y="4221181"/>
-            <a:ext cx="7315200" cy="2713317"/>
+            <a:off x="4983480" y="4686300"/>
+            <a:ext cx="5120640" cy="2880360"/>
           </a:xfrm>
           <a:prstGeom prst="rect">
             <a:avLst/>
@@ -7223,328 +5119,6 @@
           </a:ln>
         </p:spPr>
       </p:pic>
-    </p:spTree>
-  </p:cSld>
-  <p:clrMapOvr>
-    <a:masterClrMapping/>
-  </p:clrMapOvr>
-</p:sld>
-</file>
-
-<file path=ppt/slides/slide19.xml><?xml version="1.0" encoding="utf-8"?>
-<p:sld xmlns:p="http://schemas.openxmlformats.org/presentationml/2006/main" xmlns:a="http://schemas.openxmlformats.org/drawingml/2006/main" xmlns:r="http://schemas.openxmlformats.org/officeDocument/2006/relationships">
-  <p:cSld>
-    <p:bg>
-      <p:bgPr>
-        <a:solidFill>
-          <a:srgbClr val="07416B"/>
-        </a:solidFill>
-      </p:bgPr>
-    </p:bg>
-    <p:spTree>
-      <p:nvGrpSpPr>
-        <p:cNvPr id="1" name=""/>
-        <p:cNvGrpSpPr/>
-        <p:nvPr/>
-      </p:nvGrpSpPr>
-      <p:grpSpPr>
-        <a:xfrm>
-          <a:off x="0" y="0"/>
-          <a:ext cx="0" cy="0"/>
-          <a:chOff x="0" y="0"/>
-          <a:chExt cx="0" cy="0"/>
-        </a:xfrm>
-      </p:grpSpPr>
-      <p:sp>
-        <p:nvSpPr>
-          <p:cNvPr name="Freeform 2" id="2"/>
-          <p:cNvSpPr/>
-          <p:nvPr/>
-        </p:nvSpPr>
-        <p:spPr>
-          <a:xfrm flipH="false" flipV="false" rot="0">
-            <a:off x="12629093" y="5143500"/>
-            <a:ext cx="5658907" cy="5143500"/>
-          </a:xfrm>
-          <a:custGeom>
-            <a:avLst/>
-            <a:gdLst/>
-            <a:ahLst/>
-            <a:cxnLst/>
-            <a:rect r="r" b="b" t="t" l="l"/>
-            <a:pathLst>
-              <a:path h="5143500" w="5658907">
-                <a:moveTo>
-                  <a:pt x="0" y="0"/>
-                </a:moveTo>
-                <a:lnTo>
-                  <a:pt x="5658907" y="0"/>
-                </a:lnTo>
-                <a:lnTo>
-                  <a:pt x="5658907" y="5143500"/>
-                </a:lnTo>
-                <a:lnTo>
-                  <a:pt x="0" y="5143500"/>
-                </a:lnTo>
-                <a:lnTo>
-                  <a:pt x="0" y="0"/>
-                </a:lnTo>
-                <a:close/>
-              </a:path>
-            </a:pathLst>
-          </a:custGeom>
-          <a:blipFill>
-            <a:blip r:embed="rId2">
-              <a:extLst>
-                <a:ext uri="{96DAC541-7B7A-43D3-8B79-37D633B846F1}">
-                  <asvg:svgBlip xmlns:asvg="http://schemas.microsoft.com/office/drawing/2016/SVG/main" r:embed="rId3"/>
-                </a:ext>
-              </a:extLst>
-            </a:blip>
-            <a:stretch>
-              <a:fillRect l="0" t="-110" r="0" b="-110"/>
-            </a:stretch>
-          </a:blipFill>
-        </p:spPr>
-      </p:sp>
-      <p:sp>
-        <p:nvSpPr>
-          <p:cNvPr name="Freeform 3" id="3"/>
-          <p:cNvSpPr/>
-          <p:nvPr/>
-        </p:nvSpPr>
-        <p:spPr>
-          <a:xfrm flipH="false" flipV="true" rot="-5400000">
-            <a:off x="1526191" y="-1466126"/>
-            <a:ext cx="2794159" cy="5846531"/>
-          </a:xfrm>
-          <a:custGeom>
-            <a:avLst/>
-            <a:gdLst/>
-            <a:ahLst/>
-            <a:cxnLst/>
-            <a:rect r="r" b="b" t="t" l="l"/>
-            <a:pathLst>
-              <a:path h="5846531" w="2794159">
-                <a:moveTo>
-                  <a:pt x="0" y="5846531"/>
-                </a:moveTo>
-                <a:lnTo>
-                  <a:pt x="2794159" y="5846531"/>
-                </a:lnTo>
-                <a:lnTo>
-                  <a:pt x="2794159" y="0"/>
-                </a:lnTo>
-                <a:lnTo>
-                  <a:pt x="0" y="0"/>
-                </a:lnTo>
-                <a:lnTo>
-                  <a:pt x="0" y="5846531"/>
-                </a:lnTo>
-                <a:close/>
-              </a:path>
-            </a:pathLst>
-          </a:custGeom>
-          <a:blipFill>
-            <a:blip r:embed="rId4">
-              <a:extLst>
-                <a:ext uri="{96DAC541-7B7A-43D3-8B79-37D633B846F1}">
-                  <asvg:svgBlip xmlns:asvg="http://schemas.microsoft.com/office/drawing/2016/SVG/main" r:embed="rId5"/>
-                </a:ext>
-              </a:extLst>
-            </a:blip>
-            <a:stretch>
-              <a:fillRect l="-95" t="0" r="-95" b="0"/>
-            </a:stretch>
-          </a:blipFill>
-        </p:spPr>
-      </p:sp>
-      <p:sp>
-        <p:nvSpPr>
-          <p:cNvPr name="Freeform 4" id="4"/>
-          <p:cNvSpPr/>
-          <p:nvPr/>
-        </p:nvSpPr>
-        <p:spPr>
-          <a:xfrm flipH="false" flipV="false" rot="5400000">
-            <a:off x="-1453324" y="8044625"/>
-            <a:ext cx="4527366" cy="1011107"/>
-          </a:xfrm>
-          <a:custGeom>
-            <a:avLst/>
-            <a:gdLst/>
-            <a:ahLst/>
-            <a:cxnLst/>
-            <a:rect r="r" b="b" t="t" l="l"/>
-            <a:pathLst>
-              <a:path h="1011107" w="4527366">
-                <a:moveTo>
-                  <a:pt x="0" y="0"/>
-                </a:moveTo>
-                <a:lnTo>
-                  <a:pt x="4527365" y="0"/>
-                </a:lnTo>
-                <a:lnTo>
-                  <a:pt x="4527365" y="1011107"/>
-                </a:lnTo>
-                <a:lnTo>
-                  <a:pt x="0" y="1011107"/>
-                </a:lnTo>
-                <a:lnTo>
-                  <a:pt x="0" y="0"/>
-                </a:lnTo>
-                <a:close/>
-              </a:path>
-            </a:pathLst>
-          </a:custGeom>
-          <a:blipFill>
-            <a:blip r:embed="rId6">
-              <a:extLst>
-                <a:ext uri="{96DAC541-7B7A-43D3-8B79-37D633B846F1}">
-                  <asvg:svgBlip xmlns:asvg="http://schemas.microsoft.com/office/drawing/2016/SVG/main" r:embed="rId7"/>
-                </a:ext>
-              </a:extLst>
-            </a:blip>
-            <a:stretch>
-              <a:fillRect l="0" t="-325" r="0" b="-326"/>
-            </a:stretch>
-          </a:blipFill>
-        </p:spPr>
-      </p:sp>
-      <p:sp>
-        <p:nvSpPr>
-          <p:cNvPr name="Freeform 5" id="5"/>
-          <p:cNvSpPr/>
-          <p:nvPr/>
-        </p:nvSpPr>
-        <p:spPr>
-          <a:xfrm flipH="false" flipV="false" rot="5400000">
-            <a:off x="15158276" y="1415224"/>
-            <a:ext cx="4527366" cy="1011107"/>
-          </a:xfrm>
-          <a:custGeom>
-            <a:avLst/>
-            <a:gdLst/>
-            <a:ahLst/>
-            <a:cxnLst/>
-            <a:rect r="r" b="b" t="t" l="l"/>
-            <a:pathLst>
-              <a:path h="1011107" w="4527366">
-                <a:moveTo>
-                  <a:pt x="0" y="0"/>
-                </a:moveTo>
-                <a:lnTo>
-                  <a:pt x="4527365" y="0"/>
-                </a:lnTo>
-                <a:lnTo>
-                  <a:pt x="4527365" y="1011108"/>
-                </a:lnTo>
-                <a:lnTo>
-                  <a:pt x="0" y="1011108"/>
-                </a:lnTo>
-                <a:lnTo>
-                  <a:pt x="0" y="0"/>
-                </a:lnTo>
-                <a:close/>
-              </a:path>
-            </a:pathLst>
-          </a:custGeom>
-          <a:blipFill>
-            <a:blip r:embed="rId6">
-              <a:extLst>
-                <a:ext uri="{96DAC541-7B7A-43D3-8B79-37D633B846F1}">
-                  <asvg:svgBlip xmlns:asvg="http://schemas.microsoft.com/office/drawing/2016/SVG/main" r:embed="rId7"/>
-                </a:ext>
-              </a:extLst>
-            </a:blip>
-            <a:stretch>
-              <a:fillRect l="0" t="-325" r="0" b="-326"/>
-            </a:stretch>
-          </a:blipFill>
-        </p:spPr>
-      </p:sp>
-      <p:sp>
-        <p:nvSpPr>
-          <p:cNvPr name="TextBox 6" id="6"/>
-          <p:cNvSpPr txBox="true"/>
-          <p:nvPr/>
-        </p:nvSpPr>
-        <p:spPr>
-          <a:xfrm rot="0">
-            <a:off x="1737360" y="777240"/>
-            <a:ext cx="14813280" cy="1417320"/>
-          </a:xfrm>
-          <a:prstGeom prst="rect">
-            <a:avLst/>
-          </a:prstGeom>
-        </p:spPr>
-        <p:txBody>
-          <a:bodyPr anchor="t" rtlCol="false" tIns="0" lIns="0" bIns="0" rIns="0">
-            <a:spAutoFit/>
-          </a:bodyPr>
-          <a:lstStyle/>
-          <a:p>
-            <a:pPr algn="ctr">
-              <a:lnSpc>
-                <a:spcPts val="12880"/>
-              </a:lnSpc>
-            </a:pPr>
-            <a:r>
-              <a:rPr lang="en-US" sz="6200" b="true">
-                <a:solidFill>
-                  <a:srgbClr val="FFFFFF"/>
-                </a:solidFill>
-                <a:latin typeface="Open Sans Bold"/>
-                <a:ea typeface="Open Sans Bold"/>
-                <a:cs typeface="Open Sans Bold"/>
-                <a:sym typeface="Open Sans Bold"/>
-              </a:rPr>
-              <a:t>Estado actual</a:t>
-            </a:r>
-          </a:p>
-        </p:txBody>
-      </p:sp>
-      <p:sp>
-        <p:nvSpPr>
-          <p:cNvPr name="TextBox 7" id="7"/>
-          <p:cNvSpPr txBox="true"/>
-          <p:nvPr/>
-        </p:nvSpPr>
-        <p:spPr>
-          <a:xfrm rot="0">
-            <a:off x="1737360" y="3017520"/>
-            <a:ext cx="7406640" cy="2377440"/>
-          </a:xfrm>
-          <a:prstGeom prst="rect">
-            <a:avLst/>
-          </a:prstGeom>
-        </p:spPr>
-        <p:txBody>
-          <a:bodyPr anchor="t" rtlCol="false" tIns="0" lIns="0" bIns="0" rIns="0">
-            <a:spAutoFit/>
-          </a:bodyPr>
-          <a:lstStyle/>
-          <a:p>
-            <a:pPr algn="l">
-              <a:lnSpc>
-                <a:spcPts val="8854"/>
-              </a:lnSpc>
-            </a:pPr>
-            <a:r>
-              <a:rPr lang="en-US" b="true" sz="3000">
-                <a:solidFill>
-                  <a:srgbClr val="FFFFFF"/>
-                </a:solidFill>
-                <a:latin typeface="Montaser Arabic Bold"/>
-                <a:ea typeface="Montaser Arabic Bold"/>
-                <a:cs typeface="Montaser Arabic Bold"/>
-                <a:sym typeface="Montaser Arabic Bold"/>
-              </a:rPr>
-              <a:t>Terminada, publicada y en línea. Cuatro pantallas.</a:t>
-            </a:r>
-          </a:p>
-        </p:txBody>
-      </p:sp>
       <p:pic>
         <p:nvPicPr>
           <p:cNvPr id="911" name="Fadori 11"/>
@@ -7554,15 +5128,44 @@
           <p:nvPr/>
         </p:nvPicPr>
         <p:blipFill>
-          <a:blip r:embed="rId8"/>
+          <a:blip r:embed="rId10"/>
           <a:stretch>
             <a:fillRect/>
           </a:stretch>
         </p:blipFill>
         <p:spPr>
           <a:xfrm>
-            <a:off x="9692640" y="3931920"/>
-            <a:ext cx="7315200" cy="4114800"/>
+            <a:off x="10332720" y="4213098"/>
+            <a:ext cx="3017520" cy="3826763"/>
+          </a:xfrm>
+          <a:prstGeom prst="rect">
+            <a:avLst/>
+          </a:prstGeom>
+          <a:ln w="28575">
+            <a:solidFill>
+              <a:srgbClr val="FFFFFF"/>
+            </a:solidFill>
+          </a:ln>
+        </p:spPr>
+      </p:pic>
+      <p:pic>
+        <p:nvPicPr>
+          <p:cNvPr id="912" name="Fadori 12"/>
+          <p:cNvPicPr>
+            <a:picLocks noChangeAspect="1"/>
+          </p:cNvPicPr>
+          <p:nvPr/>
+        </p:nvPicPr>
+        <p:blipFill>
+          <a:blip r:embed="rId11"/>
+          <a:stretch>
+            <a:fillRect/>
+          </a:stretch>
+        </p:blipFill>
+        <p:spPr>
+          <a:xfrm>
+            <a:off x="13578840" y="4453128"/>
+            <a:ext cx="3291840" cy="3346704"/>
           </a:xfrm>
           <a:prstGeom prst="rect">
             <a:avLst/>
@@ -8264,1928 +5867,6 @@
                 <a:sym typeface="Montaser Arabic Bold"/>
               </a:rPr>
               <a:t> Comer con calma.</a:t>
-            </a:r>
-          </a:p>
-        </p:txBody>
-      </p:sp>
-    </p:spTree>
-  </p:cSld>
-  <p:clrMapOvr>
-    <a:masterClrMapping/>
-  </p:clrMapOvr>
-</p:sld>
-</file>
-
-<file path=ppt/slides/slide3.xml><?xml version="1.0" encoding="utf-8"?>
-<p:sld xmlns:p="http://schemas.openxmlformats.org/presentationml/2006/main" xmlns:a="http://schemas.openxmlformats.org/drawingml/2006/main" xmlns:r="http://schemas.openxmlformats.org/officeDocument/2006/relationships">
-  <p:cSld>
-    <p:spTree>
-      <p:nvGrpSpPr>
-        <p:cNvPr id="1" name=""/>
-        <p:cNvGrpSpPr/>
-        <p:nvPr/>
-      </p:nvGrpSpPr>
-      <p:grpSpPr>
-        <a:xfrm>
-          <a:off x="0" y="0"/>
-          <a:ext cx="0" cy="0"/>
-          <a:chOff x="0" y="0"/>
-          <a:chExt cx="0" cy="0"/>
-        </a:xfrm>
-      </p:grpSpPr>
-      <p:sp>
-        <p:nvSpPr>
-          <p:cNvPr name="Freeform 2" id="2"/>
-          <p:cNvSpPr/>
-          <p:nvPr/>
-        </p:nvSpPr>
-        <p:spPr>
-          <a:xfrm flipH="true" flipV="false" rot="0">
-            <a:off x="0" y="7112918"/>
-            <a:ext cx="3341942" cy="3174082"/>
-          </a:xfrm>
-          <a:custGeom>
-            <a:avLst/>
-            <a:gdLst/>
-            <a:ahLst/>
-            <a:cxnLst/>
-            <a:rect r="r" b="b" t="t" l="l"/>
-            <a:pathLst>
-              <a:path h="3174082" w="3341942">
-                <a:moveTo>
-                  <a:pt x="3341942" y="0"/>
-                </a:moveTo>
-                <a:lnTo>
-                  <a:pt x="0" y="0"/>
-                </a:lnTo>
-                <a:lnTo>
-                  <a:pt x="0" y="3174082"/>
-                </a:lnTo>
-                <a:lnTo>
-                  <a:pt x="3341942" y="3174082"/>
-                </a:lnTo>
-                <a:lnTo>
-                  <a:pt x="3341942" y="0"/>
-                </a:lnTo>
-                <a:close/>
-              </a:path>
-            </a:pathLst>
-          </a:custGeom>
-          <a:blipFill>
-            <a:blip r:embed="rId2">
-              <a:extLst>
-                <a:ext uri="{96DAC541-7B7A-43D3-8B79-37D633B846F1}">
-                  <asvg:svgBlip xmlns:asvg="http://schemas.microsoft.com/office/drawing/2016/SVG/main" r:embed="rId3"/>
-                </a:ext>
-              </a:extLst>
-            </a:blip>
-            <a:stretch>
-              <a:fillRect l="0" t="-15092" r="0" b="-15092"/>
-            </a:stretch>
-          </a:blipFill>
-        </p:spPr>
-      </p:sp>
-      <p:sp>
-        <p:nvSpPr>
-          <p:cNvPr name="Freeform 3" id="3"/>
-          <p:cNvSpPr/>
-          <p:nvPr/>
-        </p:nvSpPr>
-        <p:spPr>
-          <a:xfrm flipH="true" flipV="false" rot="0">
-            <a:off x="15293188" y="70723"/>
-            <a:ext cx="3012948" cy="4138574"/>
-          </a:xfrm>
-          <a:custGeom>
-            <a:avLst/>
-            <a:gdLst/>
-            <a:ahLst/>
-            <a:cxnLst/>
-            <a:rect r="r" b="b" t="t" l="l"/>
-            <a:pathLst>
-              <a:path h="4138574" w="3012948">
-                <a:moveTo>
-                  <a:pt x="3012948" y="0"/>
-                </a:moveTo>
-                <a:lnTo>
-                  <a:pt x="0" y="0"/>
-                </a:lnTo>
-                <a:lnTo>
-                  <a:pt x="0" y="4138575"/>
-                </a:lnTo>
-                <a:lnTo>
-                  <a:pt x="3012948" y="4138575"/>
-                </a:lnTo>
-                <a:lnTo>
-                  <a:pt x="3012948" y="0"/>
-                </a:lnTo>
-                <a:close/>
-              </a:path>
-            </a:pathLst>
-          </a:custGeom>
-          <a:blipFill>
-            <a:blip r:embed="rId4">
-              <a:extLst>
-                <a:ext uri="{96DAC541-7B7A-43D3-8B79-37D633B846F1}">
-                  <asvg:svgBlip xmlns:asvg="http://schemas.microsoft.com/office/drawing/2016/SVG/main" r:embed="rId5"/>
-                </a:ext>
-              </a:extLst>
-            </a:blip>
-            <a:stretch>
-              <a:fillRect l="-11732" t="0" r="-11733" b="0"/>
-            </a:stretch>
-          </a:blipFill>
-        </p:spPr>
-      </p:sp>
-      <p:sp>
-        <p:nvSpPr>
-          <p:cNvPr name="Freeform 4" id="4"/>
-          <p:cNvSpPr/>
-          <p:nvPr/>
-        </p:nvSpPr>
-        <p:spPr>
-          <a:xfrm flipH="false" flipV="false" rot="-10800000">
-            <a:off x="14766541" y="9233087"/>
-            <a:ext cx="3539604" cy="1011107"/>
-          </a:xfrm>
-          <a:custGeom>
-            <a:avLst/>
-            <a:gdLst/>
-            <a:ahLst/>
-            <a:cxnLst/>
-            <a:rect r="r" b="b" t="t" l="l"/>
-            <a:pathLst>
-              <a:path h="1011107" w="3539604">
-                <a:moveTo>
-                  <a:pt x="0" y="0"/>
-                </a:moveTo>
-                <a:lnTo>
-                  <a:pt x="3539604" y="0"/>
-                </a:lnTo>
-                <a:lnTo>
-                  <a:pt x="3539604" y="1011108"/>
-                </a:lnTo>
-                <a:lnTo>
-                  <a:pt x="0" y="1011108"/>
-                </a:lnTo>
-                <a:lnTo>
-                  <a:pt x="0" y="0"/>
-                </a:lnTo>
-                <a:close/>
-              </a:path>
-            </a:pathLst>
-          </a:custGeom>
-          <a:blipFill>
-            <a:blip r:embed="rId6">
-              <a:extLst>
-                <a:ext uri="{96DAC541-7B7A-43D3-8B79-37D633B846F1}">
-                  <asvg:svgBlip xmlns:asvg="http://schemas.microsoft.com/office/drawing/2016/SVG/main" r:embed="rId7"/>
-                </a:ext>
-              </a:extLst>
-            </a:blip>
-            <a:stretch>
-              <a:fillRect l="-13538" t="0" r="-13538" b="0"/>
-            </a:stretch>
-          </a:blipFill>
-        </p:spPr>
-      </p:sp>
-      <p:grpSp>
-        <p:nvGrpSpPr>
-          <p:cNvPr name="Group 5" id="5"/>
-          <p:cNvGrpSpPr/>
-          <p:nvPr/>
-        </p:nvGrpSpPr>
-        <p:grpSpPr>
-          <a:xfrm rot="0">
-            <a:off x="1675428" y="383524"/>
-            <a:ext cx="2087451" cy="2087451"/>
-            <a:chOff x="0" y="0"/>
-            <a:chExt cx="2783268" cy="2783268"/>
-          </a:xfrm>
-        </p:grpSpPr>
-        <p:sp>
-          <p:nvSpPr>
-            <p:cNvPr name="Freeform 6" id="6"/>
-            <p:cNvSpPr/>
-            <p:nvPr/>
-          </p:nvSpPr>
-          <p:spPr>
-            <a:xfrm flipH="false" flipV="false" rot="0">
-              <a:off x="0" y="0"/>
-              <a:ext cx="2783205" cy="2783205"/>
-            </a:xfrm>
-            <a:custGeom>
-              <a:avLst/>
-              <a:gdLst/>
-              <a:ahLst/>
-              <a:cxnLst/>
-              <a:rect r="r" b="b" t="t" l="l"/>
-              <a:pathLst>
-                <a:path h="2783205" w="2783205">
-                  <a:moveTo>
-                    <a:pt x="0" y="0"/>
-                  </a:moveTo>
-                  <a:lnTo>
-                    <a:pt x="2783205" y="0"/>
-                  </a:lnTo>
-                  <a:lnTo>
-                    <a:pt x="2783205" y="2783205"/>
-                  </a:lnTo>
-                  <a:lnTo>
-                    <a:pt x="0" y="2783205"/>
-                  </a:lnTo>
-                  <a:lnTo>
-                    <a:pt x="0" y="0"/>
-                  </a:lnTo>
-                  <a:close/>
-                </a:path>
-              </a:pathLst>
-            </a:custGeom>
-            <a:blipFill>
-              <a:blip r:embed="rId8"/>
-              <a:stretch>
-                <a:fillRect l="0" t="0" r="-2" b="-2"/>
-              </a:stretch>
-            </a:blipFill>
-          </p:spPr>
-        </p:sp>
-      </p:grpSp>
-      <p:sp>
-        <p:nvSpPr>
-          <p:cNvPr name="Freeform 7" id="7"/>
-          <p:cNvSpPr/>
-          <p:nvPr/>
-        </p:nvSpPr>
-        <p:spPr>
-          <a:xfrm flipH="false" flipV="false" rot="0">
-            <a:off x="5115535" y="2716797"/>
-            <a:ext cx="893169" cy="645319"/>
-          </a:xfrm>
-          <a:custGeom>
-            <a:avLst/>
-            <a:gdLst/>
-            <a:ahLst/>
-            <a:cxnLst/>
-            <a:rect r="r" b="b" t="t" l="l"/>
-            <a:pathLst>
-              <a:path h="645319" w="893169">
-                <a:moveTo>
-                  <a:pt x="0" y="0"/>
-                </a:moveTo>
-                <a:lnTo>
-                  <a:pt x="893168" y="0"/>
-                </a:lnTo>
-                <a:lnTo>
-                  <a:pt x="893168" y="645318"/>
-                </a:lnTo>
-                <a:lnTo>
-                  <a:pt x="0" y="645318"/>
-                </a:lnTo>
-                <a:lnTo>
-                  <a:pt x="0" y="0"/>
-                </a:lnTo>
-                <a:close/>
-              </a:path>
-            </a:pathLst>
-          </a:custGeom>
-          <a:blipFill>
-            <a:blip r:embed="rId9">
-              <a:extLst>
-                <a:ext uri="{96DAC541-7B7A-43D3-8B79-37D633B846F1}">
-                  <asvg:svgBlip xmlns:asvg="http://schemas.microsoft.com/office/drawing/2016/SVG/main" r:embed="rId10"/>
-                </a:ext>
-              </a:extLst>
-            </a:blip>
-            <a:stretch>
-              <a:fillRect l="0" t="0" r="0" b="0"/>
-            </a:stretch>
-          </a:blipFill>
-        </p:spPr>
-      </p:sp>
-      <p:sp>
-        <p:nvSpPr>
-          <p:cNvPr name="TextBox 8" id="8"/>
-          <p:cNvSpPr txBox="true"/>
-          <p:nvPr/>
-        </p:nvSpPr>
-        <p:spPr>
-          <a:xfrm rot="0">
-            <a:off x="589331" y="2762031"/>
-            <a:ext cx="4259656" cy="600075"/>
-          </a:xfrm>
-          <a:prstGeom prst="rect">
-            <a:avLst/>
-          </a:prstGeom>
-        </p:spPr>
-        <p:txBody>
-          <a:bodyPr anchor="t" rtlCol="false" tIns="0" lIns="0" bIns="0" rIns="0">
-            <a:spAutoFit/>
-          </a:bodyPr>
-          <a:lstStyle/>
-          <a:p>
-            <a:pPr algn="l">
-              <a:lnSpc>
-                <a:spcPts val="4798"/>
-              </a:lnSpc>
-            </a:pPr>
-            <a:r>
-              <a:rPr lang="en-US" sz="3999" b="true">
-                <a:solidFill>
-                  <a:srgbClr val="055C9D"/>
-                </a:solidFill>
-                <a:latin typeface="Nourd Bold"/>
-                <a:ea typeface="Nourd Bold"/>
-                <a:cs typeface="Nourd Bold"/>
-                <a:sym typeface="Nourd Bold"/>
-              </a:rPr>
-              <a:t>Contenido</a:t>
-            </a:r>
-          </a:p>
-        </p:txBody>
-      </p:sp>
-      <p:sp>
-        <p:nvSpPr>
-          <p:cNvPr name="TextBox 9" id="9"/>
-          <p:cNvSpPr txBox="true"/>
-          <p:nvPr/>
-        </p:nvSpPr>
-        <p:spPr>
-          <a:xfrm rot="0">
-            <a:off x="4299337" y="1123950"/>
-            <a:ext cx="9167108" cy="684895"/>
-          </a:xfrm>
-          <a:prstGeom prst="rect">
-            <a:avLst/>
-          </a:prstGeom>
-        </p:spPr>
-        <p:txBody>
-          <a:bodyPr anchor="t" rtlCol="false" tIns="0" lIns="0" bIns="0" rIns="0">
-            <a:spAutoFit/>
-          </a:bodyPr>
-          <a:lstStyle/>
-          <a:p>
-            <a:pPr algn="l">
-              <a:lnSpc>
-                <a:spcPts val="5696"/>
-              </a:lnSpc>
-            </a:pPr>
-            <a:r>
-              <a:rPr lang="en-US" sz="5178" b="true">
-                <a:solidFill>
-                  <a:srgbClr val="AD0F0F"/>
-                </a:solidFill>
-                <a:latin typeface="Nourd Bold"/>
-                <a:ea typeface="Nourd Bold"/>
-                <a:cs typeface="Nourd Bold"/>
-                <a:sym typeface="Nourd Bold"/>
-              </a:rPr>
-              <a:t>B</a:t>
-            </a:r>
-            <a:r>
-              <a:rPr lang="en-US" sz="5178" b="true">
-                <a:solidFill>
-                  <a:srgbClr val="003060"/>
-                </a:solidFill>
-                <a:latin typeface="Nourd Bold"/>
-                <a:ea typeface="Nourd Bold"/>
-                <a:cs typeface="Nourd Bold"/>
-                <a:sym typeface="Nourd Bold"/>
-              </a:rPr>
-              <a:t>achillerato</a:t>
-            </a:r>
-            <a:r>
-              <a:rPr lang="en-US" sz="5178" b="true">
-                <a:solidFill>
-                  <a:srgbClr val="AD0F0F"/>
-                </a:solidFill>
-                <a:latin typeface="Nourd Bold"/>
-                <a:ea typeface="Nourd Bold"/>
-                <a:cs typeface="Nourd Bold"/>
-                <a:sym typeface="Nourd Bold"/>
-              </a:rPr>
-              <a:t> R</a:t>
-            </a:r>
-            <a:r>
-              <a:rPr lang="en-US" sz="5178" b="true">
-                <a:solidFill>
-                  <a:srgbClr val="003060"/>
-                </a:solidFill>
-                <a:latin typeface="Nourd Bold"/>
-                <a:ea typeface="Nourd Bold"/>
-                <a:cs typeface="Nourd Bold"/>
-                <a:sym typeface="Nourd Bold"/>
-              </a:rPr>
-              <a:t>embrandt</a:t>
-            </a:r>
-          </a:p>
-        </p:txBody>
-      </p:sp>
-      <p:grpSp>
-        <p:nvGrpSpPr>
-          <p:cNvPr name="Group 10" id="10"/>
-          <p:cNvGrpSpPr/>
-          <p:nvPr/>
-        </p:nvGrpSpPr>
-        <p:grpSpPr>
-          <a:xfrm rot="0">
-            <a:off x="6530530" y="3362106"/>
-            <a:ext cx="772001" cy="772001"/>
-            <a:chOff x="0" y="0"/>
-            <a:chExt cx="1029335" cy="1029335"/>
-          </a:xfrm>
-        </p:grpSpPr>
-        <p:sp>
-          <p:nvSpPr>
-            <p:cNvPr name="Freeform 11" id="11"/>
-            <p:cNvSpPr/>
-            <p:nvPr/>
-          </p:nvSpPr>
-          <p:spPr>
-            <a:xfrm flipH="false" flipV="false" rot="0">
-              <a:off x="0" y="0"/>
-              <a:ext cx="1029335" cy="1029335"/>
-            </a:xfrm>
-            <a:custGeom>
-              <a:avLst/>
-              <a:gdLst/>
-              <a:ahLst/>
-              <a:cxnLst/>
-              <a:rect r="r" b="b" t="t" l="l"/>
-              <a:pathLst>
-                <a:path h="1029335" w="1029335">
-                  <a:moveTo>
-                    <a:pt x="514604" y="0"/>
-                  </a:moveTo>
-                  <a:cubicBezTo>
-                    <a:pt x="230378" y="0"/>
-                    <a:pt x="0" y="230378"/>
-                    <a:pt x="0" y="514604"/>
-                  </a:cubicBezTo>
-                  <a:cubicBezTo>
-                    <a:pt x="0" y="798830"/>
-                    <a:pt x="230378" y="1029335"/>
-                    <a:pt x="514604" y="1029335"/>
-                  </a:cubicBezTo>
-                  <a:cubicBezTo>
-                    <a:pt x="798830" y="1029335"/>
-                    <a:pt x="1029335" y="798957"/>
-                    <a:pt x="1029335" y="514604"/>
-                  </a:cubicBezTo>
-                  <a:cubicBezTo>
-                    <a:pt x="1029335" y="230251"/>
-                    <a:pt x="798957" y="0"/>
-                    <a:pt x="514604" y="0"/>
-                  </a:cubicBezTo>
-                  <a:close/>
-                </a:path>
-              </a:pathLst>
-            </a:custGeom>
-            <a:solidFill>
-              <a:srgbClr val="117CC2"/>
-            </a:solidFill>
-          </p:spPr>
-        </p:sp>
-      </p:grpSp>
-      <p:sp>
-        <p:nvSpPr>
-          <p:cNvPr name="TextBox 12" id="12"/>
-          <p:cNvSpPr txBox="true"/>
-          <p:nvPr/>
-        </p:nvSpPr>
-        <p:spPr>
-          <a:xfrm rot="0">
-            <a:off x="6643926" y="3304051"/>
-            <a:ext cx="545211" cy="773811"/>
-          </a:xfrm>
-          <a:prstGeom prst="rect">
-            <a:avLst/>
-          </a:prstGeom>
-        </p:spPr>
-        <p:txBody>
-          <a:bodyPr anchor="t" rtlCol="false" tIns="0" lIns="0" bIns="0" rIns="0">
-            <a:spAutoFit/>
-          </a:bodyPr>
-          <a:lstStyle/>
-          <a:p>
-            <a:pPr algn="ctr">
-              <a:lnSpc>
-                <a:spcPts val="5652"/>
-              </a:lnSpc>
-            </a:pPr>
-            <a:r>
-              <a:rPr lang="en-US" sz="3600" b="true">
-                <a:solidFill>
-                  <a:srgbClr val="FFFFFF"/>
-                </a:solidFill>
-                <a:latin typeface="Nourd Bold"/>
-                <a:ea typeface="Nourd Bold"/>
-                <a:cs typeface="Nourd Bold"/>
-                <a:sym typeface="Nourd Bold"/>
-              </a:rPr>
-              <a:t>2</a:t>
-            </a:r>
-          </a:p>
-        </p:txBody>
-      </p:sp>
-      <p:grpSp>
-        <p:nvGrpSpPr>
-          <p:cNvPr name="Group 13" id="13"/>
-          <p:cNvGrpSpPr/>
-          <p:nvPr/>
-        </p:nvGrpSpPr>
-        <p:grpSpPr>
-          <a:xfrm rot="0">
-            <a:off x="6530530" y="5110925"/>
-            <a:ext cx="772001" cy="772001"/>
-            <a:chOff x="0" y="0"/>
-            <a:chExt cx="1029335" cy="1029335"/>
-          </a:xfrm>
-        </p:grpSpPr>
-        <p:sp>
-          <p:nvSpPr>
-            <p:cNvPr name="Freeform 14" id="14"/>
-            <p:cNvSpPr/>
-            <p:nvPr/>
-          </p:nvSpPr>
-          <p:spPr>
-            <a:xfrm flipH="false" flipV="false" rot="0">
-              <a:off x="0" y="0"/>
-              <a:ext cx="1029335" cy="1029335"/>
-            </a:xfrm>
-            <a:custGeom>
-              <a:avLst/>
-              <a:gdLst/>
-              <a:ahLst/>
-              <a:cxnLst/>
-              <a:rect r="r" b="b" t="t" l="l"/>
-              <a:pathLst>
-                <a:path h="1029335" w="1029335">
-                  <a:moveTo>
-                    <a:pt x="514604" y="0"/>
-                  </a:moveTo>
-                  <a:cubicBezTo>
-                    <a:pt x="230378" y="0"/>
-                    <a:pt x="0" y="230378"/>
-                    <a:pt x="0" y="514604"/>
-                  </a:cubicBezTo>
-                  <a:cubicBezTo>
-                    <a:pt x="0" y="798830"/>
-                    <a:pt x="230378" y="1029335"/>
-                    <a:pt x="514604" y="1029335"/>
-                  </a:cubicBezTo>
-                  <a:cubicBezTo>
-                    <a:pt x="798830" y="1029335"/>
-                    <a:pt x="1029335" y="798957"/>
-                    <a:pt x="1029335" y="514604"/>
-                  </a:cubicBezTo>
-                  <a:cubicBezTo>
-                    <a:pt x="1029335" y="230251"/>
-                    <a:pt x="798957" y="0"/>
-                    <a:pt x="514604" y="0"/>
-                  </a:cubicBezTo>
-                  <a:close/>
-                </a:path>
-              </a:pathLst>
-            </a:custGeom>
-            <a:solidFill>
-              <a:srgbClr val="117CC2"/>
-            </a:solidFill>
-          </p:spPr>
-        </p:sp>
-      </p:grpSp>
-      <p:sp>
-        <p:nvSpPr>
-          <p:cNvPr name="TextBox 15" id="15"/>
-          <p:cNvSpPr txBox="true"/>
-          <p:nvPr/>
-        </p:nvSpPr>
-        <p:spPr>
-          <a:xfrm rot="0">
-            <a:off x="6643926" y="5052870"/>
-            <a:ext cx="545211" cy="773811"/>
-          </a:xfrm>
-          <a:prstGeom prst="rect">
-            <a:avLst/>
-          </a:prstGeom>
-        </p:spPr>
-        <p:txBody>
-          <a:bodyPr anchor="t" rtlCol="false" tIns="0" lIns="0" bIns="0" rIns="0">
-            <a:spAutoFit/>
-          </a:bodyPr>
-          <a:lstStyle/>
-          <a:p>
-            <a:pPr algn="ctr">
-              <a:lnSpc>
-                <a:spcPts val="5652"/>
-              </a:lnSpc>
-            </a:pPr>
-            <a:r>
-              <a:rPr lang="en-US" sz="3600" b="true">
-                <a:solidFill>
-                  <a:srgbClr val="FFFFFF"/>
-                </a:solidFill>
-                <a:latin typeface="Nourd Bold"/>
-                <a:ea typeface="Nourd Bold"/>
-                <a:cs typeface="Nourd Bold"/>
-                <a:sym typeface="Nourd Bold"/>
-              </a:rPr>
-              <a:t>4</a:t>
-            </a:r>
-          </a:p>
-        </p:txBody>
-      </p:sp>
-      <p:grpSp>
-        <p:nvGrpSpPr>
-          <p:cNvPr name="Group 16" id="16"/>
-          <p:cNvGrpSpPr/>
-          <p:nvPr/>
-        </p:nvGrpSpPr>
-        <p:grpSpPr>
-          <a:xfrm rot="0">
-            <a:off x="6530530" y="4234148"/>
-            <a:ext cx="772001" cy="772001"/>
-            <a:chOff x="0" y="0"/>
-            <a:chExt cx="1029335" cy="1029335"/>
-          </a:xfrm>
-        </p:grpSpPr>
-        <p:sp>
-          <p:nvSpPr>
-            <p:cNvPr name="Freeform 17" id="17"/>
-            <p:cNvSpPr/>
-            <p:nvPr/>
-          </p:nvSpPr>
-          <p:spPr>
-            <a:xfrm flipH="false" flipV="false" rot="0">
-              <a:off x="0" y="0"/>
-              <a:ext cx="1029335" cy="1029335"/>
-            </a:xfrm>
-            <a:custGeom>
-              <a:avLst/>
-              <a:gdLst/>
-              <a:ahLst/>
-              <a:cxnLst/>
-              <a:rect r="r" b="b" t="t" l="l"/>
-              <a:pathLst>
-                <a:path h="1029335" w="1029335">
-                  <a:moveTo>
-                    <a:pt x="514604" y="0"/>
-                  </a:moveTo>
-                  <a:cubicBezTo>
-                    <a:pt x="230378" y="0"/>
-                    <a:pt x="0" y="230378"/>
-                    <a:pt x="0" y="514604"/>
-                  </a:cubicBezTo>
-                  <a:cubicBezTo>
-                    <a:pt x="0" y="798830"/>
-                    <a:pt x="230378" y="1029335"/>
-                    <a:pt x="514604" y="1029335"/>
-                  </a:cubicBezTo>
-                  <a:cubicBezTo>
-                    <a:pt x="798830" y="1029335"/>
-                    <a:pt x="1029335" y="798957"/>
-                    <a:pt x="1029335" y="514604"/>
-                  </a:cubicBezTo>
-                  <a:cubicBezTo>
-                    <a:pt x="1029335" y="230251"/>
-                    <a:pt x="798957" y="0"/>
-                    <a:pt x="514604" y="0"/>
-                  </a:cubicBezTo>
-                  <a:close/>
-                </a:path>
-              </a:pathLst>
-            </a:custGeom>
-            <a:solidFill>
-              <a:srgbClr val="117CC2"/>
-            </a:solidFill>
-          </p:spPr>
-        </p:sp>
-      </p:grpSp>
-      <p:sp>
-        <p:nvSpPr>
-          <p:cNvPr name="TextBox 18" id="18"/>
-          <p:cNvSpPr txBox="true"/>
-          <p:nvPr/>
-        </p:nvSpPr>
-        <p:spPr>
-          <a:xfrm rot="0">
-            <a:off x="6643926" y="4176093"/>
-            <a:ext cx="545211" cy="773811"/>
-          </a:xfrm>
-          <a:prstGeom prst="rect">
-            <a:avLst/>
-          </a:prstGeom>
-        </p:spPr>
-        <p:txBody>
-          <a:bodyPr anchor="t" rtlCol="false" tIns="0" lIns="0" bIns="0" rIns="0">
-            <a:spAutoFit/>
-          </a:bodyPr>
-          <a:lstStyle/>
-          <a:p>
-            <a:pPr algn="ctr">
-              <a:lnSpc>
-                <a:spcPts val="5652"/>
-              </a:lnSpc>
-            </a:pPr>
-            <a:r>
-              <a:rPr lang="en-US" sz="3600" b="true">
-                <a:solidFill>
-                  <a:srgbClr val="FFFFFF"/>
-                </a:solidFill>
-                <a:latin typeface="Nourd Bold"/>
-                <a:ea typeface="Nourd Bold"/>
-                <a:cs typeface="Nourd Bold"/>
-                <a:sym typeface="Nourd Bold"/>
-              </a:rPr>
-              <a:t>3</a:t>
-            </a:r>
-          </a:p>
-        </p:txBody>
-      </p:sp>
-      <p:grpSp>
-        <p:nvGrpSpPr>
-          <p:cNvPr name="Group 19" id="19"/>
-          <p:cNvGrpSpPr/>
-          <p:nvPr/>
-        </p:nvGrpSpPr>
-        <p:grpSpPr>
-          <a:xfrm rot="0">
-            <a:off x="6479219" y="2528687"/>
-            <a:ext cx="772001" cy="772001"/>
-            <a:chOff x="0" y="0"/>
-            <a:chExt cx="1029335" cy="1029335"/>
-          </a:xfrm>
-        </p:grpSpPr>
-        <p:sp>
-          <p:nvSpPr>
-            <p:cNvPr name="Freeform 20" id="20"/>
-            <p:cNvSpPr/>
-            <p:nvPr/>
-          </p:nvSpPr>
-          <p:spPr>
-            <a:xfrm flipH="false" flipV="false" rot="0">
-              <a:off x="0" y="0"/>
-              <a:ext cx="1029335" cy="1029335"/>
-            </a:xfrm>
-            <a:custGeom>
-              <a:avLst/>
-              <a:gdLst/>
-              <a:ahLst/>
-              <a:cxnLst/>
-              <a:rect r="r" b="b" t="t" l="l"/>
-              <a:pathLst>
-                <a:path h="1029335" w="1029335">
-                  <a:moveTo>
-                    <a:pt x="514604" y="0"/>
-                  </a:moveTo>
-                  <a:cubicBezTo>
-                    <a:pt x="230378" y="0"/>
-                    <a:pt x="0" y="230378"/>
-                    <a:pt x="0" y="514604"/>
-                  </a:cubicBezTo>
-                  <a:cubicBezTo>
-                    <a:pt x="0" y="798830"/>
-                    <a:pt x="230378" y="1029335"/>
-                    <a:pt x="514604" y="1029335"/>
-                  </a:cubicBezTo>
-                  <a:cubicBezTo>
-                    <a:pt x="798830" y="1029335"/>
-                    <a:pt x="1029335" y="798957"/>
-                    <a:pt x="1029335" y="514604"/>
-                  </a:cubicBezTo>
-                  <a:cubicBezTo>
-                    <a:pt x="1029335" y="230251"/>
-                    <a:pt x="798957" y="0"/>
-                    <a:pt x="514604" y="0"/>
-                  </a:cubicBezTo>
-                  <a:close/>
-                </a:path>
-              </a:pathLst>
-            </a:custGeom>
-            <a:solidFill>
-              <a:srgbClr val="117CC2"/>
-            </a:solidFill>
-          </p:spPr>
-        </p:sp>
-      </p:grpSp>
-      <p:sp>
-        <p:nvSpPr>
-          <p:cNvPr name="TextBox 21" id="21"/>
-          <p:cNvSpPr txBox="true"/>
-          <p:nvPr/>
-        </p:nvSpPr>
-        <p:spPr>
-          <a:xfrm rot="0">
-            <a:off x="6592614" y="2520563"/>
-            <a:ext cx="545211" cy="659511"/>
-          </a:xfrm>
-          <a:prstGeom prst="rect">
-            <a:avLst/>
-          </a:prstGeom>
-        </p:spPr>
-        <p:txBody>
-          <a:bodyPr anchor="t" rtlCol="false" tIns="0" lIns="0" bIns="0" rIns="0">
-            <a:spAutoFit/>
-          </a:bodyPr>
-          <a:lstStyle/>
-          <a:p>
-            <a:pPr algn="ctr">
-              <a:lnSpc>
-                <a:spcPts val="5652"/>
-              </a:lnSpc>
-            </a:pPr>
-            <a:r>
-              <a:rPr lang="en-US" sz="3600" b="true">
-                <a:solidFill>
-                  <a:srgbClr val="FFFFFF"/>
-                </a:solidFill>
-                <a:latin typeface="Nourd Bold"/>
-                <a:ea typeface="Nourd Bold"/>
-                <a:cs typeface="Nourd Bold"/>
-                <a:sym typeface="Nourd Bold"/>
-              </a:rPr>
-              <a:t>1</a:t>
-            </a:r>
-          </a:p>
-        </p:txBody>
-      </p:sp>
-      <p:grpSp>
-        <p:nvGrpSpPr>
-          <p:cNvPr name="Group 22" id="22"/>
-          <p:cNvGrpSpPr/>
-          <p:nvPr/>
-        </p:nvGrpSpPr>
-        <p:grpSpPr>
-          <a:xfrm rot="0">
-            <a:off x="6530530" y="5987691"/>
-            <a:ext cx="772001" cy="772001"/>
-            <a:chOff x="0" y="0"/>
-            <a:chExt cx="1029335" cy="1029335"/>
-          </a:xfrm>
-        </p:grpSpPr>
-        <p:sp>
-          <p:nvSpPr>
-            <p:cNvPr name="Freeform 23" id="23"/>
-            <p:cNvSpPr/>
-            <p:nvPr/>
-          </p:nvSpPr>
-          <p:spPr>
-            <a:xfrm flipH="false" flipV="false" rot="0">
-              <a:off x="0" y="0"/>
-              <a:ext cx="1029335" cy="1029335"/>
-            </a:xfrm>
-            <a:custGeom>
-              <a:avLst/>
-              <a:gdLst/>
-              <a:ahLst/>
-              <a:cxnLst/>
-              <a:rect r="r" b="b" t="t" l="l"/>
-              <a:pathLst>
-                <a:path h="1029335" w="1029335">
-                  <a:moveTo>
-                    <a:pt x="514604" y="0"/>
-                  </a:moveTo>
-                  <a:cubicBezTo>
-                    <a:pt x="230378" y="0"/>
-                    <a:pt x="0" y="230378"/>
-                    <a:pt x="0" y="514604"/>
-                  </a:cubicBezTo>
-                  <a:cubicBezTo>
-                    <a:pt x="0" y="798830"/>
-                    <a:pt x="230378" y="1029335"/>
-                    <a:pt x="514604" y="1029335"/>
-                  </a:cubicBezTo>
-                  <a:cubicBezTo>
-                    <a:pt x="798830" y="1029335"/>
-                    <a:pt x="1029335" y="798957"/>
-                    <a:pt x="1029335" y="514604"/>
-                  </a:cubicBezTo>
-                  <a:cubicBezTo>
-                    <a:pt x="1029335" y="230251"/>
-                    <a:pt x="798957" y="0"/>
-                    <a:pt x="514604" y="0"/>
-                  </a:cubicBezTo>
-                  <a:close/>
-                </a:path>
-              </a:pathLst>
-            </a:custGeom>
-            <a:solidFill>
-              <a:srgbClr val="117CC2"/>
-            </a:solidFill>
-          </p:spPr>
-        </p:sp>
-      </p:grpSp>
-      <p:sp>
-        <p:nvSpPr>
-          <p:cNvPr name="TextBox 24" id="24"/>
-          <p:cNvSpPr txBox="true"/>
-          <p:nvPr/>
-        </p:nvSpPr>
-        <p:spPr>
-          <a:xfrm rot="0">
-            <a:off x="6643926" y="5949601"/>
-            <a:ext cx="545211" cy="773811"/>
-          </a:xfrm>
-          <a:prstGeom prst="rect">
-            <a:avLst/>
-          </a:prstGeom>
-        </p:spPr>
-        <p:txBody>
-          <a:bodyPr anchor="t" rtlCol="false" tIns="0" lIns="0" bIns="0" rIns="0">
-            <a:spAutoFit/>
-          </a:bodyPr>
-          <a:lstStyle/>
-          <a:p>
-            <a:pPr algn="ctr">
-              <a:lnSpc>
-                <a:spcPts val="5652"/>
-              </a:lnSpc>
-            </a:pPr>
-            <a:r>
-              <a:rPr lang="en-US" sz="3600" b="true">
-                <a:solidFill>
-                  <a:srgbClr val="FFFFFF"/>
-                </a:solidFill>
-                <a:latin typeface="Nourd Bold"/>
-                <a:ea typeface="Nourd Bold"/>
-                <a:cs typeface="Nourd Bold"/>
-                <a:sym typeface="Nourd Bold"/>
-              </a:rPr>
-              <a:t>5</a:t>
-            </a:r>
-          </a:p>
-        </p:txBody>
-      </p:sp>
-      <p:grpSp>
-        <p:nvGrpSpPr>
-          <p:cNvPr name="Group 25" id="25"/>
-          <p:cNvGrpSpPr/>
-          <p:nvPr/>
-        </p:nvGrpSpPr>
-        <p:grpSpPr>
-          <a:xfrm rot="0">
-            <a:off x="6530530" y="7741244"/>
-            <a:ext cx="772001" cy="772001"/>
-            <a:chOff x="0" y="0"/>
-            <a:chExt cx="1029335" cy="1029335"/>
-          </a:xfrm>
-        </p:grpSpPr>
-        <p:sp>
-          <p:nvSpPr>
-            <p:cNvPr name="Freeform 26" id="26"/>
-            <p:cNvSpPr/>
-            <p:nvPr/>
-          </p:nvSpPr>
-          <p:spPr>
-            <a:xfrm flipH="false" flipV="false" rot="0">
-              <a:off x="0" y="0"/>
-              <a:ext cx="1029335" cy="1029335"/>
-            </a:xfrm>
-            <a:custGeom>
-              <a:avLst/>
-              <a:gdLst/>
-              <a:ahLst/>
-              <a:cxnLst/>
-              <a:rect r="r" b="b" t="t" l="l"/>
-              <a:pathLst>
-                <a:path h="1029335" w="1029335">
-                  <a:moveTo>
-                    <a:pt x="514604" y="0"/>
-                  </a:moveTo>
-                  <a:cubicBezTo>
-                    <a:pt x="230378" y="0"/>
-                    <a:pt x="0" y="230378"/>
-                    <a:pt x="0" y="514604"/>
-                  </a:cubicBezTo>
-                  <a:cubicBezTo>
-                    <a:pt x="0" y="798830"/>
-                    <a:pt x="230378" y="1029335"/>
-                    <a:pt x="514604" y="1029335"/>
-                  </a:cubicBezTo>
-                  <a:cubicBezTo>
-                    <a:pt x="798830" y="1029335"/>
-                    <a:pt x="1029335" y="798957"/>
-                    <a:pt x="1029335" y="514604"/>
-                  </a:cubicBezTo>
-                  <a:cubicBezTo>
-                    <a:pt x="1029335" y="230251"/>
-                    <a:pt x="798957" y="0"/>
-                    <a:pt x="514604" y="0"/>
-                  </a:cubicBezTo>
-                  <a:close/>
-                </a:path>
-              </a:pathLst>
-            </a:custGeom>
-            <a:solidFill>
-              <a:srgbClr val="117CC2"/>
-            </a:solidFill>
-          </p:spPr>
-        </p:sp>
-      </p:grpSp>
-      <p:grpSp>
-        <p:nvGrpSpPr>
-          <p:cNvPr name="Group 27" id="27"/>
-          <p:cNvGrpSpPr/>
-          <p:nvPr/>
-        </p:nvGrpSpPr>
-        <p:grpSpPr>
-          <a:xfrm rot="0">
-            <a:off x="6530530" y="6864467"/>
-            <a:ext cx="772001" cy="772001"/>
-            <a:chOff x="0" y="0"/>
-            <a:chExt cx="1029335" cy="1029335"/>
-          </a:xfrm>
-        </p:grpSpPr>
-        <p:sp>
-          <p:nvSpPr>
-            <p:cNvPr name="Freeform 28" id="28"/>
-            <p:cNvSpPr/>
-            <p:nvPr/>
-          </p:nvSpPr>
-          <p:spPr>
-            <a:xfrm flipH="false" flipV="false" rot="0">
-              <a:off x="0" y="0"/>
-              <a:ext cx="1029335" cy="1029335"/>
-            </a:xfrm>
-            <a:custGeom>
-              <a:avLst/>
-              <a:gdLst/>
-              <a:ahLst/>
-              <a:cxnLst/>
-              <a:rect r="r" b="b" t="t" l="l"/>
-              <a:pathLst>
-                <a:path h="1029335" w="1029335">
-                  <a:moveTo>
-                    <a:pt x="514604" y="0"/>
-                  </a:moveTo>
-                  <a:cubicBezTo>
-                    <a:pt x="230378" y="0"/>
-                    <a:pt x="0" y="230378"/>
-                    <a:pt x="0" y="514604"/>
-                  </a:cubicBezTo>
-                  <a:cubicBezTo>
-                    <a:pt x="0" y="798830"/>
-                    <a:pt x="230378" y="1029335"/>
-                    <a:pt x="514604" y="1029335"/>
-                  </a:cubicBezTo>
-                  <a:cubicBezTo>
-                    <a:pt x="798830" y="1029335"/>
-                    <a:pt x="1029335" y="798957"/>
-                    <a:pt x="1029335" y="514604"/>
-                  </a:cubicBezTo>
-                  <a:cubicBezTo>
-                    <a:pt x="1029335" y="230251"/>
-                    <a:pt x="798957" y="0"/>
-                    <a:pt x="514604" y="0"/>
-                  </a:cubicBezTo>
-                  <a:close/>
-                </a:path>
-              </a:pathLst>
-            </a:custGeom>
-            <a:solidFill>
-              <a:srgbClr val="117CC2"/>
-            </a:solidFill>
-          </p:spPr>
-        </p:sp>
-      </p:grpSp>
-      <p:sp>
-        <p:nvSpPr>
-          <p:cNvPr name="TextBox 29" id="29"/>
-          <p:cNvSpPr txBox="true"/>
-          <p:nvPr/>
-        </p:nvSpPr>
-        <p:spPr>
-          <a:xfrm rot="0">
-            <a:off x="6643926" y="6792220"/>
-            <a:ext cx="545211" cy="773811"/>
-          </a:xfrm>
-          <a:prstGeom prst="rect">
-            <a:avLst/>
-          </a:prstGeom>
-        </p:spPr>
-        <p:txBody>
-          <a:bodyPr anchor="t" rtlCol="false" tIns="0" lIns="0" bIns="0" rIns="0">
-            <a:spAutoFit/>
-          </a:bodyPr>
-          <a:lstStyle/>
-          <a:p>
-            <a:pPr algn="ctr">
-              <a:lnSpc>
-                <a:spcPts val="5652"/>
-              </a:lnSpc>
-            </a:pPr>
-            <a:r>
-              <a:rPr lang="en-US" sz="3600" b="true">
-                <a:solidFill>
-                  <a:srgbClr val="FFFFFF"/>
-                </a:solidFill>
-                <a:latin typeface="Nourd Bold"/>
-                <a:ea typeface="Nourd Bold"/>
-                <a:cs typeface="Nourd Bold"/>
-                <a:sym typeface="Nourd Bold"/>
-              </a:rPr>
-              <a:t>6</a:t>
-            </a:r>
-          </a:p>
-        </p:txBody>
-      </p:sp>
-      <p:sp>
-        <p:nvSpPr>
-          <p:cNvPr name="TextBox 30" id="30"/>
-          <p:cNvSpPr txBox="true"/>
-          <p:nvPr/>
-        </p:nvSpPr>
-        <p:spPr>
-          <a:xfrm rot="0">
-            <a:off x="6643926" y="7760294"/>
-            <a:ext cx="545211" cy="773811"/>
-          </a:xfrm>
-          <a:prstGeom prst="rect">
-            <a:avLst/>
-          </a:prstGeom>
-        </p:spPr>
-        <p:txBody>
-          <a:bodyPr anchor="t" rtlCol="false" tIns="0" lIns="0" bIns="0" rIns="0">
-            <a:spAutoFit/>
-          </a:bodyPr>
-          <a:lstStyle/>
-          <a:p>
-            <a:pPr algn="ctr">
-              <a:lnSpc>
-                <a:spcPts val="5652"/>
-              </a:lnSpc>
-            </a:pPr>
-            <a:r>
-              <a:rPr lang="en-US" sz="3600" b="true">
-                <a:solidFill>
-                  <a:srgbClr val="FFFFFF"/>
-                </a:solidFill>
-                <a:latin typeface="Nourd Bold"/>
-                <a:ea typeface="Nourd Bold"/>
-                <a:cs typeface="Nourd Bold"/>
-                <a:sym typeface="Nourd Bold"/>
-              </a:rPr>
-              <a:t>7</a:t>
-            </a:r>
-          </a:p>
-        </p:txBody>
-      </p:sp>
-      <p:grpSp>
-        <p:nvGrpSpPr>
-          <p:cNvPr name="Group 31" id="31"/>
-          <p:cNvGrpSpPr/>
-          <p:nvPr/>
-        </p:nvGrpSpPr>
-        <p:grpSpPr>
-          <a:xfrm rot="0">
-            <a:off x="6530530" y="8665635"/>
-            <a:ext cx="772001" cy="772001"/>
-            <a:chOff x="0" y="0"/>
-            <a:chExt cx="1029335" cy="1029335"/>
-          </a:xfrm>
-        </p:grpSpPr>
-        <p:sp>
-          <p:nvSpPr>
-            <p:cNvPr name="Freeform 32" id="32"/>
-            <p:cNvSpPr/>
-            <p:nvPr/>
-          </p:nvSpPr>
-          <p:spPr>
-            <a:xfrm flipH="false" flipV="false" rot="0">
-              <a:off x="0" y="0"/>
-              <a:ext cx="1029335" cy="1029335"/>
-            </a:xfrm>
-            <a:custGeom>
-              <a:avLst/>
-              <a:gdLst/>
-              <a:ahLst/>
-              <a:cxnLst/>
-              <a:rect r="r" b="b" t="t" l="l"/>
-              <a:pathLst>
-                <a:path h="1029335" w="1029335">
-                  <a:moveTo>
-                    <a:pt x="514604" y="0"/>
-                  </a:moveTo>
-                  <a:cubicBezTo>
-                    <a:pt x="230378" y="0"/>
-                    <a:pt x="0" y="230378"/>
-                    <a:pt x="0" y="514604"/>
-                  </a:cubicBezTo>
-                  <a:cubicBezTo>
-                    <a:pt x="0" y="798830"/>
-                    <a:pt x="230378" y="1029335"/>
-                    <a:pt x="514604" y="1029335"/>
-                  </a:cubicBezTo>
-                  <a:cubicBezTo>
-                    <a:pt x="798830" y="1029335"/>
-                    <a:pt x="1029335" y="798957"/>
-                    <a:pt x="1029335" y="514604"/>
-                  </a:cubicBezTo>
-                  <a:cubicBezTo>
-                    <a:pt x="1029335" y="230251"/>
-                    <a:pt x="798957" y="0"/>
-                    <a:pt x="514604" y="0"/>
-                  </a:cubicBezTo>
-                  <a:close/>
-                </a:path>
-              </a:pathLst>
-            </a:custGeom>
-            <a:solidFill>
-              <a:srgbClr val="117CC2"/>
-            </a:solidFill>
-          </p:spPr>
-        </p:sp>
-      </p:grpSp>
-      <p:sp>
-        <p:nvSpPr>
-          <p:cNvPr name="TextBox 33" id="33"/>
-          <p:cNvSpPr txBox="true"/>
-          <p:nvPr/>
-        </p:nvSpPr>
-        <p:spPr>
-          <a:xfrm rot="0">
-            <a:off x="6643926" y="8637070"/>
-            <a:ext cx="545211" cy="659511"/>
-          </a:xfrm>
-          <a:prstGeom prst="rect">
-            <a:avLst/>
-          </a:prstGeom>
-        </p:spPr>
-        <p:txBody>
-          <a:bodyPr anchor="t" rtlCol="false" tIns="0" lIns="0" bIns="0" rIns="0">
-            <a:spAutoFit/>
-          </a:bodyPr>
-          <a:lstStyle/>
-          <a:p>
-            <a:pPr algn="ctr">
-              <a:lnSpc>
-                <a:spcPts val="5652"/>
-              </a:lnSpc>
-            </a:pPr>
-            <a:r>
-              <a:rPr lang="en-US" sz="3600" b="true">
-                <a:solidFill>
-                  <a:srgbClr val="FFFFFF"/>
-                </a:solidFill>
-                <a:latin typeface="Nourd Bold"/>
-                <a:ea typeface="Nourd Bold"/>
-                <a:cs typeface="Nourd Bold"/>
-                <a:sym typeface="Nourd Bold"/>
-              </a:rPr>
-              <a:t>8</a:t>
-            </a:r>
-          </a:p>
-        </p:txBody>
-      </p:sp>
-      <p:sp>
-        <p:nvSpPr>
-          <p:cNvPr name="TextBox 34" id="34"/>
-          <p:cNvSpPr txBox="true"/>
-          <p:nvPr/>
-        </p:nvSpPr>
-        <p:spPr>
-          <a:xfrm rot="0">
-            <a:off x="7827264" y="2459736"/>
-            <a:ext cx="3108960" cy="502920"/>
-          </a:xfrm>
-          <a:prstGeom prst="rect">
-            <a:avLst/>
-          </a:prstGeom>
-        </p:spPr>
-        <p:txBody>
-          <a:bodyPr anchor="t" rtlCol="false" tIns="0" lIns="0" bIns="0" rIns="0">
-            <a:spAutoFit/>
-          </a:bodyPr>
-          <a:lstStyle/>
-          <a:p>
-            <a:pPr algn="ctr">
-              <a:lnSpc>
-                <a:spcPts val="4184"/>
-              </a:lnSpc>
-              <a:spcBef>
-                <a:spcPct val="0"/>
-              </a:spcBef>
-            </a:pPr>
-            <a:r>
-              <a:rPr lang="en-US" b="true" sz="2665">
-                <a:solidFill>
-                  <a:srgbClr val="000000"/>
-                </a:solidFill>
-                <a:latin typeface="Montaser Arabic Bold"/>
-                <a:ea typeface="Montaser Arabic Bold"/>
-                <a:cs typeface="Montaser Arabic Bold"/>
-                <a:sym typeface="Montaser Arabic Bold"/>
-              </a:rPr>
-              <a:t>Portada </a:t>
-            </a:r>
-          </a:p>
-        </p:txBody>
-      </p:sp>
-      <p:sp>
-        <p:nvSpPr>
-          <p:cNvPr name="TextBox 35" id="35"/>
-          <p:cNvSpPr txBox="true"/>
-          <p:nvPr/>
-        </p:nvSpPr>
-        <p:spPr>
-          <a:xfrm rot="0">
-            <a:off x="7827264" y="3447288"/>
-            <a:ext cx="3108960" cy="502920"/>
-          </a:xfrm>
-          <a:prstGeom prst="rect">
-            <a:avLst/>
-          </a:prstGeom>
-        </p:spPr>
-        <p:txBody>
-          <a:bodyPr anchor="t" rtlCol="false" tIns="0" lIns="0" bIns="0" rIns="0">
-            <a:spAutoFit/>
-          </a:bodyPr>
-          <a:lstStyle/>
-          <a:p>
-            <a:pPr algn="ctr">
-              <a:lnSpc>
-                <a:spcPts val="4184"/>
-              </a:lnSpc>
-              <a:spcBef>
-                <a:spcPct val="0"/>
-              </a:spcBef>
-            </a:pPr>
-            <a:r>
-              <a:rPr lang="en-US" b="true" sz="2665">
-                <a:solidFill>
-                  <a:srgbClr val="000000"/>
-                </a:solidFill>
-                <a:latin typeface="Montaser Arabic Bold"/>
-                <a:ea typeface="Montaser Arabic Bold"/>
-                <a:cs typeface="Montaser Arabic Bold"/>
-                <a:sym typeface="Montaser Arabic Bold"/>
-              </a:rPr>
-              <a:t>Proyecto</a:t>
-            </a:r>
-          </a:p>
-        </p:txBody>
-      </p:sp>
-      <p:sp>
-        <p:nvSpPr>
-          <p:cNvPr name="TextBox 36" id="36"/>
-          <p:cNvSpPr txBox="true"/>
-          <p:nvPr/>
-        </p:nvSpPr>
-        <p:spPr>
-          <a:xfrm rot="0">
-            <a:off x="7827264" y="4325112"/>
-            <a:ext cx="3108960" cy="502920"/>
-          </a:xfrm>
-          <a:prstGeom prst="rect">
-            <a:avLst/>
-          </a:prstGeom>
-        </p:spPr>
-        <p:txBody>
-          <a:bodyPr anchor="t" rtlCol="false" tIns="0" lIns="0" bIns="0" rIns="0">
-            <a:spAutoFit/>
-          </a:bodyPr>
-          <a:lstStyle/>
-          <a:p>
-            <a:pPr algn="ctr">
-              <a:lnSpc>
-                <a:spcPts val="4184"/>
-              </a:lnSpc>
-              <a:spcBef>
-                <a:spcPct val="0"/>
-              </a:spcBef>
-            </a:pPr>
-            <a:r>
-              <a:rPr lang="en-US" b="true" sz="2665">
-                <a:solidFill>
-                  <a:srgbClr val="000000"/>
-                </a:solidFill>
-                <a:latin typeface="Montaser Arabic Bold"/>
-                <a:ea typeface="Montaser Arabic Bold"/>
-                <a:cs typeface="Montaser Arabic Bold"/>
-                <a:sym typeface="Montaser Arabic Bold"/>
-              </a:rPr>
-              <a:t>Problema</a:t>
-            </a:r>
-          </a:p>
-        </p:txBody>
-      </p:sp>
-      <p:sp>
-        <p:nvSpPr>
-          <p:cNvPr name="TextBox 37" id="37"/>
-          <p:cNvSpPr txBox="true"/>
-          <p:nvPr/>
-        </p:nvSpPr>
-        <p:spPr>
-          <a:xfrm rot="0">
-            <a:off x="7827264" y="5193792"/>
-            <a:ext cx="3108960" cy="502920"/>
-          </a:xfrm>
-          <a:prstGeom prst="rect">
-            <a:avLst/>
-          </a:prstGeom>
-        </p:spPr>
-        <p:txBody>
-          <a:bodyPr anchor="t" rtlCol="false" tIns="0" lIns="0" bIns="0" rIns="0">
-            <a:spAutoFit/>
-          </a:bodyPr>
-          <a:lstStyle/>
-          <a:p>
-            <a:pPr algn="ctr">
-              <a:lnSpc>
-                <a:spcPts val="4184"/>
-              </a:lnSpc>
-              <a:spcBef>
-                <a:spcPct val="0"/>
-              </a:spcBef>
-            </a:pPr>
-            <a:r>
-              <a:rPr lang="en-US" b="true" sz="2665">
-                <a:solidFill>
-                  <a:srgbClr val="000000"/>
-                </a:solidFill>
-                <a:latin typeface="Montaser Arabic Bold"/>
-                <a:ea typeface="Montaser Arabic Bold"/>
-                <a:cs typeface="Montaser Arabic Bold"/>
-                <a:sym typeface="Montaser Arabic Bold"/>
-              </a:rPr>
-              <a:t>Descripción</a:t>
-            </a:r>
-          </a:p>
-        </p:txBody>
-      </p:sp>
-      <p:sp>
-        <p:nvSpPr>
-          <p:cNvPr name="TextBox 38" id="38"/>
-          <p:cNvSpPr txBox="true"/>
-          <p:nvPr/>
-        </p:nvSpPr>
-        <p:spPr>
-          <a:xfrm rot="0">
-            <a:off x="7827264" y="6062472"/>
-            <a:ext cx="3108960" cy="502920"/>
-          </a:xfrm>
-          <a:prstGeom prst="rect">
-            <a:avLst/>
-          </a:prstGeom>
-        </p:spPr>
-        <p:txBody>
-          <a:bodyPr anchor="t" rtlCol="false" tIns="0" lIns="0" bIns="0" rIns="0">
-            <a:spAutoFit/>
-          </a:bodyPr>
-          <a:lstStyle/>
-          <a:p>
-            <a:pPr algn="ctr">
-              <a:lnSpc>
-                <a:spcPts val="4184"/>
-              </a:lnSpc>
-              <a:spcBef>
-                <a:spcPct val="0"/>
-              </a:spcBef>
-            </a:pPr>
-            <a:r>
-              <a:rPr lang="en-US" b="true" sz="2665">
-                <a:solidFill>
-                  <a:srgbClr val="000000"/>
-                </a:solidFill>
-                <a:latin typeface="Montaser Arabic Bold"/>
-                <a:ea typeface="Montaser Arabic Bold"/>
-                <a:cs typeface="Montaser Arabic Bold"/>
-                <a:sym typeface="Montaser Arabic Bold"/>
-              </a:rPr>
-              <a:t>Objetivo</a:t>
-            </a:r>
-          </a:p>
-        </p:txBody>
-      </p:sp>
-      <p:sp>
-        <p:nvSpPr>
-          <p:cNvPr name="TextBox 39" id="39"/>
-          <p:cNvSpPr txBox="true"/>
-          <p:nvPr/>
-        </p:nvSpPr>
-        <p:spPr>
-          <a:xfrm rot="0">
-            <a:off x="7827264" y="6940296"/>
-            <a:ext cx="3108960" cy="502920"/>
-          </a:xfrm>
-          <a:prstGeom prst="rect">
-            <a:avLst/>
-          </a:prstGeom>
-        </p:spPr>
-        <p:txBody>
-          <a:bodyPr anchor="t" rtlCol="false" tIns="0" lIns="0" bIns="0" rIns="0">
-            <a:spAutoFit/>
-          </a:bodyPr>
-          <a:lstStyle/>
-          <a:p>
-            <a:pPr algn="ctr">
-              <a:lnSpc>
-                <a:spcPts val="4184"/>
-              </a:lnSpc>
-              <a:spcBef>
-                <a:spcPct val="0"/>
-              </a:spcBef>
-            </a:pPr>
-            <a:r>
-              <a:rPr lang="en-US" b="true" sz="2665">
-                <a:solidFill>
-                  <a:srgbClr val="000000"/>
-                </a:solidFill>
-                <a:latin typeface="Montaser Arabic Bold"/>
-                <a:ea typeface="Montaser Arabic Bold"/>
-                <a:cs typeface="Montaser Arabic Bold"/>
-                <a:sym typeface="Montaser Arabic Bold"/>
-              </a:rPr>
-              <a:t>Misión</a:t>
-            </a:r>
-          </a:p>
-        </p:txBody>
-      </p:sp>
-      <p:sp>
-        <p:nvSpPr>
-          <p:cNvPr name="TextBox 40" id="40"/>
-          <p:cNvSpPr txBox="true"/>
-          <p:nvPr/>
-        </p:nvSpPr>
-        <p:spPr>
-          <a:xfrm rot="0">
-            <a:off x="7827264" y="7808975"/>
-            <a:ext cx="3108960" cy="502920"/>
-          </a:xfrm>
-          <a:prstGeom prst="rect">
-            <a:avLst/>
-          </a:prstGeom>
-        </p:spPr>
-        <p:txBody>
-          <a:bodyPr anchor="t" rtlCol="false" tIns="0" lIns="0" bIns="0" rIns="0">
-            <a:spAutoFit/>
-          </a:bodyPr>
-          <a:lstStyle/>
-          <a:p>
-            <a:pPr algn="ctr">
-              <a:lnSpc>
-                <a:spcPts val="4184"/>
-              </a:lnSpc>
-              <a:spcBef>
-                <a:spcPct val="0"/>
-              </a:spcBef>
-            </a:pPr>
-            <a:r>
-              <a:rPr lang="en-US" b="true" sz="2665">
-                <a:solidFill>
-                  <a:srgbClr val="000000"/>
-                </a:solidFill>
-                <a:latin typeface="Montaser Arabic Bold"/>
-                <a:ea typeface="Montaser Arabic Bold"/>
-                <a:cs typeface="Montaser Arabic Bold"/>
-                <a:sym typeface="Montaser Arabic Bold"/>
-              </a:rPr>
-              <a:t>Visión</a:t>
-            </a:r>
-          </a:p>
-        </p:txBody>
-      </p:sp>
-      <p:sp>
-        <p:nvSpPr>
-          <p:cNvPr name="TextBox 41" id="41"/>
-          <p:cNvSpPr txBox="true"/>
-          <p:nvPr/>
-        </p:nvSpPr>
-        <p:spPr>
-          <a:xfrm rot="0">
-            <a:off x="7827264" y="8796528"/>
-            <a:ext cx="3108960" cy="502920"/>
-          </a:xfrm>
-          <a:prstGeom prst="rect">
-            <a:avLst/>
-          </a:prstGeom>
-        </p:spPr>
-        <p:txBody>
-          <a:bodyPr anchor="t" rtlCol="false" tIns="0" lIns="0" bIns="0" rIns="0">
-            <a:spAutoFit/>
-          </a:bodyPr>
-          <a:lstStyle/>
-          <a:p>
-            <a:pPr algn="ctr">
-              <a:lnSpc>
-                <a:spcPts val="4184"/>
-              </a:lnSpc>
-              <a:spcBef>
-                <a:spcPct val="0"/>
-              </a:spcBef>
-            </a:pPr>
-            <a:r>
-              <a:rPr lang="en-US" b="true" sz="2665">
-                <a:solidFill>
-                  <a:srgbClr val="000000"/>
-                </a:solidFill>
-                <a:latin typeface="Montaser Arabic Bold"/>
-                <a:ea typeface="Montaser Arabic Bold"/>
-                <a:cs typeface="Montaser Arabic Bold"/>
-                <a:sym typeface="Montaser Arabic Bold"/>
-              </a:rPr>
-              <a:t>Propósitos</a:t>
-            </a:r>
-          </a:p>
-        </p:txBody>
-      </p:sp>
-      <p:grpSp>
-        <p:nvGrpSpPr>
-          <p:cNvPr name="Group 42" id="42"/>
-          <p:cNvGrpSpPr/>
-          <p:nvPr/>
-        </p:nvGrpSpPr>
-        <p:grpSpPr>
-          <a:xfrm rot="0">
-            <a:off x="10369913" y="3430662"/>
-            <a:ext cx="772001" cy="772001"/>
-            <a:chOff x="0" y="0"/>
-            <a:chExt cx="1029335" cy="1029335"/>
-          </a:xfrm>
-        </p:grpSpPr>
-        <p:sp>
-          <p:nvSpPr>
-            <p:cNvPr name="Freeform 43" id="43"/>
-            <p:cNvSpPr/>
-            <p:nvPr/>
-          </p:nvSpPr>
-          <p:spPr>
-            <a:xfrm flipH="false" flipV="false" rot="0">
-              <a:off x="0" y="0"/>
-              <a:ext cx="1029335" cy="1029335"/>
-            </a:xfrm>
-            <a:custGeom>
-              <a:avLst/>
-              <a:gdLst/>
-              <a:ahLst/>
-              <a:cxnLst/>
-              <a:rect r="r" b="b" t="t" l="l"/>
-              <a:pathLst>
-                <a:path h="1029335" w="1029335">
-                  <a:moveTo>
-                    <a:pt x="514604" y="0"/>
-                  </a:moveTo>
-                  <a:cubicBezTo>
-                    <a:pt x="230378" y="0"/>
-                    <a:pt x="0" y="230378"/>
-                    <a:pt x="0" y="514604"/>
-                  </a:cubicBezTo>
-                  <a:cubicBezTo>
-                    <a:pt x="0" y="798830"/>
-                    <a:pt x="230378" y="1029335"/>
-                    <a:pt x="514604" y="1029335"/>
-                  </a:cubicBezTo>
-                  <a:cubicBezTo>
-                    <a:pt x="798830" y="1029335"/>
-                    <a:pt x="1029335" y="798957"/>
-                    <a:pt x="1029335" y="514604"/>
-                  </a:cubicBezTo>
-                  <a:cubicBezTo>
-                    <a:pt x="1029335" y="230251"/>
-                    <a:pt x="798957" y="0"/>
-                    <a:pt x="514604" y="0"/>
-                  </a:cubicBezTo>
-                  <a:close/>
-                </a:path>
-              </a:pathLst>
-            </a:custGeom>
-            <a:solidFill>
-              <a:srgbClr val="117CC2"/>
-            </a:solidFill>
-          </p:spPr>
-        </p:sp>
-      </p:grpSp>
-      <p:sp>
-        <p:nvSpPr>
-          <p:cNvPr name="TextBox 44" id="44"/>
-          <p:cNvSpPr txBox="true"/>
-          <p:nvPr/>
-        </p:nvSpPr>
-        <p:spPr>
-          <a:xfrm rot="0">
-            <a:off x="10483308" y="3429305"/>
-            <a:ext cx="545211" cy="659511"/>
-          </a:xfrm>
-          <a:prstGeom prst="rect">
-            <a:avLst/>
-          </a:prstGeom>
-        </p:spPr>
-        <p:txBody>
-          <a:bodyPr anchor="t" rtlCol="false" tIns="0" lIns="0" bIns="0" rIns="0">
-            <a:spAutoFit/>
-          </a:bodyPr>
-          <a:lstStyle/>
-          <a:p>
-            <a:pPr algn="ctr">
-              <a:lnSpc>
-                <a:spcPts val="5652"/>
-              </a:lnSpc>
-            </a:pPr>
-            <a:r>
-              <a:rPr lang="en-US" sz="3600" b="true">
-                <a:solidFill>
-                  <a:srgbClr val="FFFFFF"/>
-                </a:solidFill>
-                <a:latin typeface="Nourd Bold"/>
-                <a:ea typeface="Nourd Bold"/>
-                <a:cs typeface="Nourd Bold"/>
-                <a:sym typeface="Nourd Bold"/>
-              </a:rPr>
-              <a:t>10</a:t>
-            </a:r>
-          </a:p>
-        </p:txBody>
-      </p:sp>
-      <p:sp>
-        <p:nvSpPr>
-          <p:cNvPr name="TextBox 45" id="45"/>
-          <p:cNvSpPr txBox="true"/>
-          <p:nvPr/>
-        </p:nvSpPr>
-        <p:spPr>
-          <a:xfrm rot="0">
-            <a:off x="11608639" y="3518170"/>
-            <a:ext cx="3619217" cy="500831"/>
-          </a:xfrm>
-          <a:prstGeom prst="rect">
-            <a:avLst/>
-          </a:prstGeom>
-        </p:spPr>
-        <p:txBody>
-          <a:bodyPr anchor="t" rtlCol="false" tIns="0" lIns="0" bIns="0" rIns="0">
-            <a:spAutoFit/>
-          </a:bodyPr>
-          <a:lstStyle/>
-          <a:p>
-            <a:pPr algn="ctr">
-              <a:lnSpc>
-                <a:spcPts val="4184"/>
-              </a:lnSpc>
-              <a:spcBef>
-                <a:spcPct val="0"/>
-              </a:spcBef>
-            </a:pPr>
-            <a:r>
-              <a:rPr lang="en-US" b="true" sz="2665">
-                <a:solidFill>
-                  <a:srgbClr val="000000"/>
-                </a:solidFill>
-                <a:latin typeface="Montaser Arabic Bold"/>
-                <a:ea typeface="Montaser Arabic Bold"/>
-                <a:cs typeface="Montaser Arabic Bold"/>
-                <a:sym typeface="Montaser Arabic Bold"/>
-              </a:rPr>
-              <a:t>Enfoque</a:t>
-            </a:r>
-          </a:p>
-        </p:txBody>
-      </p:sp>
-      <p:grpSp>
-        <p:nvGrpSpPr>
-          <p:cNvPr name="Group 46" id="46"/>
-          <p:cNvGrpSpPr/>
-          <p:nvPr/>
-        </p:nvGrpSpPr>
-        <p:grpSpPr>
-          <a:xfrm rot="0">
-            <a:off x="10369913" y="2577998"/>
-            <a:ext cx="772001" cy="772001"/>
-            <a:chOff x="0" y="0"/>
-            <a:chExt cx="1029335" cy="1029335"/>
-          </a:xfrm>
-        </p:grpSpPr>
-        <p:sp>
-          <p:nvSpPr>
-            <p:cNvPr name="Freeform 47" id="47"/>
-            <p:cNvSpPr/>
-            <p:nvPr/>
-          </p:nvSpPr>
-          <p:spPr>
-            <a:xfrm flipH="false" flipV="false" rot="0">
-              <a:off x="0" y="0"/>
-              <a:ext cx="1029335" cy="1029335"/>
-            </a:xfrm>
-            <a:custGeom>
-              <a:avLst/>
-              <a:gdLst/>
-              <a:ahLst/>
-              <a:cxnLst/>
-              <a:rect r="r" b="b" t="t" l="l"/>
-              <a:pathLst>
-                <a:path h="1029335" w="1029335">
-                  <a:moveTo>
-                    <a:pt x="514604" y="0"/>
-                  </a:moveTo>
-                  <a:cubicBezTo>
-                    <a:pt x="230378" y="0"/>
-                    <a:pt x="0" y="230378"/>
-                    <a:pt x="0" y="514604"/>
-                  </a:cubicBezTo>
-                  <a:cubicBezTo>
-                    <a:pt x="0" y="798830"/>
-                    <a:pt x="230378" y="1029335"/>
-                    <a:pt x="514604" y="1029335"/>
-                  </a:cubicBezTo>
-                  <a:cubicBezTo>
-                    <a:pt x="798830" y="1029335"/>
-                    <a:pt x="1029335" y="798957"/>
-                    <a:pt x="1029335" y="514604"/>
-                  </a:cubicBezTo>
-                  <a:cubicBezTo>
-                    <a:pt x="1029335" y="230251"/>
-                    <a:pt x="798957" y="0"/>
-                    <a:pt x="514604" y="0"/>
-                  </a:cubicBezTo>
-                  <a:close/>
-                </a:path>
-              </a:pathLst>
-            </a:custGeom>
-            <a:solidFill>
-              <a:srgbClr val="117CC2"/>
-            </a:solidFill>
-          </p:spPr>
-        </p:sp>
-      </p:grpSp>
-      <p:sp>
-        <p:nvSpPr>
-          <p:cNvPr name="TextBox 48" id="48"/>
-          <p:cNvSpPr txBox="true"/>
-          <p:nvPr/>
-        </p:nvSpPr>
-        <p:spPr>
-          <a:xfrm rot="0">
-            <a:off x="10483308" y="2596143"/>
-            <a:ext cx="545211" cy="659511"/>
-          </a:xfrm>
-          <a:prstGeom prst="rect">
-            <a:avLst/>
-          </a:prstGeom>
-        </p:spPr>
-        <p:txBody>
-          <a:bodyPr anchor="t" rtlCol="false" tIns="0" lIns="0" bIns="0" rIns="0">
-            <a:spAutoFit/>
-          </a:bodyPr>
-          <a:lstStyle/>
-          <a:p>
-            <a:pPr algn="ctr">
-              <a:lnSpc>
-                <a:spcPts val="5652"/>
-              </a:lnSpc>
-            </a:pPr>
-            <a:r>
-              <a:rPr lang="en-US" sz="3600" b="true">
-                <a:solidFill>
-                  <a:srgbClr val="FFFFFF"/>
-                </a:solidFill>
-                <a:latin typeface="Nourd Bold"/>
-                <a:ea typeface="Nourd Bold"/>
-                <a:cs typeface="Nourd Bold"/>
-                <a:sym typeface="Nourd Bold"/>
-              </a:rPr>
-              <a:t>9</a:t>
-            </a:r>
-          </a:p>
-        </p:txBody>
-      </p:sp>
-      <p:sp>
-        <p:nvSpPr>
-          <p:cNvPr name="TextBox 49" id="49"/>
-          <p:cNvSpPr txBox="true"/>
-          <p:nvPr/>
-        </p:nvSpPr>
-        <p:spPr>
-          <a:xfrm rot="0">
-            <a:off x="11608639" y="2621547"/>
-            <a:ext cx="3092540" cy="500831"/>
-          </a:xfrm>
-          <a:prstGeom prst="rect">
-            <a:avLst/>
-          </a:prstGeom>
-        </p:spPr>
-        <p:txBody>
-          <a:bodyPr anchor="t" rtlCol="false" tIns="0" lIns="0" bIns="0" rIns="0">
-            <a:spAutoFit/>
-          </a:bodyPr>
-          <a:lstStyle/>
-          <a:p>
-            <a:pPr algn="ctr">
-              <a:lnSpc>
-                <a:spcPts val="4184"/>
-              </a:lnSpc>
-              <a:spcBef>
-                <a:spcPct val="0"/>
-              </a:spcBef>
-            </a:pPr>
-            <a:r>
-              <a:rPr lang="en-US" b="true" sz="2665">
-                <a:solidFill>
-                  <a:srgbClr val="000000"/>
-                </a:solidFill>
-                <a:latin typeface="Montaser Arabic Bold"/>
-                <a:ea typeface="Montaser Arabic Bold"/>
-                <a:cs typeface="Montaser Arabic Bold"/>
-                <a:sym typeface="Montaser Arabic Bold"/>
-              </a:rPr>
-              <a:t>STEAM</a:t>
             </a:r>
           </a:p>
         </p:txBody>
@@ -10817,491 +6498,6 @@
 </p:sld>
 </file>
 
-<file path=ppt/slides/slide5.xml><?xml version="1.0" encoding="utf-8"?>
-<p:sld xmlns:p="http://schemas.openxmlformats.org/presentationml/2006/main" xmlns:a="http://schemas.openxmlformats.org/drawingml/2006/main" xmlns:r="http://schemas.openxmlformats.org/officeDocument/2006/relationships">
-  <p:cSld>
-    <p:bg>
-      <p:bgPr>
-        <a:solidFill>
-          <a:srgbClr val="07416B"/>
-        </a:solidFill>
-      </p:bgPr>
-    </p:bg>
-    <p:spTree>
-      <p:nvGrpSpPr>
-        <p:cNvPr id="1" name=""/>
-        <p:cNvGrpSpPr/>
-        <p:nvPr/>
-      </p:nvGrpSpPr>
-      <p:grpSpPr>
-        <a:xfrm>
-          <a:off x="0" y="0"/>
-          <a:ext cx="0" cy="0"/>
-          <a:chOff x="0" y="0"/>
-          <a:chExt cx="0" cy="0"/>
-        </a:xfrm>
-      </p:grpSpPr>
-      <p:sp>
-        <p:nvSpPr>
-          <p:cNvPr name="Freeform 2" id="2"/>
-          <p:cNvSpPr/>
-          <p:nvPr/>
-        </p:nvSpPr>
-        <p:spPr>
-          <a:xfrm flipH="false" flipV="false" rot="-10800000">
-            <a:off x="13760634" y="9275893"/>
-            <a:ext cx="4527366" cy="1011107"/>
-          </a:xfrm>
-          <a:custGeom>
-            <a:avLst/>
-            <a:gdLst/>
-            <a:ahLst/>
-            <a:cxnLst/>
-            <a:rect r="r" b="b" t="t" l="l"/>
-            <a:pathLst>
-              <a:path h="1011107" w="4527366">
-                <a:moveTo>
-                  <a:pt x="0" y="0"/>
-                </a:moveTo>
-                <a:lnTo>
-                  <a:pt x="4527366" y="0"/>
-                </a:lnTo>
-                <a:lnTo>
-                  <a:pt x="4527366" y="1011107"/>
-                </a:lnTo>
-                <a:lnTo>
-                  <a:pt x="0" y="1011107"/>
-                </a:lnTo>
-                <a:lnTo>
-                  <a:pt x="0" y="0"/>
-                </a:lnTo>
-                <a:close/>
-              </a:path>
-            </a:pathLst>
-          </a:custGeom>
-          <a:blipFill>
-            <a:blip r:embed="rId2">
-              <a:extLst>
-                <a:ext uri="{96DAC541-7B7A-43D3-8B79-37D633B846F1}">
-                  <asvg:svgBlip xmlns:asvg="http://schemas.microsoft.com/office/drawing/2016/SVG/main" r:embed="rId3"/>
-                </a:ext>
-              </a:extLst>
-            </a:blip>
-            <a:stretch>
-              <a:fillRect l="0" t="-325" r="0" b="-326"/>
-            </a:stretch>
-          </a:blipFill>
-        </p:spPr>
-      </p:sp>
-      <p:sp>
-        <p:nvSpPr>
-          <p:cNvPr name="Freeform 3" id="3"/>
-          <p:cNvSpPr/>
-          <p:nvPr/>
-        </p:nvSpPr>
-        <p:spPr>
-          <a:xfrm flipH="false" flipV="false" rot="5400000">
-            <a:off x="-1427264" y="1392555"/>
-            <a:ext cx="4527366" cy="1011107"/>
-          </a:xfrm>
-          <a:custGeom>
-            <a:avLst/>
-            <a:gdLst/>
-            <a:ahLst/>
-            <a:cxnLst/>
-            <a:rect r="r" b="b" t="t" l="l"/>
-            <a:pathLst>
-              <a:path h="1011107" w="4527366">
-                <a:moveTo>
-                  <a:pt x="0" y="0"/>
-                </a:moveTo>
-                <a:lnTo>
-                  <a:pt x="4527366" y="0"/>
-                </a:lnTo>
-                <a:lnTo>
-                  <a:pt x="4527366" y="1011107"/>
-                </a:lnTo>
-                <a:lnTo>
-                  <a:pt x="0" y="1011107"/>
-                </a:lnTo>
-                <a:lnTo>
-                  <a:pt x="0" y="0"/>
-                </a:lnTo>
-                <a:close/>
-              </a:path>
-            </a:pathLst>
-          </a:custGeom>
-          <a:blipFill>
-            <a:blip r:embed="rId2">
-              <a:extLst>
-                <a:ext uri="{96DAC541-7B7A-43D3-8B79-37D633B846F1}">
-                  <asvg:svgBlip xmlns:asvg="http://schemas.microsoft.com/office/drawing/2016/SVG/main" r:embed="rId3"/>
-                </a:ext>
-              </a:extLst>
-            </a:blip>
-            <a:stretch>
-              <a:fillRect l="0" t="-325" r="0" b="-326"/>
-            </a:stretch>
-          </a:blipFill>
-        </p:spPr>
-      </p:sp>
-      <p:sp>
-        <p:nvSpPr>
-          <p:cNvPr name="Freeform 4" id="4"/>
-          <p:cNvSpPr/>
-          <p:nvPr/>
-        </p:nvSpPr>
-        <p:spPr>
-          <a:xfrm flipH="false" flipV="false" rot="-5400000">
-            <a:off x="14538541" y="-1468688"/>
-            <a:ext cx="2280771" cy="5218147"/>
-          </a:xfrm>
-          <a:custGeom>
-            <a:avLst/>
-            <a:gdLst/>
-            <a:ahLst/>
-            <a:cxnLst/>
-            <a:rect r="r" b="b" t="t" l="l"/>
-            <a:pathLst>
-              <a:path h="5218147" w="2280771">
-                <a:moveTo>
-                  <a:pt x="0" y="0"/>
-                </a:moveTo>
-                <a:lnTo>
-                  <a:pt x="2280771" y="0"/>
-                </a:lnTo>
-                <a:lnTo>
-                  <a:pt x="2280771" y="5218147"/>
-                </a:lnTo>
-                <a:lnTo>
-                  <a:pt x="0" y="5218147"/>
-                </a:lnTo>
-                <a:lnTo>
-                  <a:pt x="0" y="0"/>
-                </a:lnTo>
-                <a:close/>
-              </a:path>
-            </a:pathLst>
-          </a:custGeom>
-          <a:blipFill>
-            <a:blip r:embed="rId4">
-              <a:extLst>
-                <a:ext uri="{96DAC541-7B7A-43D3-8B79-37D633B846F1}">
-                  <asvg:svgBlip xmlns:asvg="http://schemas.microsoft.com/office/drawing/2016/SVG/main" r:embed="rId5"/>
-                </a:ext>
-              </a:extLst>
-            </a:blip>
-            <a:stretch>
-              <a:fillRect l="-99" t="0" r="-99" b="0"/>
-            </a:stretch>
-          </a:blipFill>
-        </p:spPr>
-      </p:sp>
-      <p:sp>
-        <p:nvSpPr>
-          <p:cNvPr name="Freeform 5" id="5"/>
-          <p:cNvSpPr/>
-          <p:nvPr/>
-        </p:nvSpPr>
-        <p:spPr>
-          <a:xfrm flipH="false" flipV="true" rot="0">
-            <a:off x="0" y="7302075"/>
-            <a:ext cx="3564093" cy="2984925"/>
-          </a:xfrm>
-          <a:custGeom>
-            <a:avLst/>
-            <a:gdLst/>
-            <a:ahLst/>
-            <a:cxnLst/>
-            <a:rect r="r" b="b" t="t" l="l"/>
-            <a:pathLst>
-              <a:path h="2984925" w="3564093">
-                <a:moveTo>
-                  <a:pt x="0" y="2984925"/>
-                </a:moveTo>
-                <a:lnTo>
-                  <a:pt x="3564093" y="2984925"/>
-                </a:lnTo>
-                <a:lnTo>
-                  <a:pt x="3564093" y="0"/>
-                </a:lnTo>
-                <a:lnTo>
-                  <a:pt x="0" y="0"/>
-                </a:lnTo>
-                <a:lnTo>
-                  <a:pt x="0" y="2984925"/>
-                </a:lnTo>
-                <a:close/>
-              </a:path>
-            </a:pathLst>
-          </a:custGeom>
-          <a:blipFill>
-            <a:blip r:embed="rId6">
-              <a:extLst>
-                <a:ext uri="{96DAC541-7B7A-43D3-8B79-37D633B846F1}">
-                  <asvg:svgBlip xmlns:asvg="http://schemas.microsoft.com/office/drawing/2016/SVG/main" r:embed="rId7"/>
-                </a:ext>
-              </a:extLst>
-            </a:blip>
-            <a:stretch>
-              <a:fillRect l="-9" t="0" r="-10" b="0"/>
-            </a:stretch>
-          </a:blipFill>
-        </p:spPr>
-      </p:sp>
-      <p:sp>
-        <p:nvSpPr>
-          <p:cNvPr name="TextBox 6" id="6"/>
-          <p:cNvSpPr txBox="true"/>
-          <p:nvPr/>
-        </p:nvSpPr>
-        <p:spPr>
-          <a:xfrm rot="0">
-            <a:off x="3566160" y="2651760"/>
-            <a:ext cx="11155680" cy="3840480"/>
-          </a:xfrm>
-          <a:prstGeom prst="rect">
-            <a:avLst/>
-          </a:prstGeom>
-        </p:spPr>
-        <p:txBody>
-          <a:bodyPr anchor="t" rtlCol="false" tIns="0" lIns="0" bIns="0" rIns="0">
-            <a:spAutoFit/>
-          </a:bodyPr>
-          <a:lstStyle/>
-          <a:p>
-            <a:pPr algn="ctr">
-              <a:lnSpc>
-                <a:spcPts val="3547"/>
-              </a:lnSpc>
-            </a:pPr>
-          </a:p>
-          <a:p>
-            <a:pPr algn="ctr">
-              <a:lnSpc>
-                <a:spcPts val="3547"/>
-              </a:lnSpc>
-            </a:pPr>
-            <a:r>
-              <a:rPr lang="en-US" sz="3315" spc="-43">
-                <a:solidFill>
-                  <a:srgbClr val="FFFFFF"/>
-                </a:solidFill>
-                <a:latin typeface="Montaser Arabic"/>
-                <a:ea typeface="Montaser Arabic"/>
-                <a:cs typeface="Montaser Arabic"/>
-                <a:sym typeface="Montaser Arabic"/>
-              </a:rPr>
-              <a:t>Descripción</a:t>
-            </a:r>
-          </a:p>
-          <a:p>
-            <a:pPr algn="ctr">
-              <a:lnSpc>
-                <a:spcPts val="3547"/>
-              </a:lnSpc>
-            </a:pPr>
-          </a:p>
-          <a:p>
-            <a:pPr algn="l">
-              <a:lnSpc>
-                <a:spcPts val="3547"/>
-              </a:lnSpc>
-            </a:pPr>
-            <a:r>
-              <a:rPr lang="en-US" b="true" sz="3315" spc="-43">
-                <a:solidFill>
-                  <a:srgbClr val="FFFFFF"/>
-                </a:solidFill>
-                <a:latin typeface="Montaser Arabic Bold"/>
-                <a:ea typeface="Montaser Arabic Bold"/>
-                <a:cs typeface="Montaser Arabic Bold"/>
-                <a:sym typeface="Montaser Arabic Bold"/>
-              </a:rPr>
-              <a:t>Pedir sin hacer fila</a:t>
-            </a:r>
-          </a:p>
-          <a:p>
-            <a:pPr algn="l">
-              <a:lnSpc>
-                <a:spcPts val="3547"/>
-              </a:lnSpc>
-            </a:pPr>
-          </a:p>
-          <a:p>
-            <a:pPr algn="l">
-              <a:lnSpc>
-                <a:spcPts val="3547"/>
-              </a:lnSpc>
-            </a:pPr>
-            <a:r>
-              <a:rPr lang="en-US" b="true" sz="3315" spc="-43">
-                <a:solidFill>
-                  <a:srgbClr val="FFFFFF"/>
-                </a:solidFill>
-                <a:latin typeface="Montaser Arabic Bold"/>
-                <a:ea typeface="Montaser Arabic Bold"/>
-                <a:cs typeface="Montaser Arabic Bold"/>
-                <a:sym typeface="Montaser Arabic Bold"/>
-              </a:rPr>
-              <a:t>Cocina eficiente</a:t>
-            </a:r>
-          </a:p>
-          <a:p>
-            <a:pPr algn="l">
-              <a:lnSpc>
-                <a:spcPts val="3547"/>
-              </a:lnSpc>
-            </a:pPr>
-          </a:p>
-          <a:p>
-            <a:pPr algn="l">
-              <a:lnSpc>
-                <a:spcPts val="3547"/>
-              </a:lnSpc>
-            </a:pPr>
-            <a:r>
-              <a:rPr lang="en-US" b="true" sz="3315" spc="-43">
-                <a:solidFill>
-                  <a:srgbClr val="FFFFFF"/>
-                </a:solidFill>
-                <a:latin typeface="Montaser Arabic Bold"/>
-                <a:ea typeface="Montaser Arabic Bold"/>
-                <a:cs typeface="Montaser Arabic Bold"/>
-                <a:sym typeface="Montaser Arabic Bold"/>
-              </a:rPr>
-              <a:t/>
-            </a:r>
-          </a:p>
-          <a:p>
-            <a:pPr algn="l">
-              <a:lnSpc>
-                <a:spcPts val="3547"/>
-              </a:lnSpc>
-            </a:pPr>
-          </a:p>
-          <a:p>
-            <a:pPr algn="l">
-              <a:lnSpc>
-                <a:spcPts val="3547"/>
-              </a:lnSpc>
-            </a:pPr>
-            <a:r>
-              <a:rPr lang="en-US" b="true" sz="3315" spc="-43">
-                <a:solidFill>
-                  <a:srgbClr val="FFFFFF"/>
-                </a:solidFill>
-                <a:latin typeface="Montaser Arabic Bold"/>
-                <a:ea typeface="Montaser Arabic Bold"/>
-                <a:cs typeface="Montaser Arabic Bold"/>
-                <a:sym typeface="Montaser Arabic Bold"/>
-              </a:rPr>
-              <a:t>Entrega rápida</a:t>
-            </a:r>
-          </a:p>
-          <a:p>
-            <a:pPr algn="l">
-              <a:lnSpc>
-                <a:spcPts val="3547"/>
-              </a:lnSpc>
-            </a:pPr>
-          </a:p>
-          <a:p>
-            <a:pPr algn="l">
-              <a:lnSpc>
-                <a:spcPts val="3547"/>
-              </a:lnSpc>
-            </a:pPr>
-            <a:r>
-              <a:rPr lang="en-US" b="true" sz="3315" spc="-43">
-                <a:solidFill>
-                  <a:srgbClr val="FFFFFF"/>
-                </a:solidFill>
-                <a:latin typeface="Montaser Arabic Bold"/>
-                <a:ea typeface="Montaser Arabic Bold"/>
-                <a:cs typeface="Montaser Arabic Bold"/>
-                <a:sym typeface="Montaser Arabic Bold"/>
-              </a:rPr>
-              <a:t/>
-            </a:r>
-          </a:p>
-          <a:p>
-            <a:pPr algn="l">
-              <a:lnSpc>
-                <a:spcPts val="3547"/>
-              </a:lnSpc>
-            </a:pPr>
-          </a:p>
-          <a:p>
-            <a:pPr algn="l">
-              <a:lnSpc>
-                <a:spcPts val="3547"/>
-              </a:lnSpc>
-            </a:pPr>
-            <a:r>
-              <a:rPr lang="en-US" b="true" sz="3315" spc="-43">
-                <a:solidFill>
-                  <a:srgbClr val="FFFFFF"/>
-                </a:solidFill>
-                <a:latin typeface="Montaser Arabic Bold"/>
-                <a:ea typeface="Montaser Arabic Bold"/>
-                <a:cs typeface="Montaser Arabic Bold"/>
-                <a:sym typeface="Montaser Arabic Bold"/>
-              </a:rPr>
-              <a:t/>
-            </a:r>
-          </a:p>
-        </p:txBody>
-      </p:sp>
-      <p:sp>
-        <p:nvSpPr>
-          <p:cNvPr name="TextBox 7" id="7"/>
-          <p:cNvSpPr txBox="true"/>
-          <p:nvPr/>
-        </p:nvSpPr>
-        <p:spPr>
-          <a:xfrm rot="0">
-            <a:off x="1341972" y="968935"/>
-            <a:ext cx="13418236" cy="1566544"/>
-          </a:xfrm>
-          <a:prstGeom prst="rect">
-            <a:avLst/>
-          </a:prstGeom>
-        </p:spPr>
-        <p:txBody>
-          <a:bodyPr anchor="t" rtlCol="false" tIns="0" lIns="0" bIns="0" rIns="0">
-            <a:spAutoFit/>
-          </a:bodyPr>
-          <a:lstStyle/>
-          <a:p>
-            <a:pPr algn="ctr">
-              <a:lnSpc>
-                <a:spcPts val="12880"/>
-              </a:lnSpc>
-            </a:pPr>
-            <a:r>
-              <a:rPr lang="en-US" sz="6200" b="true">
-                <a:solidFill>
-                  <a:srgbClr val="FFFFFF"/>
-                </a:solidFill>
-                <a:latin typeface="Open Sans Bold"/>
-                <a:ea typeface="Open Sans Bold"/>
-                <a:cs typeface="Open Sans Bold"/>
-                <a:sym typeface="Open Sans Bold"/>
-              </a:rPr>
-              <a:t>¿Para qué sirve Fadori?</a:t>
-            </a:r>
-          </a:p>
-        </p:txBody>
-      </p:sp>
-    </p:spTree>
-  </p:cSld>
-  <p:clrMapOvr>
-    <a:masterClrMapping/>
-  </p:clrMapOvr>
-</p:sld>
-</file>
-
 <file path=ppt/slides/slide6.xml><?xml version="1.0" encoding="utf-8"?>
 <p:sld xmlns:p="http://schemas.openxmlformats.org/presentationml/2006/main" xmlns:a="http://schemas.openxmlformats.org/drawingml/2006/main" xmlns:r="http://schemas.openxmlformats.org/officeDocument/2006/relationships">
   <p:cSld>
@@ -11690,1234 +6886,6 @@
                 <a:sym typeface="Open Sans Bold"/>
               </a:rPr>
               <a:t> </a:t>
-            </a:r>
-          </a:p>
-        </p:txBody>
-      </p:sp>
-    </p:spTree>
-  </p:cSld>
-  <p:clrMapOvr>
-    <a:masterClrMapping/>
-  </p:clrMapOvr>
-</p:sld>
-</file>
-
-<file path=ppt/slides/slide7.xml><?xml version="1.0" encoding="utf-8"?>
-<p:sld xmlns:p="http://schemas.openxmlformats.org/presentationml/2006/main" xmlns:a="http://schemas.openxmlformats.org/drawingml/2006/main" xmlns:r="http://schemas.openxmlformats.org/officeDocument/2006/relationships">
-  <p:cSld>
-    <p:bg>
-      <p:bgPr>
-        <a:solidFill>
-          <a:srgbClr val="07416B"/>
-        </a:solidFill>
-      </p:bgPr>
-    </p:bg>
-    <p:spTree>
-      <p:nvGrpSpPr>
-        <p:cNvPr id="1" name=""/>
-        <p:cNvGrpSpPr/>
-        <p:nvPr/>
-      </p:nvGrpSpPr>
-      <p:grpSpPr>
-        <a:xfrm>
-          <a:off x="0" y="0"/>
-          <a:ext cx="0" cy="0"/>
-          <a:chOff x="0" y="0"/>
-          <a:chExt cx="0" cy="0"/>
-        </a:xfrm>
-      </p:grpSpPr>
-      <p:sp>
-        <p:nvSpPr>
-          <p:cNvPr name="TextBox 2" id="2"/>
-          <p:cNvSpPr txBox="true"/>
-          <p:nvPr/>
-        </p:nvSpPr>
-        <p:spPr>
-          <a:xfrm rot="0">
-            <a:off x="1737360" y="3108960"/>
-            <a:ext cx="13057632" cy="4572000"/>
-          </a:xfrm>
-          <a:prstGeom prst="rect">
-            <a:avLst/>
-          </a:prstGeom>
-        </p:spPr>
-        <p:txBody>
-          <a:bodyPr anchor="t" rtlCol="false" tIns="0" lIns="0" bIns="0" rIns="0">
-            <a:spAutoFit/>
-          </a:bodyPr>
-          <a:lstStyle/>
-          <a:p>
-            <a:pPr algn="ctr">
-              <a:lnSpc>
-                <a:spcPts val="6985"/>
-              </a:lnSpc>
-              <a:spcBef>
-                <a:spcPct val="0"/>
-              </a:spcBef>
-            </a:pPr>
-          </a:p>
-          <a:p>
-            <a:pPr algn="l">
-              <a:lnSpc>
-                <a:spcPts val="6985"/>
-              </a:lnSpc>
-              <a:spcBef>
-                <a:spcPct val="0"/>
-              </a:spcBef>
-            </a:pPr>
-            <a:r>
-              <a:rPr lang="en-US" b="true" sz="4449">
-                <a:solidFill>
-                  <a:srgbClr val="FFFFFF"/>
-                </a:solidFill>
-                <a:latin typeface="Montaser Arabic Bold"/>
-                <a:ea typeface="Montaser Arabic Bold"/>
-                <a:cs typeface="Montaser Arabic Bold"/>
-                <a:sym typeface="Montaser Arabic Bold"/>
-              </a:rPr>
-              <a:t>Facilitar los pedidos</a:t>
-            </a:r>
-          </a:p>
-          <a:p>
-            <a:pPr algn="l">
-              <a:lnSpc>
-                <a:spcPts val="6985"/>
-              </a:lnSpc>
-              <a:spcBef>
-                <a:spcPct val="0"/>
-              </a:spcBef>
-            </a:pPr>
-          </a:p>
-          <a:p>
-            <a:pPr algn="l">
-              <a:lnSpc>
-                <a:spcPts val="6985"/>
-              </a:lnSpc>
-              <a:spcBef>
-                <a:spcPct val="0"/>
-              </a:spcBef>
-            </a:pPr>
-            <a:r>
-              <a:rPr lang="en-US" b="true" sz="4449">
-                <a:solidFill>
-                  <a:srgbClr val="FFFFFF"/>
-                </a:solidFill>
-                <a:latin typeface="Montaser Arabic Bold"/>
-                <a:ea typeface="Montaser Arabic Bold"/>
-                <a:cs typeface="Montaser Arabic Bold"/>
-                <a:sym typeface="Montaser Arabic Bold"/>
-              </a:rPr>
-              <a:t>Reducir las filas</a:t>
-            </a:r>
-          </a:p>
-          <a:p>
-            <a:pPr algn="l">
-              <a:lnSpc>
-                <a:spcPts val="6985"/>
-              </a:lnSpc>
-              <a:spcBef>
-                <a:spcPct val="0"/>
-              </a:spcBef>
-            </a:pPr>
-          </a:p>
-          <a:p>
-            <a:pPr algn="l">
-              <a:lnSpc>
-                <a:spcPts val="6985"/>
-              </a:lnSpc>
-              <a:spcBef>
-                <a:spcPct val="0"/>
-              </a:spcBef>
-            </a:pPr>
-            <a:r>
-              <a:rPr lang="en-US" b="true" sz="4449">
-                <a:solidFill>
-                  <a:srgbClr val="FFFFFF"/>
-                </a:solidFill>
-                <a:latin typeface="Montaser Arabic Bold"/>
-                <a:ea typeface="Montaser Arabic Bold"/>
-                <a:cs typeface="Montaser Arabic Bold"/>
-                <a:sym typeface="Montaser Arabic Bold"/>
-              </a:rPr>
-              <a:t>Facilitar la supervisión</a:t>
-            </a:r>
-          </a:p>
-          <a:p>
-            <a:pPr algn="l">
-              <a:lnSpc>
-                <a:spcPts val="6985"/>
-              </a:lnSpc>
-              <a:spcBef>
-                <a:spcPct val="0"/>
-              </a:spcBef>
-            </a:pPr>
-          </a:p>
-        </p:txBody>
-      </p:sp>
-      <p:sp>
-        <p:nvSpPr>
-          <p:cNvPr name="TextBox 3" id="3"/>
-          <p:cNvSpPr txBox="true"/>
-          <p:nvPr/>
-        </p:nvSpPr>
-        <p:spPr>
-          <a:xfrm rot="0">
-            <a:off x="1737360" y="1005840"/>
-            <a:ext cx="14813280" cy="1188720"/>
-          </a:xfrm>
-          <a:prstGeom prst="rect">
-            <a:avLst/>
-          </a:prstGeom>
-        </p:spPr>
-        <p:txBody>
-          <a:bodyPr anchor="t" rtlCol="false" tIns="0" lIns="0" bIns="0" rIns="0">
-            <a:spAutoFit/>
-          </a:bodyPr>
-          <a:lstStyle/>
-          <a:p>
-            <a:pPr algn="ctr">
-              <a:lnSpc>
-                <a:spcPts val="12880"/>
-              </a:lnSpc>
-            </a:pPr>
-            <a:r>
-              <a:rPr lang="en-US" sz="6200" b="true">
-                <a:solidFill>
-                  <a:srgbClr val="FFFFFF"/>
-                </a:solidFill>
-                <a:latin typeface="Open Sans Bold"/>
-                <a:ea typeface="Open Sans Bold"/>
-                <a:cs typeface="Open Sans Bold"/>
-                <a:sym typeface="Open Sans Bold"/>
-              </a:rPr>
-              <a:t>Misión STEAM</a:t>
-            </a:r>
-          </a:p>
-        </p:txBody>
-      </p:sp>
-      <p:sp>
-        <p:nvSpPr>
-          <p:cNvPr name="Freeform 4" id="4"/>
-          <p:cNvSpPr/>
-          <p:nvPr/>
-        </p:nvSpPr>
-        <p:spPr>
-          <a:xfrm flipH="false" flipV="false" rot="0">
-            <a:off x="12629093" y="5143500"/>
-            <a:ext cx="5658907" cy="5143500"/>
-          </a:xfrm>
-          <a:custGeom>
-            <a:avLst/>
-            <a:gdLst/>
-            <a:ahLst/>
-            <a:cxnLst/>
-            <a:rect r="r" b="b" t="t" l="l"/>
-            <a:pathLst>
-              <a:path h="5143500" w="5658907">
-                <a:moveTo>
-                  <a:pt x="0" y="0"/>
-                </a:moveTo>
-                <a:lnTo>
-                  <a:pt x="5658907" y="0"/>
-                </a:lnTo>
-                <a:lnTo>
-                  <a:pt x="5658907" y="5143500"/>
-                </a:lnTo>
-                <a:lnTo>
-                  <a:pt x="0" y="5143500"/>
-                </a:lnTo>
-                <a:lnTo>
-                  <a:pt x="0" y="0"/>
-                </a:lnTo>
-                <a:close/>
-              </a:path>
-            </a:pathLst>
-          </a:custGeom>
-          <a:blipFill>
-            <a:blip r:embed="rId2">
-              <a:extLst>
-                <a:ext uri="{96DAC541-7B7A-43D3-8B79-37D633B846F1}">
-                  <asvg:svgBlip xmlns:asvg="http://schemas.microsoft.com/office/drawing/2016/SVG/main" r:embed="rId3"/>
-                </a:ext>
-              </a:extLst>
-            </a:blip>
-            <a:stretch>
-              <a:fillRect l="0" t="-110" r="0" b="-110"/>
-            </a:stretch>
-          </a:blipFill>
-        </p:spPr>
-      </p:sp>
-      <p:sp>
-        <p:nvSpPr>
-          <p:cNvPr name="Freeform 5" id="5"/>
-          <p:cNvSpPr/>
-          <p:nvPr/>
-        </p:nvSpPr>
-        <p:spPr>
-          <a:xfrm flipH="false" flipV="true" rot="-5400000">
-            <a:off x="1526191" y="-1466126"/>
-            <a:ext cx="2794159" cy="5846531"/>
-          </a:xfrm>
-          <a:custGeom>
-            <a:avLst/>
-            <a:gdLst/>
-            <a:ahLst/>
-            <a:cxnLst/>
-            <a:rect r="r" b="b" t="t" l="l"/>
-            <a:pathLst>
-              <a:path h="5846531" w="2794159">
-                <a:moveTo>
-                  <a:pt x="0" y="5846531"/>
-                </a:moveTo>
-                <a:lnTo>
-                  <a:pt x="2794159" y="5846531"/>
-                </a:lnTo>
-                <a:lnTo>
-                  <a:pt x="2794159" y="0"/>
-                </a:lnTo>
-                <a:lnTo>
-                  <a:pt x="0" y="0"/>
-                </a:lnTo>
-                <a:lnTo>
-                  <a:pt x="0" y="5846531"/>
-                </a:lnTo>
-                <a:close/>
-              </a:path>
-            </a:pathLst>
-          </a:custGeom>
-          <a:blipFill>
-            <a:blip r:embed="rId4">
-              <a:extLst>
-                <a:ext uri="{96DAC541-7B7A-43D3-8B79-37D633B846F1}">
-                  <asvg:svgBlip xmlns:asvg="http://schemas.microsoft.com/office/drawing/2016/SVG/main" r:embed="rId5"/>
-                </a:ext>
-              </a:extLst>
-            </a:blip>
-            <a:stretch>
-              <a:fillRect l="-95" t="0" r="-95" b="0"/>
-            </a:stretch>
-          </a:blipFill>
-        </p:spPr>
-      </p:sp>
-      <p:sp>
-        <p:nvSpPr>
-          <p:cNvPr name="Freeform 6" id="6"/>
-          <p:cNvSpPr/>
-          <p:nvPr/>
-        </p:nvSpPr>
-        <p:spPr>
-          <a:xfrm flipH="false" flipV="false" rot="5400000">
-            <a:off x="15158276" y="1415224"/>
-            <a:ext cx="4527366" cy="1011107"/>
-          </a:xfrm>
-          <a:custGeom>
-            <a:avLst/>
-            <a:gdLst/>
-            <a:ahLst/>
-            <a:cxnLst/>
-            <a:rect r="r" b="b" t="t" l="l"/>
-            <a:pathLst>
-              <a:path h="1011107" w="4527366">
-                <a:moveTo>
-                  <a:pt x="0" y="0"/>
-                </a:moveTo>
-                <a:lnTo>
-                  <a:pt x="4527365" y="0"/>
-                </a:lnTo>
-                <a:lnTo>
-                  <a:pt x="4527365" y="1011108"/>
-                </a:lnTo>
-                <a:lnTo>
-                  <a:pt x="0" y="1011108"/>
-                </a:lnTo>
-                <a:lnTo>
-                  <a:pt x="0" y="0"/>
-                </a:lnTo>
-                <a:close/>
-              </a:path>
-            </a:pathLst>
-          </a:custGeom>
-          <a:blipFill>
-            <a:blip r:embed="rId6">
-              <a:extLst>
-                <a:ext uri="{96DAC541-7B7A-43D3-8B79-37D633B846F1}">
-                  <asvg:svgBlip xmlns:asvg="http://schemas.microsoft.com/office/drawing/2016/SVG/main" r:embed="rId7"/>
-                </a:ext>
-              </a:extLst>
-            </a:blip>
-            <a:stretch>
-              <a:fillRect l="0" t="-325" r="0" b="-326"/>
-            </a:stretch>
-          </a:blipFill>
-        </p:spPr>
-      </p:sp>
-    </p:spTree>
-  </p:cSld>
-  <p:clrMapOvr>
-    <a:masterClrMapping/>
-  </p:clrMapOvr>
-</p:sld>
-</file>
-
-<file path=ppt/slides/slide8.xml><?xml version="1.0" encoding="utf-8"?>
-<p:sld xmlns:p="http://schemas.openxmlformats.org/presentationml/2006/main" xmlns:a="http://schemas.openxmlformats.org/drawingml/2006/main" xmlns:r="http://schemas.openxmlformats.org/officeDocument/2006/relationships">
-  <p:cSld>
-    <p:bg>
-      <p:bgPr>
-        <a:solidFill>
-          <a:srgbClr val="07416B"/>
-        </a:solidFill>
-      </p:bgPr>
-    </p:bg>
-    <p:spTree>
-      <p:nvGrpSpPr>
-        <p:cNvPr id="1" name=""/>
-        <p:cNvGrpSpPr/>
-        <p:nvPr/>
-      </p:nvGrpSpPr>
-      <p:grpSpPr>
-        <a:xfrm>
-          <a:off x="0" y="0"/>
-          <a:ext cx="0" cy="0"/>
-          <a:chOff x="0" y="0"/>
-          <a:chExt cx="0" cy="0"/>
-        </a:xfrm>
-      </p:grpSpPr>
-      <p:sp>
-        <p:nvSpPr>
-          <p:cNvPr name="Freeform 2" id="2"/>
-          <p:cNvSpPr/>
-          <p:nvPr/>
-        </p:nvSpPr>
-        <p:spPr>
-          <a:xfrm flipH="false" flipV="false" rot="0">
-            <a:off x="12629093" y="5143500"/>
-            <a:ext cx="5658907" cy="5143500"/>
-          </a:xfrm>
-          <a:custGeom>
-            <a:avLst/>
-            <a:gdLst/>
-            <a:ahLst/>
-            <a:cxnLst/>
-            <a:rect r="r" b="b" t="t" l="l"/>
-            <a:pathLst>
-              <a:path h="5143500" w="5658907">
-                <a:moveTo>
-                  <a:pt x="0" y="0"/>
-                </a:moveTo>
-                <a:lnTo>
-                  <a:pt x="5658907" y="0"/>
-                </a:lnTo>
-                <a:lnTo>
-                  <a:pt x="5658907" y="5143500"/>
-                </a:lnTo>
-                <a:lnTo>
-                  <a:pt x="0" y="5143500"/>
-                </a:lnTo>
-                <a:lnTo>
-                  <a:pt x="0" y="0"/>
-                </a:lnTo>
-                <a:close/>
-              </a:path>
-            </a:pathLst>
-          </a:custGeom>
-          <a:blipFill>
-            <a:blip r:embed="rId2">
-              <a:extLst>
-                <a:ext uri="{96DAC541-7B7A-43D3-8B79-37D633B846F1}">
-                  <asvg:svgBlip xmlns:asvg="http://schemas.microsoft.com/office/drawing/2016/SVG/main" r:embed="rId3"/>
-                </a:ext>
-              </a:extLst>
-            </a:blip>
-            <a:stretch>
-              <a:fillRect l="0" t="-110" r="0" b="-110"/>
-            </a:stretch>
-          </a:blipFill>
-        </p:spPr>
-      </p:sp>
-      <p:sp>
-        <p:nvSpPr>
-          <p:cNvPr name="Freeform 3" id="3"/>
-          <p:cNvSpPr/>
-          <p:nvPr/>
-        </p:nvSpPr>
-        <p:spPr>
-          <a:xfrm flipH="false" flipV="true" rot="-5400000">
-            <a:off x="1526191" y="-1466126"/>
-            <a:ext cx="2794159" cy="5846531"/>
-          </a:xfrm>
-          <a:custGeom>
-            <a:avLst/>
-            <a:gdLst/>
-            <a:ahLst/>
-            <a:cxnLst/>
-            <a:rect r="r" b="b" t="t" l="l"/>
-            <a:pathLst>
-              <a:path h="5846531" w="2794159">
-                <a:moveTo>
-                  <a:pt x="0" y="5846531"/>
-                </a:moveTo>
-                <a:lnTo>
-                  <a:pt x="2794159" y="5846531"/>
-                </a:lnTo>
-                <a:lnTo>
-                  <a:pt x="2794159" y="0"/>
-                </a:lnTo>
-                <a:lnTo>
-                  <a:pt x="0" y="0"/>
-                </a:lnTo>
-                <a:lnTo>
-                  <a:pt x="0" y="5846531"/>
-                </a:lnTo>
-                <a:close/>
-              </a:path>
-            </a:pathLst>
-          </a:custGeom>
-          <a:blipFill>
-            <a:blip r:embed="rId4">
-              <a:extLst>
-                <a:ext uri="{96DAC541-7B7A-43D3-8B79-37D633B846F1}">
-                  <asvg:svgBlip xmlns:asvg="http://schemas.microsoft.com/office/drawing/2016/SVG/main" r:embed="rId5"/>
-                </a:ext>
-              </a:extLst>
-            </a:blip>
-            <a:stretch>
-              <a:fillRect l="-95" t="0" r="-95" b="0"/>
-            </a:stretch>
-          </a:blipFill>
-        </p:spPr>
-      </p:sp>
-      <p:sp>
-        <p:nvSpPr>
-          <p:cNvPr name="Freeform 4" id="4"/>
-          <p:cNvSpPr/>
-          <p:nvPr/>
-        </p:nvSpPr>
-        <p:spPr>
-          <a:xfrm flipH="false" flipV="false" rot="5400000">
-            <a:off x="-1453324" y="8044625"/>
-            <a:ext cx="4527366" cy="1011107"/>
-          </a:xfrm>
-          <a:custGeom>
-            <a:avLst/>
-            <a:gdLst/>
-            <a:ahLst/>
-            <a:cxnLst/>
-            <a:rect r="r" b="b" t="t" l="l"/>
-            <a:pathLst>
-              <a:path h="1011107" w="4527366">
-                <a:moveTo>
-                  <a:pt x="0" y="0"/>
-                </a:moveTo>
-                <a:lnTo>
-                  <a:pt x="4527365" y="0"/>
-                </a:lnTo>
-                <a:lnTo>
-                  <a:pt x="4527365" y="1011107"/>
-                </a:lnTo>
-                <a:lnTo>
-                  <a:pt x="0" y="1011107"/>
-                </a:lnTo>
-                <a:lnTo>
-                  <a:pt x="0" y="0"/>
-                </a:lnTo>
-                <a:close/>
-              </a:path>
-            </a:pathLst>
-          </a:custGeom>
-          <a:blipFill>
-            <a:blip r:embed="rId6">
-              <a:extLst>
-                <a:ext uri="{96DAC541-7B7A-43D3-8B79-37D633B846F1}">
-                  <asvg:svgBlip xmlns:asvg="http://schemas.microsoft.com/office/drawing/2016/SVG/main" r:embed="rId7"/>
-                </a:ext>
-              </a:extLst>
-            </a:blip>
-            <a:stretch>
-              <a:fillRect l="0" t="-325" r="0" b="-326"/>
-            </a:stretch>
-          </a:blipFill>
-        </p:spPr>
-      </p:sp>
-      <p:sp>
-        <p:nvSpPr>
-          <p:cNvPr name="Freeform 5" id="5"/>
-          <p:cNvSpPr/>
-          <p:nvPr/>
-        </p:nvSpPr>
-        <p:spPr>
-          <a:xfrm flipH="false" flipV="false" rot="5400000">
-            <a:off x="15158276" y="1415224"/>
-            <a:ext cx="4527366" cy="1011107"/>
-          </a:xfrm>
-          <a:custGeom>
-            <a:avLst/>
-            <a:gdLst/>
-            <a:ahLst/>
-            <a:cxnLst/>
-            <a:rect r="r" b="b" t="t" l="l"/>
-            <a:pathLst>
-              <a:path h="1011107" w="4527366">
-                <a:moveTo>
-                  <a:pt x="0" y="0"/>
-                </a:moveTo>
-                <a:lnTo>
-                  <a:pt x="4527365" y="0"/>
-                </a:lnTo>
-                <a:lnTo>
-                  <a:pt x="4527365" y="1011108"/>
-                </a:lnTo>
-                <a:lnTo>
-                  <a:pt x="0" y="1011108"/>
-                </a:lnTo>
-                <a:lnTo>
-                  <a:pt x="0" y="0"/>
-                </a:lnTo>
-                <a:close/>
-              </a:path>
-            </a:pathLst>
-          </a:custGeom>
-          <a:blipFill>
-            <a:blip r:embed="rId6">
-              <a:extLst>
-                <a:ext uri="{96DAC541-7B7A-43D3-8B79-37D633B846F1}">
-                  <asvg:svgBlip xmlns:asvg="http://schemas.microsoft.com/office/drawing/2016/SVG/main" r:embed="rId7"/>
-                </a:ext>
-              </a:extLst>
-            </a:blip>
-            <a:stretch>
-              <a:fillRect l="0" t="-325" r="0" b="-326"/>
-            </a:stretch>
-          </a:blipFill>
-        </p:spPr>
-      </p:sp>
-      <p:sp>
-        <p:nvSpPr>
-          <p:cNvPr name="TextBox 6" id="6"/>
-          <p:cNvSpPr txBox="true"/>
-          <p:nvPr/>
-        </p:nvSpPr>
-        <p:spPr>
-          <a:xfrm rot="0">
-            <a:off x="1737360" y="1005840"/>
-            <a:ext cx="14813280" cy="1188720"/>
-          </a:xfrm>
-          <a:prstGeom prst="rect">
-            <a:avLst/>
-          </a:prstGeom>
-        </p:spPr>
-        <p:txBody>
-          <a:bodyPr anchor="t" rtlCol="false" tIns="0" lIns="0" bIns="0" rIns="0">
-            <a:spAutoFit/>
-          </a:bodyPr>
-          <a:lstStyle/>
-          <a:p>
-            <a:pPr algn="ctr">
-              <a:lnSpc>
-                <a:spcPts val="12880"/>
-              </a:lnSpc>
-            </a:pPr>
-            <a:r>
-              <a:rPr lang="en-US" sz="6200" b="true">
-                <a:solidFill>
-                  <a:srgbClr val="FFFFFF"/>
-                </a:solidFill>
-                <a:latin typeface="Open Sans Bold"/>
-                <a:ea typeface="Open Sans Bold"/>
-                <a:cs typeface="Open Sans Bold"/>
-                <a:sym typeface="Open Sans Bold"/>
-              </a:rPr>
-              <a:t>Visión STEAM</a:t>
-            </a:r>
-          </a:p>
-        </p:txBody>
-      </p:sp>
-      <p:sp>
-        <p:nvSpPr>
-          <p:cNvPr name="TextBox 7" id="7"/>
-          <p:cNvSpPr txBox="true"/>
-          <p:nvPr/>
-        </p:nvSpPr>
-        <p:spPr>
-          <a:xfrm rot="0">
-            <a:off x="2432304" y="3291840"/>
-            <a:ext cx="14164056" cy="2377440"/>
-          </a:xfrm>
-          <a:prstGeom prst="rect">
-            <a:avLst/>
-          </a:prstGeom>
-        </p:spPr>
-        <p:txBody>
-          <a:bodyPr anchor="t" rtlCol="false" tIns="0" lIns="0" bIns="0" rIns="0">
-            <a:spAutoFit/>
-          </a:bodyPr>
-          <a:lstStyle/>
-          <a:p>
-            <a:pPr algn="ctr">
-              <a:lnSpc>
-                <a:spcPts val="8854"/>
-              </a:lnSpc>
-            </a:pPr>
-            <a:r>
-              <a:rPr lang="en-US" b="true" sz="4449">
-                <a:solidFill>
-                  <a:srgbClr val="FFFFFF"/>
-                </a:solidFill>
-                <a:latin typeface="Montaser Arabic Bold"/>
-                <a:ea typeface="Montaser Arabic Bold"/>
-                <a:cs typeface="Montaser Arabic Bold"/>
-                <a:sym typeface="Montaser Arabic Bold"/>
-              </a:rPr>
-              <a:t>Que ninguna cafetería escolar vuelva a necesitar filas.</a:t>
-            </a:r>
-          </a:p>
-        </p:txBody>
-      </p:sp>
-    </p:spTree>
-  </p:cSld>
-  <p:clrMapOvr>
-    <a:masterClrMapping/>
-  </p:clrMapOvr>
-</p:sld>
-</file>
-
-<file path=ppt/slides/slide9.xml><?xml version="1.0" encoding="utf-8"?>
-<p:sld xmlns:p="http://schemas.openxmlformats.org/presentationml/2006/main" xmlns:a="http://schemas.openxmlformats.org/drawingml/2006/main" xmlns:r="http://schemas.openxmlformats.org/officeDocument/2006/relationships">
-  <p:cSld>
-    <p:bg>
-      <p:bgPr>
-        <a:solidFill>
-          <a:srgbClr val="07416B"/>
-        </a:solidFill>
-      </p:bgPr>
-    </p:bg>
-    <p:spTree>
-      <p:nvGrpSpPr>
-        <p:cNvPr id="1" name=""/>
-        <p:cNvGrpSpPr/>
-        <p:nvPr/>
-      </p:nvGrpSpPr>
-      <p:grpSpPr>
-        <a:xfrm>
-          <a:off x="0" y="0"/>
-          <a:ext cx="0" cy="0"/>
-          <a:chOff x="0" y="0"/>
-          <a:chExt cx="0" cy="0"/>
-        </a:xfrm>
-      </p:grpSpPr>
-      <p:sp>
-        <p:nvSpPr>
-          <p:cNvPr name="Freeform 2" id="2"/>
-          <p:cNvSpPr/>
-          <p:nvPr/>
-        </p:nvSpPr>
-        <p:spPr>
-          <a:xfrm flipH="false" flipV="false" rot="0">
-            <a:off x="12629093" y="5143500"/>
-            <a:ext cx="5658907" cy="5143500"/>
-          </a:xfrm>
-          <a:custGeom>
-            <a:avLst/>
-            <a:gdLst/>
-            <a:ahLst/>
-            <a:cxnLst/>
-            <a:rect r="r" b="b" t="t" l="l"/>
-            <a:pathLst>
-              <a:path h="5143500" w="5658907">
-                <a:moveTo>
-                  <a:pt x="0" y="0"/>
-                </a:moveTo>
-                <a:lnTo>
-                  <a:pt x="5658907" y="0"/>
-                </a:lnTo>
-                <a:lnTo>
-                  <a:pt x="5658907" y="5143500"/>
-                </a:lnTo>
-                <a:lnTo>
-                  <a:pt x="0" y="5143500"/>
-                </a:lnTo>
-                <a:lnTo>
-                  <a:pt x="0" y="0"/>
-                </a:lnTo>
-                <a:close/>
-              </a:path>
-            </a:pathLst>
-          </a:custGeom>
-          <a:blipFill>
-            <a:blip r:embed="rId2">
-              <a:extLst>
-                <a:ext uri="{96DAC541-7B7A-43D3-8B79-37D633B846F1}">
-                  <asvg:svgBlip xmlns:asvg="http://schemas.microsoft.com/office/drawing/2016/SVG/main" r:embed="rId3"/>
-                </a:ext>
-              </a:extLst>
-            </a:blip>
-            <a:stretch>
-              <a:fillRect l="0" t="-110" r="0" b="-110"/>
-            </a:stretch>
-          </a:blipFill>
-        </p:spPr>
-      </p:sp>
-      <p:sp>
-        <p:nvSpPr>
-          <p:cNvPr name="Freeform 3" id="3"/>
-          <p:cNvSpPr/>
-          <p:nvPr/>
-        </p:nvSpPr>
-        <p:spPr>
-          <a:xfrm flipH="false" flipV="true" rot="-5400000">
-            <a:off x="1526191" y="-1466126"/>
-            <a:ext cx="2794159" cy="5846531"/>
-          </a:xfrm>
-          <a:custGeom>
-            <a:avLst/>
-            <a:gdLst/>
-            <a:ahLst/>
-            <a:cxnLst/>
-            <a:rect r="r" b="b" t="t" l="l"/>
-            <a:pathLst>
-              <a:path h="5846531" w="2794159">
-                <a:moveTo>
-                  <a:pt x="0" y="5846531"/>
-                </a:moveTo>
-                <a:lnTo>
-                  <a:pt x="2794159" y="5846531"/>
-                </a:lnTo>
-                <a:lnTo>
-                  <a:pt x="2794159" y="0"/>
-                </a:lnTo>
-                <a:lnTo>
-                  <a:pt x="0" y="0"/>
-                </a:lnTo>
-                <a:lnTo>
-                  <a:pt x="0" y="5846531"/>
-                </a:lnTo>
-                <a:close/>
-              </a:path>
-            </a:pathLst>
-          </a:custGeom>
-          <a:blipFill>
-            <a:blip r:embed="rId4">
-              <a:extLst>
-                <a:ext uri="{96DAC541-7B7A-43D3-8B79-37D633B846F1}">
-                  <asvg:svgBlip xmlns:asvg="http://schemas.microsoft.com/office/drawing/2016/SVG/main" r:embed="rId5"/>
-                </a:ext>
-              </a:extLst>
-            </a:blip>
-            <a:stretch>
-              <a:fillRect l="-95" t="0" r="-95" b="0"/>
-            </a:stretch>
-          </a:blipFill>
-        </p:spPr>
-      </p:sp>
-      <p:sp>
-        <p:nvSpPr>
-          <p:cNvPr name="Freeform 4" id="4"/>
-          <p:cNvSpPr/>
-          <p:nvPr/>
-        </p:nvSpPr>
-        <p:spPr>
-          <a:xfrm flipH="false" flipV="false" rot="5400000">
-            <a:off x="-1453324" y="8044625"/>
-            <a:ext cx="4527366" cy="1011107"/>
-          </a:xfrm>
-          <a:custGeom>
-            <a:avLst/>
-            <a:gdLst/>
-            <a:ahLst/>
-            <a:cxnLst/>
-            <a:rect r="r" b="b" t="t" l="l"/>
-            <a:pathLst>
-              <a:path h="1011107" w="4527366">
-                <a:moveTo>
-                  <a:pt x="0" y="0"/>
-                </a:moveTo>
-                <a:lnTo>
-                  <a:pt x="4527365" y="0"/>
-                </a:lnTo>
-                <a:lnTo>
-                  <a:pt x="4527365" y="1011107"/>
-                </a:lnTo>
-                <a:lnTo>
-                  <a:pt x="0" y="1011107"/>
-                </a:lnTo>
-                <a:lnTo>
-                  <a:pt x="0" y="0"/>
-                </a:lnTo>
-                <a:close/>
-              </a:path>
-            </a:pathLst>
-          </a:custGeom>
-          <a:blipFill>
-            <a:blip r:embed="rId6">
-              <a:extLst>
-                <a:ext uri="{96DAC541-7B7A-43D3-8B79-37D633B846F1}">
-                  <asvg:svgBlip xmlns:asvg="http://schemas.microsoft.com/office/drawing/2016/SVG/main" r:embed="rId7"/>
-                </a:ext>
-              </a:extLst>
-            </a:blip>
-            <a:stretch>
-              <a:fillRect l="0" t="-325" r="0" b="-326"/>
-            </a:stretch>
-          </a:blipFill>
-        </p:spPr>
-      </p:sp>
-      <p:sp>
-        <p:nvSpPr>
-          <p:cNvPr name="Freeform 5" id="5"/>
-          <p:cNvSpPr/>
-          <p:nvPr/>
-        </p:nvSpPr>
-        <p:spPr>
-          <a:xfrm flipH="false" flipV="false" rot="5400000">
-            <a:off x="15676776" y="1086040"/>
-            <a:ext cx="3679681" cy="821792"/>
-          </a:xfrm>
-          <a:custGeom>
-            <a:avLst/>
-            <a:gdLst/>
-            <a:ahLst/>
-            <a:cxnLst/>
-            <a:rect r="r" b="b" t="t" l="l"/>
-            <a:pathLst>
-              <a:path h="821792" w="3679681">
-                <a:moveTo>
-                  <a:pt x="0" y="0"/>
-                </a:moveTo>
-                <a:lnTo>
-                  <a:pt x="3679681" y="0"/>
-                </a:lnTo>
-                <a:lnTo>
-                  <a:pt x="3679681" y="821792"/>
-                </a:lnTo>
-                <a:lnTo>
-                  <a:pt x="0" y="821792"/>
-                </a:lnTo>
-                <a:lnTo>
-                  <a:pt x="0" y="0"/>
-                </a:lnTo>
-                <a:close/>
-              </a:path>
-            </a:pathLst>
-          </a:custGeom>
-          <a:blipFill>
-            <a:blip r:embed="rId6">
-              <a:extLst>
-                <a:ext uri="{96DAC541-7B7A-43D3-8B79-37D633B846F1}">
-                  <asvg:svgBlip xmlns:asvg="http://schemas.microsoft.com/office/drawing/2016/SVG/main" r:embed="rId7"/>
-                </a:ext>
-              </a:extLst>
-            </a:blip>
-            <a:stretch>
-              <a:fillRect l="0" t="-325" r="0" b="-326"/>
-            </a:stretch>
-          </a:blipFill>
-        </p:spPr>
-      </p:sp>
-      <p:sp>
-        <p:nvSpPr>
-          <p:cNvPr name="TextBox 6" id="6"/>
-          <p:cNvSpPr txBox="true"/>
-          <p:nvPr/>
-        </p:nvSpPr>
-        <p:spPr>
-          <a:xfrm rot="0">
-            <a:off x="1737360" y="731520"/>
-            <a:ext cx="14813280" cy="1188720"/>
-          </a:xfrm>
-          <a:prstGeom prst="rect">
-            <a:avLst/>
-          </a:prstGeom>
-        </p:spPr>
-        <p:txBody>
-          <a:bodyPr anchor="t" rtlCol="false" tIns="0" lIns="0" bIns="0" rIns="0">
-            <a:spAutoFit/>
-          </a:bodyPr>
-          <a:lstStyle/>
-          <a:p>
-            <a:pPr algn="ctr">
-              <a:lnSpc>
-                <a:spcPts val="12880"/>
-              </a:lnSpc>
-            </a:pPr>
-            <a:r>
-              <a:rPr lang="en-US" sz="6200" b="true">
-                <a:solidFill>
-                  <a:srgbClr val="FFFFFF"/>
-                </a:solidFill>
-                <a:latin typeface="Open Sans Bold"/>
-                <a:ea typeface="Open Sans Bold"/>
-                <a:cs typeface="Open Sans Bold"/>
-                <a:sym typeface="Open Sans Bold"/>
-              </a:rPr>
-              <a:t>Propósito general</a:t>
-            </a:r>
-          </a:p>
-        </p:txBody>
-      </p:sp>
-      <p:sp>
-        <p:nvSpPr>
-          <p:cNvPr name="TextBox 7" id="7"/>
-          <p:cNvSpPr txBox="true"/>
-          <p:nvPr/>
-        </p:nvSpPr>
-        <p:spPr>
-          <a:xfrm rot="0">
-            <a:off x="3291840" y="8046720"/>
-            <a:ext cx="11887200" cy="1280160"/>
-          </a:xfrm>
-          <a:prstGeom prst="rect">
-            <a:avLst/>
-          </a:prstGeom>
-        </p:spPr>
-        <p:txBody>
-          <a:bodyPr anchor="t" rtlCol="false" tIns="0" lIns="0" bIns="0" rIns="0">
-            <a:spAutoFit/>
-          </a:bodyPr>
-          <a:lstStyle/>
-          <a:p>
-            <a:pPr algn="ctr">
-              <a:lnSpc>
-                <a:spcPts val="4759"/>
-              </a:lnSpc>
-              <a:spcBef>
-                <a:spcPct val="0"/>
-              </a:spcBef>
-            </a:pPr>
-            <a:r>
-              <a:rPr lang="en-US" b="true" sz="3399" i="true">
-                <a:solidFill>
-                  <a:srgbClr val="FFFFFF"/>
-                </a:solidFill>
-                <a:latin typeface="Open Sans Bold Italics"/>
-                <a:ea typeface="Open Sans Bold Italics"/>
-                <a:cs typeface="Open Sans Bold Italics"/>
-                <a:sym typeface="Open Sans Bold Italics"/>
-              </a:rPr>
-              <a:t>Menos espera, más eficiencia, mejor experiencia</a:t>
-            </a:r>
-          </a:p>
-          <a:p>
-            <a:pPr algn="ctr">
-              <a:lnSpc>
-                <a:spcPts val="4759"/>
-              </a:lnSpc>
-              <a:spcBef>
-                <a:spcPct val="0"/>
-              </a:spcBef>
-            </a:pPr>
-            <a:r>
-              <a:rPr lang="en-US" sz="3399">
-                <a:solidFill>
-                  <a:srgbClr val="FFFFFF"/>
-                </a:solidFill>
-                <a:latin typeface="Open Sans"/>
-                <a:ea typeface="Open Sans"/>
-                <a:cs typeface="Open Sans"/>
-                <a:sym typeface="Open Sans"/>
-              </a:rPr>
-              <a:t/>
-            </a:r>
-          </a:p>
-        </p:txBody>
-      </p:sp>
-      <p:sp>
-        <p:nvSpPr>
-          <p:cNvPr name="TextBox 8" id="8"/>
-          <p:cNvSpPr txBox="true"/>
-          <p:nvPr/>
-        </p:nvSpPr>
-        <p:spPr>
-          <a:xfrm rot="0">
-            <a:off x="5120640" y="4892040"/>
-            <a:ext cx="10058400" cy="868680"/>
-          </a:xfrm>
-          <a:prstGeom prst="rect">
-            <a:avLst/>
-          </a:prstGeom>
-        </p:spPr>
-        <p:txBody>
-          <a:bodyPr anchor="t" rtlCol="false" tIns="0" lIns="0" bIns="0" rIns="0">
-            <a:spAutoFit/>
-          </a:bodyPr>
-          <a:lstStyle/>
-          <a:p>
-            <a:pPr algn="l">
-              <a:lnSpc>
-                <a:spcPts val="4759"/>
-              </a:lnSpc>
-            </a:pPr>
-            <a:r>
-              <a:rPr lang="en-US" sz="3399">
-                <a:solidFill>
-                  <a:srgbClr val="FFFFFF"/>
-                </a:solidFill>
-                <a:latin typeface="Open Sans"/>
-                <a:ea typeface="Open Sans"/>
-                <a:cs typeface="Open Sans"/>
-                <a:sym typeface="Open Sans"/>
-              </a:rPr>
-              <a:t/>
-            </a:r>
-          </a:p>
-          <a:p>
-            <a:pPr algn="l">
-              <a:lnSpc>
-                <a:spcPts val="4759"/>
-              </a:lnSpc>
-              <a:spcBef>
-                <a:spcPct val="0"/>
-              </a:spcBef>
-            </a:pPr>
-            <a:r>
-              <a:rPr lang="en-US" sz="3399">
-                <a:solidFill>
-                  <a:srgbClr val="FFFFFF"/>
-                </a:solidFill>
-                <a:latin typeface="Open Sans"/>
-                <a:ea typeface="Open Sans"/>
-                <a:cs typeface="Open Sans"/>
-                <a:sym typeface="Open Sans"/>
-              </a:rPr>
-              <a:t>🎯 Pedidos automatizados</a:t>
-            </a:r>
-          </a:p>
-        </p:txBody>
-      </p:sp>
-      <p:sp>
-        <p:nvSpPr>
-          <p:cNvPr name="TextBox 9" id="9"/>
-          <p:cNvSpPr txBox="true"/>
-          <p:nvPr/>
-        </p:nvSpPr>
-        <p:spPr>
-          <a:xfrm rot="0">
-            <a:off x="10276782" y="5662925"/>
-            <a:ext cx="6894110" cy="1780540"/>
-          </a:xfrm>
-          <a:prstGeom prst="rect">
-            <a:avLst/>
-          </a:prstGeom>
-        </p:spPr>
-        <p:txBody>
-          <a:bodyPr anchor="t" rtlCol="false" tIns="0" lIns="0" bIns="0" rIns="0">
-            <a:spAutoFit/>
-          </a:bodyPr>
-          <a:lstStyle/>
-          <a:p>
-            <a:pPr algn="ctr">
-              <a:lnSpc>
-                <a:spcPts val="4759"/>
-              </a:lnSpc>
-            </a:pPr>
-            <a:r>
-              <a:rPr lang="en-US" sz="3399">
-                <a:solidFill>
-                  <a:srgbClr val="FFFFFF"/>
-                </a:solidFill>
-                <a:latin typeface="Open Sans"/>
-                <a:ea typeface="Open Sans"/>
-                <a:cs typeface="Open Sans"/>
-                <a:sym typeface="Open Sans"/>
-              </a:rPr>
-              <a:t/>
-            </a:r>
-          </a:p>
-          <a:p>
-            <a:pPr algn="ctr">
-              <a:lnSpc>
-                <a:spcPts val="4759"/>
-              </a:lnSpc>
-              <a:spcBef>
-                <a:spcPct val="0"/>
-              </a:spcBef>
-            </a:pPr>
-          </a:p>
-        </p:txBody>
-      </p:sp>
-      <p:sp>
-        <p:nvSpPr>
-          <p:cNvPr name="TextBox 10" id="10"/>
-          <p:cNvSpPr txBox="true"/>
-          <p:nvPr/>
-        </p:nvSpPr>
-        <p:spPr>
-          <a:xfrm rot="0">
-            <a:off x="5120640" y="6309360"/>
-            <a:ext cx="10058400" cy="868680"/>
-          </a:xfrm>
-          <a:prstGeom prst="rect">
-            <a:avLst/>
-          </a:prstGeom>
-        </p:spPr>
-        <p:txBody>
-          <a:bodyPr anchor="t" rtlCol="false" tIns="0" lIns="0" bIns="0" rIns="0">
-            <a:spAutoFit/>
-          </a:bodyPr>
-          <a:lstStyle/>
-          <a:p>
-            <a:pPr algn="l">
-              <a:lnSpc>
-                <a:spcPts val="4759"/>
-              </a:lnSpc>
-              <a:spcBef>
-                <a:spcPct val="0"/>
-              </a:spcBef>
-            </a:pPr>
-            <a:r>
-              <a:rPr lang="en-US" sz="3399">
-                <a:solidFill>
-                  <a:srgbClr val="FFFFFF"/>
-                </a:solidFill>
-                <a:latin typeface="Open Sans"/>
-                <a:ea typeface="Open Sans"/>
-                <a:cs typeface="Open Sans"/>
-                <a:sym typeface="Open Sans"/>
-              </a:rPr>
-              <a:t>📱 Web y móvil</a:t>
-            </a:r>
-          </a:p>
-        </p:txBody>
-      </p:sp>
-      <p:sp>
-        <p:nvSpPr>
-          <p:cNvPr name="TextBox 11" id="11"/>
-          <p:cNvSpPr txBox="true"/>
-          <p:nvPr/>
-        </p:nvSpPr>
-        <p:spPr>
-          <a:xfrm rot="0">
-            <a:off x="5120640" y="3474720"/>
-            <a:ext cx="10058400" cy="868680"/>
-          </a:xfrm>
-          <a:prstGeom prst="rect">
-            <a:avLst/>
-          </a:prstGeom>
-        </p:spPr>
-        <p:txBody>
-          <a:bodyPr anchor="t" rtlCol="false" tIns="0" lIns="0" bIns="0" rIns="0">
-            <a:spAutoFit/>
-          </a:bodyPr>
-          <a:lstStyle/>
-          <a:p>
-            <a:pPr algn="l">
-              <a:lnSpc>
-                <a:spcPts val="5675"/>
-              </a:lnSpc>
-              <a:spcBef>
-                <a:spcPct val="0"/>
-              </a:spcBef>
-            </a:pPr>
-            <a:r>
-              <a:rPr lang="en-US" sz="3300">
-                <a:solidFill>
-                  <a:srgbClr val="FFFFFF"/>
-                </a:solidFill>
-                <a:latin typeface="Open Sans"/>
-                <a:ea typeface="Open Sans"/>
-                <a:cs typeface="Open Sans"/>
-                <a:sym typeface="Open Sans"/>
-              </a:rPr>
-              <a:t>✨ Solución digital</a:t>
             </a:r>
           </a:p>
         </p:txBody>
